--- a/企画/企画書.pptx
+++ b/企画/企画書.pptx
@@ -2,10 +2,14 @@
 <file path=ppt/presentation.xml><?xml version="1.0" encoding="utf-8"?>
 <p:presentation xmlns:a="http://schemas.openxmlformats.org/drawingml/2006/main" xmlns:r="http://schemas.openxmlformats.org/officeDocument/2006/relationships" xmlns:p="http://schemas.openxmlformats.org/presentationml/2006/main" saveSubsetFonts="1">
   <p:sldMasterIdLst>
-    <p:sldMasterId id="2147483648" r:id="rId1"/>
+    <p:sldMasterId id="2147483696" r:id="rId4"/>
   </p:sldMasterIdLst>
   <p:sldIdLst>
-    <p:sldId id="256" r:id="rId2"/>
+    <p:sldId id="260" r:id="rId5"/>
+    <p:sldId id="264" r:id="rId6"/>
+    <p:sldId id="263" r:id="rId7"/>
+    <p:sldId id="259" r:id="rId8"/>
+    <p:sldId id="265" r:id="rId9"/>
   </p:sldIdLst>
   <p:sldSz cx="12192000" cy="6858000"/>
   <p:notesSz cx="6858000" cy="9144000"/>
@@ -104,6 +108,11 @@
       </a:defRPr>
     </a:lvl9pPr>
   </p:defaultTextStyle>
+  <p:extLst>
+    <p:ext uri="{EFAFB233-063F-42B5-8137-9DF3F51BA10A}">
+      <p15:sldGuideLst xmlns:p15="http://schemas.microsoft.com/office/powerpoint/2012/main"/>
+    </p:ext>
+  </p:extLst>
 </p:presentation>
 </file>
 
@@ -129,7 +138,7 @@
           <p:cNvPr id="2" name="タイトル 1">
             <a:extLst>
               <a:ext uri="{FF2B5EF4-FFF2-40B4-BE49-F238E27FC236}">
-                <a16:creationId xmlns:a16="http://schemas.microsoft.com/office/drawing/2014/main" id="{0AF8E596-57DF-480A-92CE-CF3123930A31}"/>
+                <a16:creationId xmlns:a16="http://schemas.microsoft.com/office/drawing/2014/main" id="{C8DEE1DA-D521-41BA-912B-D69808303566}"/>
               </a:ext>
             </a:extLst>
           </p:cNvPr>
@@ -166,7 +175,7 @@
           <p:cNvPr id="3" name="字幕 2">
             <a:extLst>
               <a:ext uri="{FF2B5EF4-FFF2-40B4-BE49-F238E27FC236}">
-                <a16:creationId xmlns:a16="http://schemas.microsoft.com/office/drawing/2014/main" id="{3D424741-5CA3-45CA-A117-E3EC70E3167B}"/>
+                <a16:creationId xmlns:a16="http://schemas.microsoft.com/office/drawing/2014/main" id="{C5959CC3-4E28-49AB-A48A-20CCAE41FE26}"/>
               </a:ext>
             </a:extLst>
           </p:cNvPr>
@@ -236,7 +245,7 @@
           <p:cNvPr id="4" name="日付プレースホルダー 3">
             <a:extLst>
               <a:ext uri="{FF2B5EF4-FFF2-40B4-BE49-F238E27FC236}">
-                <a16:creationId xmlns:a16="http://schemas.microsoft.com/office/drawing/2014/main" id="{6D88C6D5-66FA-47A1-97EB-3F4FA754207D}"/>
+                <a16:creationId xmlns:a16="http://schemas.microsoft.com/office/drawing/2014/main" id="{CD66D77B-E9C6-4DF8-A6F8-73B8CDC0BAE4}"/>
               </a:ext>
             </a:extLst>
           </p:cNvPr>
@@ -252,9 +261,9 @@
           <a:bodyPr/>
           <a:lstStyle/>
           <a:p>
-            <a:fld id="{E51B74C6-72FD-4C22-8EFF-6E78FB6865D9}" type="datetimeFigureOut">
+            <a:fld id="{E847F966-ADEE-4571-9A7F-6902E2B314A7}" type="datetimeFigureOut">
               <a:rPr kumimoji="1" lang="ja-JP" altLang="en-US" smtClean="0"/>
-              <a:t>2026/5/28</a:t>
+              <a:t>2026/6/2</a:t>
             </a:fld>
             <a:endParaRPr kumimoji="1" lang="ja-JP" altLang="en-US"/>
           </a:p>
@@ -265,7 +274,7 @@
           <p:cNvPr id="5" name="フッター プレースホルダー 4">
             <a:extLst>
               <a:ext uri="{FF2B5EF4-FFF2-40B4-BE49-F238E27FC236}">
-                <a16:creationId xmlns:a16="http://schemas.microsoft.com/office/drawing/2014/main" id="{F79CD57E-B914-4F37-BCD9-837A0862FC8B}"/>
+                <a16:creationId xmlns:a16="http://schemas.microsoft.com/office/drawing/2014/main" id="{825BFECD-57DF-4C10-A294-517F542BB5A7}"/>
               </a:ext>
             </a:extLst>
           </p:cNvPr>
@@ -290,7 +299,7 @@
           <p:cNvPr id="6" name="スライド番号プレースホルダー 5">
             <a:extLst>
               <a:ext uri="{FF2B5EF4-FFF2-40B4-BE49-F238E27FC236}">
-                <a16:creationId xmlns:a16="http://schemas.microsoft.com/office/drawing/2014/main" id="{032459A5-F43A-40E7-9AC2-A22F3B1DC553}"/>
+                <a16:creationId xmlns:a16="http://schemas.microsoft.com/office/drawing/2014/main" id="{16ECD66C-3957-4A80-8A3D-21ECEC575C0A}"/>
               </a:ext>
             </a:extLst>
           </p:cNvPr>
@@ -306,7 +315,7 @@
           <a:bodyPr/>
           <a:lstStyle/>
           <a:p>
-            <a:fld id="{ED409326-E4BD-4B55-942C-5160B1C4B3D4}" type="slidenum">
+            <a:fld id="{9FFA33D7-3DB4-4063-8E8B-ED2A0D6080F9}" type="slidenum">
               <a:rPr kumimoji="1" lang="ja-JP" altLang="en-US" smtClean="0"/>
               <a:t>‹#›</a:t>
             </a:fld>
@@ -317,7 +326,7 @@
     </p:spTree>
     <p:extLst>
       <p:ext uri="{BB962C8B-B14F-4D97-AF65-F5344CB8AC3E}">
-        <p14:creationId xmlns:p14="http://schemas.microsoft.com/office/powerpoint/2010/main" val="3395011589"/>
+        <p14:creationId xmlns:p14="http://schemas.microsoft.com/office/powerpoint/2010/main" val="4139385018"/>
       </p:ext>
     </p:extLst>
   </p:cSld>
@@ -349,7 +358,7 @@
           <p:cNvPr id="2" name="タイトル 1">
             <a:extLst>
               <a:ext uri="{FF2B5EF4-FFF2-40B4-BE49-F238E27FC236}">
-                <a16:creationId xmlns:a16="http://schemas.microsoft.com/office/drawing/2014/main" id="{FDB0B884-34C9-4C30-8434-6CC614262C34}"/>
+                <a16:creationId xmlns:a16="http://schemas.microsoft.com/office/drawing/2014/main" id="{EB80A98C-30EE-453E-A50C-CBD28C412E50}"/>
               </a:ext>
             </a:extLst>
           </p:cNvPr>
@@ -377,7 +386,7 @@
           <p:cNvPr id="3" name="縦書きテキスト プレースホルダー 2">
             <a:extLst>
               <a:ext uri="{FF2B5EF4-FFF2-40B4-BE49-F238E27FC236}">
-                <a16:creationId xmlns:a16="http://schemas.microsoft.com/office/drawing/2014/main" id="{4A36B29A-42FA-4851-99C0-C6DFF1EBFC2C}"/>
+                <a16:creationId xmlns:a16="http://schemas.microsoft.com/office/drawing/2014/main" id="{13A3DFF5-9F28-409D-82E2-D36B550ECFD5}"/>
               </a:ext>
             </a:extLst>
           </p:cNvPr>
@@ -466,7 +475,7 @@
           <p:cNvPr id="4" name="日付プレースホルダー 3">
             <a:extLst>
               <a:ext uri="{FF2B5EF4-FFF2-40B4-BE49-F238E27FC236}">
-                <a16:creationId xmlns:a16="http://schemas.microsoft.com/office/drawing/2014/main" id="{DE51B8A1-9841-4D39-93D0-A38B15CA4A86}"/>
+                <a16:creationId xmlns:a16="http://schemas.microsoft.com/office/drawing/2014/main" id="{DAA043D8-1685-4233-8019-7945ED135031}"/>
               </a:ext>
             </a:extLst>
           </p:cNvPr>
@@ -482,9 +491,9 @@
           <a:bodyPr/>
           <a:lstStyle/>
           <a:p>
-            <a:fld id="{E51B74C6-72FD-4C22-8EFF-6E78FB6865D9}" type="datetimeFigureOut">
+            <a:fld id="{E847F966-ADEE-4571-9A7F-6902E2B314A7}" type="datetimeFigureOut">
               <a:rPr kumimoji="1" lang="ja-JP" altLang="en-US" smtClean="0"/>
-              <a:t>2026/5/28</a:t>
+              <a:t>2026/6/2</a:t>
             </a:fld>
             <a:endParaRPr kumimoji="1" lang="ja-JP" altLang="en-US"/>
           </a:p>
@@ -495,7 +504,7 @@
           <p:cNvPr id="5" name="フッター プレースホルダー 4">
             <a:extLst>
               <a:ext uri="{FF2B5EF4-FFF2-40B4-BE49-F238E27FC236}">
-                <a16:creationId xmlns:a16="http://schemas.microsoft.com/office/drawing/2014/main" id="{961AE85C-B588-4D19-9D7A-B52A305B9BE0}"/>
+                <a16:creationId xmlns:a16="http://schemas.microsoft.com/office/drawing/2014/main" id="{154DECB8-0263-45E0-816B-10178A602F0E}"/>
               </a:ext>
             </a:extLst>
           </p:cNvPr>
@@ -520,7 +529,7 @@
           <p:cNvPr id="6" name="スライド番号プレースホルダー 5">
             <a:extLst>
               <a:ext uri="{FF2B5EF4-FFF2-40B4-BE49-F238E27FC236}">
-                <a16:creationId xmlns:a16="http://schemas.microsoft.com/office/drawing/2014/main" id="{F03DF28E-EE62-44FC-8CBC-83B0FBDDA6EE}"/>
+                <a16:creationId xmlns:a16="http://schemas.microsoft.com/office/drawing/2014/main" id="{E6C9541E-5650-430F-96DB-D30E83EC45C2}"/>
               </a:ext>
             </a:extLst>
           </p:cNvPr>
@@ -536,7 +545,7 @@
           <a:bodyPr/>
           <a:lstStyle/>
           <a:p>
-            <a:fld id="{ED409326-E4BD-4B55-942C-5160B1C4B3D4}" type="slidenum">
+            <a:fld id="{9FFA33D7-3DB4-4063-8E8B-ED2A0D6080F9}" type="slidenum">
               <a:rPr kumimoji="1" lang="ja-JP" altLang="en-US" smtClean="0"/>
               <a:t>‹#›</a:t>
             </a:fld>
@@ -547,7 +556,7 @@
     </p:spTree>
     <p:extLst>
       <p:ext uri="{BB962C8B-B14F-4D97-AF65-F5344CB8AC3E}">
-        <p14:creationId xmlns:p14="http://schemas.microsoft.com/office/powerpoint/2010/main" val="640660128"/>
+        <p14:creationId xmlns:p14="http://schemas.microsoft.com/office/powerpoint/2010/main" val="3844628557"/>
       </p:ext>
     </p:extLst>
   </p:cSld>
@@ -579,7 +588,7 @@
           <p:cNvPr id="2" name="縦書きタイトル 1">
             <a:extLst>
               <a:ext uri="{FF2B5EF4-FFF2-40B4-BE49-F238E27FC236}">
-                <a16:creationId xmlns:a16="http://schemas.microsoft.com/office/drawing/2014/main" id="{851E0B44-5BFB-401F-800A-A862470D8FA6}"/>
+                <a16:creationId xmlns:a16="http://schemas.microsoft.com/office/drawing/2014/main" id="{540058FB-ADC0-4472-9C1C-95D10A60D310}"/>
               </a:ext>
             </a:extLst>
           </p:cNvPr>
@@ -612,7 +621,7 @@
           <p:cNvPr id="3" name="縦書きテキスト プレースホルダー 2">
             <a:extLst>
               <a:ext uri="{FF2B5EF4-FFF2-40B4-BE49-F238E27FC236}">
-                <a16:creationId xmlns:a16="http://schemas.microsoft.com/office/drawing/2014/main" id="{A068DD2A-0A1C-49AA-9FFC-ABE31B1C7DFF}"/>
+                <a16:creationId xmlns:a16="http://schemas.microsoft.com/office/drawing/2014/main" id="{E202AE2C-2FD6-4B0E-B182-ABE1399D24E9}"/>
               </a:ext>
             </a:extLst>
           </p:cNvPr>
@@ -706,7 +715,7 @@
           <p:cNvPr id="4" name="日付プレースホルダー 3">
             <a:extLst>
               <a:ext uri="{FF2B5EF4-FFF2-40B4-BE49-F238E27FC236}">
-                <a16:creationId xmlns:a16="http://schemas.microsoft.com/office/drawing/2014/main" id="{3221EE4D-708B-4615-B92F-6390BDD339E3}"/>
+                <a16:creationId xmlns:a16="http://schemas.microsoft.com/office/drawing/2014/main" id="{FAAC5299-DBE1-4B4A-A60A-260BCF533A59}"/>
               </a:ext>
             </a:extLst>
           </p:cNvPr>
@@ -722,9 +731,9 @@
           <a:bodyPr/>
           <a:lstStyle/>
           <a:p>
-            <a:fld id="{E51B74C6-72FD-4C22-8EFF-6E78FB6865D9}" type="datetimeFigureOut">
+            <a:fld id="{E847F966-ADEE-4571-9A7F-6902E2B314A7}" type="datetimeFigureOut">
               <a:rPr kumimoji="1" lang="ja-JP" altLang="en-US" smtClean="0"/>
-              <a:t>2026/5/28</a:t>
+              <a:t>2026/6/2</a:t>
             </a:fld>
             <a:endParaRPr kumimoji="1" lang="ja-JP" altLang="en-US"/>
           </a:p>
@@ -735,7 +744,7 @@
           <p:cNvPr id="5" name="フッター プレースホルダー 4">
             <a:extLst>
               <a:ext uri="{FF2B5EF4-FFF2-40B4-BE49-F238E27FC236}">
-                <a16:creationId xmlns:a16="http://schemas.microsoft.com/office/drawing/2014/main" id="{E2E5C08B-A4E8-4EAD-99A7-293F53089815}"/>
+                <a16:creationId xmlns:a16="http://schemas.microsoft.com/office/drawing/2014/main" id="{21737F96-308B-4B76-8E6E-7DF68EB3A2D4}"/>
               </a:ext>
             </a:extLst>
           </p:cNvPr>
@@ -760,7 +769,7 @@
           <p:cNvPr id="6" name="スライド番号プレースホルダー 5">
             <a:extLst>
               <a:ext uri="{FF2B5EF4-FFF2-40B4-BE49-F238E27FC236}">
-                <a16:creationId xmlns:a16="http://schemas.microsoft.com/office/drawing/2014/main" id="{D988A48C-03A3-44FE-A912-F6111F022324}"/>
+                <a16:creationId xmlns:a16="http://schemas.microsoft.com/office/drawing/2014/main" id="{5FF0EFDD-F548-4D7D-A4DA-F95067682062}"/>
               </a:ext>
             </a:extLst>
           </p:cNvPr>
@@ -776,7 +785,7 @@
           <a:bodyPr/>
           <a:lstStyle/>
           <a:p>
-            <a:fld id="{ED409326-E4BD-4B55-942C-5160B1C4B3D4}" type="slidenum">
+            <a:fld id="{9FFA33D7-3DB4-4063-8E8B-ED2A0D6080F9}" type="slidenum">
               <a:rPr kumimoji="1" lang="ja-JP" altLang="en-US" smtClean="0"/>
               <a:t>‹#›</a:t>
             </a:fld>
@@ -787,7 +796,7 @@
     </p:spTree>
     <p:extLst>
       <p:ext uri="{BB962C8B-B14F-4D97-AF65-F5344CB8AC3E}">
-        <p14:creationId xmlns:p14="http://schemas.microsoft.com/office/powerpoint/2010/main" val="151966352"/>
+        <p14:creationId xmlns:p14="http://schemas.microsoft.com/office/powerpoint/2010/main" val="1808757301"/>
       </p:ext>
     </p:extLst>
   </p:cSld>
@@ -819,7 +828,7 @@
           <p:cNvPr id="2" name="タイトル 1">
             <a:extLst>
               <a:ext uri="{FF2B5EF4-FFF2-40B4-BE49-F238E27FC236}">
-                <a16:creationId xmlns:a16="http://schemas.microsoft.com/office/drawing/2014/main" id="{05B2CA2B-25E6-4FEC-8D2D-A57D3F3779B6}"/>
+                <a16:creationId xmlns:a16="http://schemas.microsoft.com/office/drawing/2014/main" id="{5E00EF9E-C7EF-48CA-AF62-1CC6966B44ED}"/>
               </a:ext>
             </a:extLst>
           </p:cNvPr>
@@ -847,7 +856,7 @@
           <p:cNvPr id="3" name="コンテンツ プレースホルダー 2">
             <a:extLst>
               <a:ext uri="{FF2B5EF4-FFF2-40B4-BE49-F238E27FC236}">
-                <a16:creationId xmlns:a16="http://schemas.microsoft.com/office/drawing/2014/main" id="{5A424B2B-E525-4D14-8402-F96B4DCCD89F}"/>
+                <a16:creationId xmlns:a16="http://schemas.microsoft.com/office/drawing/2014/main" id="{62D12C40-7D07-4DB0-B276-6C84169EE382}"/>
               </a:ext>
             </a:extLst>
           </p:cNvPr>
@@ -936,7 +945,7 @@
           <p:cNvPr id="4" name="日付プレースホルダー 3">
             <a:extLst>
               <a:ext uri="{FF2B5EF4-FFF2-40B4-BE49-F238E27FC236}">
-                <a16:creationId xmlns:a16="http://schemas.microsoft.com/office/drawing/2014/main" id="{EBD1C08C-08DF-40D1-923D-4881FD817BED}"/>
+                <a16:creationId xmlns:a16="http://schemas.microsoft.com/office/drawing/2014/main" id="{E214BA0C-A6FB-4309-ACBB-810FA885212D}"/>
               </a:ext>
             </a:extLst>
           </p:cNvPr>
@@ -952,9 +961,9 @@
           <a:bodyPr/>
           <a:lstStyle/>
           <a:p>
-            <a:fld id="{E51B74C6-72FD-4C22-8EFF-6E78FB6865D9}" type="datetimeFigureOut">
+            <a:fld id="{E847F966-ADEE-4571-9A7F-6902E2B314A7}" type="datetimeFigureOut">
               <a:rPr kumimoji="1" lang="ja-JP" altLang="en-US" smtClean="0"/>
-              <a:t>2026/5/28</a:t>
+              <a:t>2026/6/2</a:t>
             </a:fld>
             <a:endParaRPr kumimoji="1" lang="ja-JP" altLang="en-US"/>
           </a:p>
@@ -965,7 +974,7 @@
           <p:cNvPr id="5" name="フッター プレースホルダー 4">
             <a:extLst>
               <a:ext uri="{FF2B5EF4-FFF2-40B4-BE49-F238E27FC236}">
-                <a16:creationId xmlns:a16="http://schemas.microsoft.com/office/drawing/2014/main" id="{A834CE3D-E7EF-4E5C-B7FE-6D200FA15FF0}"/>
+                <a16:creationId xmlns:a16="http://schemas.microsoft.com/office/drawing/2014/main" id="{B02ED1DE-58DA-4EB6-8E6F-23B21FA1B675}"/>
               </a:ext>
             </a:extLst>
           </p:cNvPr>
@@ -990,7 +999,7 @@
           <p:cNvPr id="6" name="スライド番号プレースホルダー 5">
             <a:extLst>
               <a:ext uri="{FF2B5EF4-FFF2-40B4-BE49-F238E27FC236}">
-                <a16:creationId xmlns:a16="http://schemas.microsoft.com/office/drawing/2014/main" id="{45EFC9D8-5601-41F6-A2F6-E67E3FD0D4DD}"/>
+                <a16:creationId xmlns:a16="http://schemas.microsoft.com/office/drawing/2014/main" id="{DFFC1500-B9D2-49C7-AAF0-3EA8FB1A4258}"/>
               </a:ext>
             </a:extLst>
           </p:cNvPr>
@@ -1006,7 +1015,7 @@
           <a:bodyPr/>
           <a:lstStyle/>
           <a:p>
-            <a:fld id="{ED409326-E4BD-4B55-942C-5160B1C4B3D4}" type="slidenum">
+            <a:fld id="{9FFA33D7-3DB4-4063-8E8B-ED2A0D6080F9}" type="slidenum">
               <a:rPr kumimoji="1" lang="ja-JP" altLang="en-US" smtClean="0"/>
               <a:t>‹#›</a:t>
             </a:fld>
@@ -1017,7 +1026,7 @@
     </p:spTree>
     <p:extLst>
       <p:ext uri="{BB962C8B-B14F-4D97-AF65-F5344CB8AC3E}">
-        <p14:creationId xmlns:p14="http://schemas.microsoft.com/office/powerpoint/2010/main" val="1099389092"/>
+        <p14:creationId xmlns:p14="http://schemas.microsoft.com/office/powerpoint/2010/main" val="1604333378"/>
       </p:ext>
     </p:extLst>
   </p:cSld>
@@ -1049,7 +1058,7 @@
           <p:cNvPr id="2" name="タイトル 1">
             <a:extLst>
               <a:ext uri="{FF2B5EF4-FFF2-40B4-BE49-F238E27FC236}">
-                <a16:creationId xmlns:a16="http://schemas.microsoft.com/office/drawing/2014/main" id="{A58BA07A-43E5-401F-A1B9-B6C053FEDE9E}"/>
+                <a16:creationId xmlns:a16="http://schemas.microsoft.com/office/drawing/2014/main" id="{9EA8A537-4A8F-4D0B-B0B0-EA8E58113C24}"/>
               </a:ext>
             </a:extLst>
           </p:cNvPr>
@@ -1086,7 +1095,7 @@
           <p:cNvPr id="3" name="テキスト プレースホルダー 2">
             <a:extLst>
               <a:ext uri="{FF2B5EF4-FFF2-40B4-BE49-F238E27FC236}">
-                <a16:creationId xmlns:a16="http://schemas.microsoft.com/office/drawing/2014/main" id="{3B1BE461-1A33-4849-AC88-CE128DCCE1E6}"/>
+                <a16:creationId xmlns:a16="http://schemas.microsoft.com/office/drawing/2014/main" id="{70AB764A-0FF3-4F59-B91B-3BBCE98A0AE5}"/>
               </a:ext>
             </a:extLst>
           </p:cNvPr>
@@ -1211,7 +1220,7 @@
           <p:cNvPr id="4" name="日付プレースホルダー 3">
             <a:extLst>
               <a:ext uri="{FF2B5EF4-FFF2-40B4-BE49-F238E27FC236}">
-                <a16:creationId xmlns:a16="http://schemas.microsoft.com/office/drawing/2014/main" id="{15BFFC03-57DA-4DC5-A68E-E03F7156F3B4}"/>
+                <a16:creationId xmlns:a16="http://schemas.microsoft.com/office/drawing/2014/main" id="{08F86C53-E6A8-4395-ABCE-2A562F221398}"/>
               </a:ext>
             </a:extLst>
           </p:cNvPr>
@@ -1227,9 +1236,9 @@
           <a:bodyPr/>
           <a:lstStyle/>
           <a:p>
-            <a:fld id="{E51B74C6-72FD-4C22-8EFF-6E78FB6865D9}" type="datetimeFigureOut">
+            <a:fld id="{E847F966-ADEE-4571-9A7F-6902E2B314A7}" type="datetimeFigureOut">
               <a:rPr kumimoji="1" lang="ja-JP" altLang="en-US" smtClean="0"/>
-              <a:t>2026/5/28</a:t>
+              <a:t>2026/6/2</a:t>
             </a:fld>
             <a:endParaRPr kumimoji="1" lang="ja-JP" altLang="en-US"/>
           </a:p>
@@ -1240,7 +1249,7 @@
           <p:cNvPr id="5" name="フッター プレースホルダー 4">
             <a:extLst>
               <a:ext uri="{FF2B5EF4-FFF2-40B4-BE49-F238E27FC236}">
-                <a16:creationId xmlns:a16="http://schemas.microsoft.com/office/drawing/2014/main" id="{A53BF07F-6733-4D74-BF00-2AE700011986}"/>
+                <a16:creationId xmlns:a16="http://schemas.microsoft.com/office/drawing/2014/main" id="{372F7A35-CCB0-4755-9AE3-83C5ECA198C3}"/>
               </a:ext>
             </a:extLst>
           </p:cNvPr>
@@ -1265,7 +1274,7 @@
           <p:cNvPr id="6" name="スライド番号プレースホルダー 5">
             <a:extLst>
               <a:ext uri="{FF2B5EF4-FFF2-40B4-BE49-F238E27FC236}">
-                <a16:creationId xmlns:a16="http://schemas.microsoft.com/office/drawing/2014/main" id="{B6BC7F6B-3F7E-44FD-970D-DF772C12F421}"/>
+                <a16:creationId xmlns:a16="http://schemas.microsoft.com/office/drawing/2014/main" id="{5009A28E-FCC3-4E55-A6C7-1D91EC887EFC}"/>
               </a:ext>
             </a:extLst>
           </p:cNvPr>
@@ -1281,7 +1290,7 @@
           <a:bodyPr/>
           <a:lstStyle/>
           <a:p>
-            <a:fld id="{ED409326-E4BD-4B55-942C-5160B1C4B3D4}" type="slidenum">
+            <a:fld id="{9FFA33D7-3DB4-4063-8E8B-ED2A0D6080F9}" type="slidenum">
               <a:rPr kumimoji="1" lang="ja-JP" altLang="en-US" smtClean="0"/>
               <a:t>‹#›</a:t>
             </a:fld>
@@ -1292,7 +1301,7 @@
     </p:spTree>
     <p:extLst>
       <p:ext uri="{BB962C8B-B14F-4D97-AF65-F5344CB8AC3E}">
-        <p14:creationId xmlns:p14="http://schemas.microsoft.com/office/powerpoint/2010/main" val="3597816737"/>
+        <p14:creationId xmlns:p14="http://schemas.microsoft.com/office/powerpoint/2010/main" val="3593333278"/>
       </p:ext>
     </p:extLst>
   </p:cSld>
@@ -1324,7 +1333,7 @@
           <p:cNvPr id="2" name="タイトル 1">
             <a:extLst>
               <a:ext uri="{FF2B5EF4-FFF2-40B4-BE49-F238E27FC236}">
-                <a16:creationId xmlns:a16="http://schemas.microsoft.com/office/drawing/2014/main" id="{AB002E2E-DD63-4030-BF2C-AEB17C3D1F23}"/>
+                <a16:creationId xmlns:a16="http://schemas.microsoft.com/office/drawing/2014/main" id="{898CDCD1-8B7D-4C41-BB23-2D180B337FD5}"/>
               </a:ext>
             </a:extLst>
           </p:cNvPr>
@@ -1352,7 +1361,7 @@
           <p:cNvPr id="3" name="コンテンツ プレースホルダー 2">
             <a:extLst>
               <a:ext uri="{FF2B5EF4-FFF2-40B4-BE49-F238E27FC236}">
-                <a16:creationId xmlns:a16="http://schemas.microsoft.com/office/drawing/2014/main" id="{E22FA0F9-083C-44AC-915F-A6951983DC22}"/>
+                <a16:creationId xmlns:a16="http://schemas.microsoft.com/office/drawing/2014/main" id="{D42D6B88-89CB-49DB-85F5-44631C9366C9}"/>
               </a:ext>
             </a:extLst>
           </p:cNvPr>
@@ -1446,7 +1455,7 @@
           <p:cNvPr id="4" name="コンテンツ プレースホルダー 3">
             <a:extLst>
               <a:ext uri="{FF2B5EF4-FFF2-40B4-BE49-F238E27FC236}">
-                <a16:creationId xmlns:a16="http://schemas.microsoft.com/office/drawing/2014/main" id="{35C24537-9E88-4C8A-9BC0-3933649E290E}"/>
+                <a16:creationId xmlns:a16="http://schemas.microsoft.com/office/drawing/2014/main" id="{F7771998-284E-4E80-8418-DB2D63757B1F}"/>
               </a:ext>
             </a:extLst>
           </p:cNvPr>
@@ -1540,7 +1549,7 @@
           <p:cNvPr id="5" name="日付プレースホルダー 4">
             <a:extLst>
               <a:ext uri="{FF2B5EF4-FFF2-40B4-BE49-F238E27FC236}">
-                <a16:creationId xmlns:a16="http://schemas.microsoft.com/office/drawing/2014/main" id="{EFF41F67-2F6C-4853-BA9C-EB36F6646777}"/>
+                <a16:creationId xmlns:a16="http://schemas.microsoft.com/office/drawing/2014/main" id="{61AF4C4F-EEAC-4310-B36E-F3EB2FBABF76}"/>
               </a:ext>
             </a:extLst>
           </p:cNvPr>
@@ -1556,9 +1565,9 @@
           <a:bodyPr/>
           <a:lstStyle/>
           <a:p>
-            <a:fld id="{E51B74C6-72FD-4C22-8EFF-6E78FB6865D9}" type="datetimeFigureOut">
+            <a:fld id="{E847F966-ADEE-4571-9A7F-6902E2B314A7}" type="datetimeFigureOut">
               <a:rPr kumimoji="1" lang="ja-JP" altLang="en-US" smtClean="0"/>
-              <a:t>2026/5/28</a:t>
+              <a:t>2026/6/2</a:t>
             </a:fld>
             <a:endParaRPr kumimoji="1" lang="ja-JP" altLang="en-US"/>
           </a:p>
@@ -1569,7 +1578,7 @@
           <p:cNvPr id="6" name="フッター プレースホルダー 5">
             <a:extLst>
               <a:ext uri="{FF2B5EF4-FFF2-40B4-BE49-F238E27FC236}">
-                <a16:creationId xmlns:a16="http://schemas.microsoft.com/office/drawing/2014/main" id="{58231279-ED43-4659-A1B5-C3A99D71BB19}"/>
+                <a16:creationId xmlns:a16="http://schemas.microsoft.com/office/drawing/2014/main" id="{AA3E1FD9-A2DB-4D3F-AAF5-86950BCEAB96}"/>
               </a:ext>
             </a:extLst>
           </p:cNvPr>
@@ -1594,7 +1603,7 @@
           <p:cNvPr id="7" name="スライド番号プレースホルダー 6">
             <a:extLst>
               <a:ext uri="{FF2B5EF4-FFF2-40B4-BE49-F238E27FC236}">
-                <a16:creationId xmlns:a16="http://schemas.microsoft.com/office/drawing/2014/main" id="{9CA43B88-93B3-4BF8-B092-DB86995DD5F5}"/>
+                <a16:creationId xmlns:a16="http://schemas.microsoft.com/office/drawing/2014/main" id="{EBBF622C-2490-41F8-9EFF-3165F91FB2F3}"/>
               </a:ext>
             </a:extLst>
           </p:cNvPr>
@@ -1610,7 +1619,7 @@
           <a:bodyPr/>
           <a:lstStyle/>
           <a:p>
-            <a:fld id="{ED409326-E4BD-4B55-942C-5160B1C4B3D4}" type="slidenum">
+            <a:fld id="{9FFA33D7-3DB4-4063-8E8B-ED2A0D6080F9}" type="slidenum">
               <a:rPr kumimoji="1" lang="ja-JP" altLang="en-US" smtClean="0"/>
               <a:t>‹#›</a:t>
             </a:fld>
@@ -1621,7 +1630,7 @@
     </p:spTree>
     <p:extLst>
       <p:ext uri="{BB962C8B-B14F-4D97-AF65-F5344CB8AC3E}">
-        <p14:creationId xmlns:p14="http://schemas.microsoft.com/office/powerpoint/2010/main" val="2832714677"/>
+        <p14:creationId xmlns:p14="http://schemas.microsoft.com/office/powerpoint/2010/main" val="1020511185"/>
       </p:ext>
     </p:extLst>
   </p:cSld>
@@ -1653,7 +1662,7 @@
           <p:cNvPr id="2" name="タイトル 1">
             <a:extLst>
               <a:ext uri="{FF2B5EF4-FFF2-40B4-BE49-F238E27FC236}">
-                <a16:creationId xmlns:a16="http://schemas.microsoft.com/office/drawing/2014/main" id="{5B758ADF-A64D-4474-BE6B-8A00F5E5CE24}"/>
+                <a16:creationId xmlns:a16="http://schemas.microsoft.com/office/drawing/2014/main" id="{219D26AC-E050-4E36-9BD3-2E2A513EFBEF}"/>
               </a:ext>
             </a:extLst>
           </p:cNvPr>
@@ -1686,7 +1695,7 @@
           <p:cNvPr id="3" name="テキスト プレースホルダー 2">
             <a:extLst>
               <a:ext uri="{FF2B5EF4-FFF2-40B4-BE49-F238E27FC236}">
-                <a16:creationId xmlns:a16="http://schemas.microsoft.com/office/drawing/2014/main" id="{D9E0516D-1AF5-4BF3-814A-C31F4D31AB2A}"/>
+                <a16:creationId xmlns:a16="http://schemas.microsoft.com/office/drawing/2014/main" id="{AD4964C4-46DD-4C10-AB5C-914557FF1DCB}"/>
               </a:ext>
             </a:extLst>
           </p:cNvPr>
@@ -1757,7 +1766,7 @@
           <p:cNvPr id="4" name="コンテンツ プレースホルダー 3">
             <a:extLst>
               <a:ext uri="{FF2B5EF4-FFF2-40B4-BE49-F238E27FC236}">
-                <a16:creationId xmlns:a16="http://schemas.microsoft.com/office/drawing/2014/main" id="{D360DD0A-1585-4957-A4F2-40A86A62F59B}"/>
+                <a16:creationId xmlns:a16="http://schemas.microsoft.com/office/drawing/2014/main" id="{1D951A94-77D5-4154-AC67-AADD106AE3C9}"/>
               </a:ext>
             </a:extLst>
           </p:cNvPr>
@@ -1851,7 +1860,7 @@
           <p:cNvPr id="5" name="テキスト プレースホルダー 4">
             <a:extLst>
               <a:ext uri="{FF2B5EF4-FFF2-40B4-BE49-F238E27FC236}">
-                <a16:creationId xmlns:a16="http://schemas.microsoft.com/office/drawing/2014/main" id="{01CF4E72-CFC3-476C-B78A-35D93BCCB5EC}"/>
+                <a16:creationId xmlns:a16="http://schemas.microsoft.com/office/drawing/2014/main" id="{36D2613A-13DB-42B9-A8FE-8EF9410911F7}"/>
               </a:ext>
             </a:extLst>
           </p:cNvPr>
@@ -1922,7 +1931,7 @@
           <p:cNvPr id="6" name="コンテンツ プレースホルダー 5">
             <a:extLst>
               <a:ext uri="{FF2B5EF4-FFF2-40B4-BE49-F238E27FC236}">
-                <a16:creationId xmlns:a16="http://schemas.microsoft.com/office/drawing/2014/main" id="{3DBD94A9-8958-4A25-BECA-45101F621D77}"/>
+                <a16:creationId xmlns:a16="http://schemas.microsoft.com/office/drawing/2014/main" id="{BD2DC970-17EC-47A2-83B5-D3AF42B3FEF2}"/>
               </a:ext>
             </a:extLst>
           </p:cNvPr>
@@ -2016,7 +2025,7 @@
           <p:cNvPr id="7" name="日付プレースホルダー 6">
             <a:extLst>
               <a:ext uri="{FF2B5EF4-FFF2-40B4-BE49-F238E27FC236}">
-                <a16:creationId xmlns:a16="http://schemas.microsoft.com/office/drawing/2014/main" id="{BCAD4689-C6BE-46F5-8DF7-2A90159199C0}"/>
+                <a16:creationId xmlns:a16="http://schemas.microsoft.com/office/drawing/2014/main" id="{3A8D99B8-2520-4004-AA2B-419EC027030E}"/>
               </a:ext>
             </a:extLst>
           </p:cNvPr>
@@ -2032,9 +2041,9 @@
           <a:bodyPr/>
           <a:lstStyle/>
           <a:p>
-            <a:fld id="{E51B74C6-72FD-4C22-8EFF-6E78FB6865D9}" type="datetimeFigureOut">
+            <a:fld id="{E847F966-ADEE-4571-9A7F-6902E2B314A7}" type="datetimeFigureOut">
               <a:rPr kumimoji="1" lang="ja-JP" altLang="en-US" smtClean="0"/>
-              <a:t>2026/5/28</a:t>
+              <a:t>2026/6/2</a:t>
             </a:fld>
             <a:endParaRPr kumimoji="1" lang="ja-JP" altLang="en-US"/>
           </a:p>
@@ -2045,7 +2054,7 @@
           <p:cNvPr id="8" name="フッター プレースホルダー 7">
             <a:extLst>
               <a:ext uri="{FF2B5EF4-FFF2-40B4-BE49-F238E27FC236}">
-                <a16:creationId xmlns:a16="http://schemas.microsoft.com/office/drawing/2014/main" id="{1E000F06-9DBB-411A-82DD-4A8438D6010B}"/>
+                <a16:creationId xmlns:a16="http://schemas.microsoft.com/office/drawing/2014/main" id="{7E3334B4-0B29-4086-B1BF-A1DA52B06906}"/>
               </a:ext>
             </a:extLst>
           </p:cNvPr>
@@ -2070,7 +2079,7 @@
           <p:cNvPr id="9" name="スライド番号プレースホルダー 8">
             <a:extLst>
               <a:ext uri="{FF2B5EF4-FFF2-40B4-BE49-F238E27FC236}">
-                <a16:creationId xmlns:a16="http://schemas.microsoft.com/office/drawing/2014/main" id="{A54BA717-FE96-4AC5-9F60-CB97056562DC}"/>
+                <a16:creationId xmlns:a16="http://schemas.microsoft.com/office/drawing/2014/main" id="{4AEB05AA-4EE3-43B6-8645-DD75C3F7DF07}"/>
               </a:ext>
             </a:extLst>
           </p:cNvPr>
@@ -2086,7 +2095,7 @@
           <a:bodyPr/>
           <a:lstStyle/>
           <a:p>
-            <a:fld id="{ED409326-E4BD-4B55-942C-5160B1C4B3D4}" type="slidenum">
+            <a:fld id="{9FFA33D7-3DB4-4063-8E8B-ED2A0D6080F9}" type="slidenum">
               <a:rPr kumimoji="1" lang="ja-JP" altLang="en-US" smtClean="0"/>
               <a:t>‹#›</a:t>
             </a:fld>
@@ -2097,7 +2106,7 @@
     </p:spTree>
     <p:extLst>
       <p:ext uri="{BB962C8B-B14F-4D97-AF65-F5344CB8AC3E}">
-        <p14:creationId xmlns:p14="http://schemas.microsoft.com/office/powerpoint/2010/main" val="1127181872"/>
+        <p14:creationId xmlns:p14="http://schemas.microsoft.com/office/powerpoint/2010/main" val="2189667571"/>
       </p:ext>
     </p:extLst>
   </p:cSld>
@@ -2129,7 +2138,7 @@
           <p:cNvPr id="2" name="タイトル 1">
             <a:extLst>
               <a:ext uri="{FF2B5EF4-FFF2-40B4-BE49-F238E27FC236}">
-                <a16:creationId xmlns:a16="http://schemas.microsoft.com/office/drawing/2014/main" id="{CD1770A3-A04D-4222-B27D-B8BEC77FA8C5}"/>
+                <a16:creationId xmlns:a16="http://schemas.microsoft.com/office/drawing/2014/main" id="{2D14E23D-433B-4678-828E-54BDB9860F10}"/>
               </a:ext>
             </a:extLst>
           </p:cNvPr>
@@ -2157,7 +2166,7 @@
           <p:cNvPr id="3" name="日付プレースホルダー 2">
             <a:extLst>
               <a:ext uri="{FF2B5EF4-FFF2-40B4-BE49-F238E27FC236}">
-                <a16:creationId xmlns:a16="http://schemas.microsoft.com/office/drawing/2014/main" id="{A3EF47DE-8C9E-4B37-A6BF-A0B0D1CBBD40}"/>
+                <a16:creationId xmlns:a16="http://schemas.microsoft.com/office/drawing/2014/main" id="{D506A02E-998F-4D06-AB69-7E6A0C0A43F9}"/>
               </a:ext>
             </a:extLst>
           </p:cNvPr>
@@ -2173,9 +2182,9 @@
           <a:bodyPr/>
           <a:lstStyle/>
           <a:p>
-            <a:fld id="{E51B74C6-72FD-4C22-8EFF-6E78FB6865D9}" type="datetimeFigureOut">
+            <a:fld id="{E847F966-ADEE-4571-9A7F-6902E2B314A7}" type="datetimeFigureOut">
               <a:rPr kumimoji="1" lang="ja-JP" altLang="en-US" smtClean="0"/>
-              <a:t>2026/5/28</a:t>
+              <a:t>2026/6/2</a:t>
             </a:fld>
             <a:endParaRPr kumimoji="1" lang="ja-JP" altLang="en-US"/>
           </a:p>
@@ -2186,7 +2195,7 @@
           <p:cNvPr id="4" name="フッター プレースホルダー 3">
             <a:extLst>
               <a:ext uri="{FF2B5EF4-FFF2-40B4-BE49-F238E27FC236}">
-                <a16:creationId xmlns:a16="http://schemas.microsoft.com/office/drawing/2014/main" id="{5508B3A8-C496-431D-BBB3-CB9E4B0FD9C9}"/>
+                <a16:creationId xmlns:a16="http://schemas.microsoft.com/office/drawing/2014/main" id="{09EDB1A9-8E22-445E-9EEB-E43C3A3124B0}"/>
               </a:ext>
             </a:extLst>
           </p:cNvPr>
@@ -2211,7 +2220,7 @@
           <p:cNvPr id="5" name="スライド番号プレースホルダー 4">
             <a:extLst>
               <a:ext uri="{FF2B5EF4-FFF2-40B4-BE49-F238E27FC236}">
-                <a16:creationId xmlns:a16="http://schemas.microsoft.com/office/drawing/2014/main" id="{14C3444E-B47F-4D73-9651-C2D0E0A85C7F}"/>
+                <a16:creationId xmlns:a16="http://schemas.microsoft.com/office/drawing/2014/main" id="{8F48CDB2-E552-415C-B0BD-67C2E7D06147}"/>
               </a:ext>
             </a:extLst>
           </p:cNvPr>
@@ -2227,7 +2236,7 @@
           <a:bodyPr/>
           <a:lstStyle/>
           <a:p>
-            <a:fld id="{ED409326-E4BD-4B55-942C-5160B1C4B3D4}" type="slidenum">
+            <a:fld id="{9FFA33D7-3DB4-4063-8E8B-ED2A0D6080F9}" type="slidenum">
               <a:rPr kumimoji="1" lang="ja-JP" altLang="en-US" smtClean="0"/>
               <a:t>‹#›</a:t>
             </a:fld>
@@ -2238,7 +2247,7 @@
     </p:spTree>
     <p:extLst>
       <p:ext uri="{BB962C8B-B14F-4D97-AF65-F5344CB8AC3E}">
-        <p14:creationId xmlns:p14="http://schemas.microsoft.com/office/powerpoint/2010/main" val="213975192"/>
+        <p14:creationId xmlns:p14="http://schemas.microsoft.com/office/powerpoint/2010/main" val="4146470518"/>
       </p:ext>
     </p:extLst>
   </p:cSld>
@@ -2270,7 +2279,7 @@
           <p:cNvPr id="2" name="日付プレースホルダー 1">
             <a:extLst>
               <a:ext uri="{FF2B5EF4-FFF2-40B4-BE49-F238E27FC236}">
-                <a16:creationId xmlns:a16="http://schemas.microsoft.com/office/drawing/2014/main" id="{EF181F14-F348-4C8D-9AC3-8F38C6E06E4D}"/>
+                <a16:creationId xmlns:a16="http://schemas.microsoft.com/office/drawing/2014/main" id="{CB568EE4-9B1B-4EBF-ABCD-358DD5EFE5BA}"/>
               </a:ext>
             </a:extLst>
           </p:cNvPr>
@@ -2286,9 +2295,9 @@
           <a:bodyPr/>
           <a:lstStyle/>
           <a:p>
-            <a:fld id="{E51B74C6-72FD-4C22-8EFF-6E78FB6865D9}" type="datetimeFigureOut">
+            <a:fld id="{E847F966-ADEE-4571-9A7F-6902E2B314A7}" type="datetimeFigureOut">
               <a:rPr kumimoji="1" lang="ja-JP" altLang="en-US" smtClean="0"/>
-              <a:t>2026/5/28</a:t>
+              <a:t>2026/6/2</a:t>
             </a:fld>
             <a:endParaRPr kumimoji="1" lang="ja-JP" altLang="en-US"/>
           </a:p>
@@ -2299,7 +2308,7 @@
           <p:cNvPr id="3" name="フッター プレースホルダー 2">
             <a:extLst>
               <a:ext uri="{FF2B5EF4-FFF2-40B4-BE49-F238E27FC236}">
-                <a16:creationId xmlns:a16="http://schemas.microsoft.com/office/drawing/2014/main" id="{A4259650-DD89-4EBA-9B88-F45E0886C53C}"/>
+                <a16:creationId xmlns:a16="http://schemas.microsoft.com/office/drawing/2014/main" id="{7B2CDA27-39D4-4122-8600-F3A26CEA3F1C}"/>
               </a:ext>
             </a:extLst>
           </p:cNvPr>
@@ -2324,7 +2333,7 @@
           <p:cNvPr id="4" name="スライド番号プレースホルダー 3">
             <a:extLst>
               <a:ext uri="{FF2B5EF4-FFF2-40B4-BE49-F238E27FC236}">
-                <a16:creationId xmlns:a16="http://schemas.microsoft.com/office/drawing/2014/main" id="{36341637-30D4-468C-B8F8-44E66A15A8BD}"/>
+                <a16:creationId xmlns:a16="http://schemas.microsoft.com/office/drawing/2014/main" id="{E809FE26-7391-4910-8190-12710E09B87C}"/>
               </a:ext>
             </a:extLst>
           </p:cNvPr>
@@ -2340,7 +2349,7 @@
           <a:bodyPr/>
           <a:lstStyle/>
           <a:p>
-            <a:fld id="{ED409326-E4BD-4B55-942C-5160B1C4B3D4}" type="slidenum">
+            <a:fld id="{9FFA33D7-3DB4-4063-8E8B-ED2A0D6080F9}" type="slidenum">
               <a:rPr kumimoji="1" lang="ja-JP" altLang="en-US" smtClean="0"/>
               <a:t>‹#›</a:t>
             </a:fld>
@@ -2351,7 +2360,7 @@
     </p:spTree>
     <p:extLst>
       <p:ext uri="{BB962C8B-B14F-4D97-AF65-F5344CB8AC3E}">
-        <p14:creationId xmlns:p14="http://schemas.microsoft.com/office/powerpoint/2010/main" val="32241982"/>
+        <p14:creationId xmlns:p14="http://schemas.microsoft.com/office/powerpoint/2010/main" val="2314458244"/>
       </p:ext>
     </p:extLst>
   </p:cSld>
@@ -2383,7 +2392,7 @@
           <p:cNvPr id="2" name="タイトル 1">
             <a:extLst>
               <a:ext uri="{FF2B5EF4-FFF2-40B4-BE49-F238E27FC236}">
-                <a16:creationId xmlns:a16="http://schemas.microsoft.com/office/drawing/2014/main" id="{87157003-52CB-4030-BE6A-37280CBACB2B}"/>
+                <a16:creationId xmlns:a16="http://schemas.microsoft.com/office/drawing/2014/main" id="{FCFA59BF-9EA8-4C2D-B0BE-65C903BE9148}"/>
               </a:ext>
             </a:extLst>
           </p:cNvPr>
@@ -2420,7 +2429,7 @@
           <p:cNvPr id="3" name="コンテンツ プレースホルダー 2">
             <a:extLst>
               <a:ext uri="{FF2B5EF4-FFF2-40B4-BE49-F238E27FC236}">
-                <a16:creationId xmlns:a16="http://schemas.microsoft.com/office/drawing/2014/main" id="{1D87AA27-1310-4019-B615-B344C4D1C032}"/>
+                <a16:creationId xmlns:a16="http://schemas.microsoft.com/office/drawing/2014/main" id="{C3C457FF-B415-46C0-9E35-BF56A6771ECF}"/>
               </a:ext>
             </a:extLst>
           </p:cNvPr>
@@ -2542,7 +2551,7 @@
           <p:cNvPr id="4" name="テキスト プレースホルダー 3">
             <a:extLst>
               <a:ext uri="{FF2B5EF4-FFF2-40B4-BE49-F238E27FC236}">
-                <a16:creationId xmlns:a16="http://schemas.microsoft.com/office/drawing/2014/main" id="{42EB2D21-0806-40E6-8FFC-C4A895ADFE1B}"/>
+                <a16:creationId xmlns:a16="http://schemas.microsoft.com/office/drawing/2014/main" id="{811240F4-D344-450C-AD62-5FA3E380BCF7}"/>
               </a:ext>
             </a:extLst>
           </p:cNvPr>
@@ -2613,7 +2622,7 @@
           <p:cNvPr id="5" name="日付プレースホルダー 4">
             <a:extLst>
               <a:ext uri="{FF2B5EF4-FFF2-40B4-BE49-F238E27FC236}">
-                <a16:creationId xmlns:a16="http://schemas.microsoft.com/office/drawing/2014/main" id="{3CC5DC28-4C42-43FF-88D5-1E9A07CB54A3}"/>
+                <a16:creationId xmlns:a16="http://schemas.microsoft.com/office/drawing/2014/main" id="{5E4D23AB-320B-41E3-B342-F11CB499B2B5}"/>
               </a:ext>
             </a:extLst>
           </p:cNvPr>
@@ -2629,9 +2638,9 @@
           <a:bodyPr/>
           <a:lstStyle/>
           <a:p>
-            <a:fld id="{E51B74C6-72FD-4C22-8EFF-6E78FB6865D9}" type="datetimeFigureOut">
+            <a:fld id="{E847F966-ADEE-4571-9A7F-6902E2B314A7}" type="datetimeFigureOut">
               <a:rPr kumimoji="1" lang="ja-JP" altLang="en-US" smtClean="0"/>
-              <a:t>2026/5/28</a:t>
+              <a:t>2026/6/2</a:t>
             </a:fld>
             <a:endParaRPr kumimoji="1" lang="ja-JP" altLang="en-US"/>
           </a:p>
@@ -2642,7 +2651,7 @@
           <p:cNvPr id="6" name="フッター プレースホルダー 5">
             <a:extLst>
               <a:ext uri="{FF2B5EF4-FFF2-40B4-BE49-F238E27FC236}">
-                <a16:creationId xmlns:a16="http://schemas.microsoft.com/office/drawing/2014/main" id="{97488724-1B77-46DE-B071-65DB6F7F6B1A}"/>
+                <a16:creationId xmlns:a16="http://schemas.microsoft.com/office/drawing/2014/main" id="{CA56D721-8808-4803-8DB0-F661CE76B50A}"/>
               </a:ext>
             </a:extLst>
           </p:cNvPr>
@@ -2667,7 +2676,7 @@
           <p:cNvPr id="7" name="スライド番号プレースホルダー 6">
             <a:extLst>
               <a:ext uri="{FF2B5EF4-FFF2-40B4-BE49-F238E27FC236}">
-                <a16:creationId xmlns:a16="http://schemas.microsoft.com/office/drawing/2014/main" id="{FF28B297-0556-40EF-BCF1-60A8DC52EAEB}"/>
+                <a16:creationId xmlns:a16="http://schemas.microsoft.com/office/drawing/2014/main" id="{04B9B2CA-1342-4735-BCD1-F2E08A2E49EE}"/>
               </a:ext>
             </a:extLst>
           </p:cNvPr>
@@ -2683,7 +2692,7 @@
           <a:bodyPr/>
           <a:lstStyle/>
           <a:p>
-            <a:fld id="{ED409326-E4BD-4B55-942C-5160B1C4B3D4}" type="slidenum">
+            <a:fld id="{9FFA33D7-3DB4-4063-8E8B-ED2A0D6080F9}" type="slidenum">
               <a:rPr kumimoji="1" lang="ja-JP" altLang="en-US" smtClean="0"/>
               <a:t>‹#›</a:t>
             </a:fld>
@@ -2694,7 +2703,7 @@
     </p:spTree>
     <p:extLst>
       <p:ext uri="{BB962C8B-B14F-4D97-AF65-F5344CB8AC3E}">
-        <p14:creationId xmlns:p14="http://schemas.microsoft.com/office/powerpoint/2010/main" val="3163608293"/>
+        <p14:creationId xmlns:p14="http://schemas.microsoft.com/office/powerpoint/2010/main" val="1298840789"/>
       </p:ext>
     </p:extLst>
   </p:cSld>
@@ -2726,7 +2735,7 @@
           <p:cNvPr id="2" name="タイトル 1">
             <a:extLst>
               <a:ext uri="{FF2B5EF4-FFF2-40B4-BE49-F238E27FC236}">
-                <a16:creationId xmlns:a16="http://schemas.microsoft.com/office/drawing/2014/main" id="{8485EECF-B8B6-4E41-8DBE-6496C448356D}"/>
+                <a16:creationId xmlns:a16="http://schemas.microsoft.com/office/drawing/2014/main" id="{94094342-11DA-4797-8D8A-738CAF05E9BF}"/>
               </a:ext>
             </a:extLst>
           </p:cNvPr>
@@ -2763,7 +2772,7 @@
           <p:cNvPr id="3" name="図プレースホルダー 2">
             <a:extLst>
               <a:ext uri="{FF2B5EF4-FFF2-40B4-BE49-F238E27FC236}">
-                <a16:creationId xmlns:a16="http://schemas.microsoft.com/office/drawing/2014/main" id="{1B3E3716-48AE-4A22-A4D2-1676E74FCD6B}"/>
+                <a16:creationId xmlns:a16="http://schemas.microsoft.com/office/drawing/2014/main" id="{B97DD965-18EA-4F99-9A8A-3A1CF1640C94}"/>
               </a:ext>
             </a:extLst>
           </p:cNvPr>
@@ -2830,7 +2839,7 @@
           <p:cNvPr id="4" name="テキスト プレースホルダー 3">
             <a:extLst>
               <a:ext uri="{FF2B5EF4-FFF2-40B4-BE49-F238E27FC236}">
-                <a16:creationId xmlns:a16="http://schemas.microsoft.com/office/drawing/2014/main" id="{EEADE4E0-C7B0-429F-AD2F-9D22DECED6CC}"/>
+                <a16:creationId xmlns:a16="http://schemas.microsoft.com/office/drawing/2014/main" id="{52505A53-1857-479B-912F-FF40015A3453}"/>
               </a:ext>
             </a:extLst>
           </p:cNvPr>
@@ -2901,7 +2910,7 @@
           <p:cNvPr id="5" name="日付プレースホルダー 4">
             <a:extLst>
               <a:ext uri="{FF2B5EF4-FFF2-40B4-BE49-F238E27FC236}">
-                <a16:creationId xmlns:a16="http://schemas.microsoft.com/office/drawing/2014/main" id="{D1F29CA0-5A36-4E5E-AD2B-0C6EAD78CC84}"/>
+                <a16:creationId xmlns:a16="http://schemas.microsoft.com/office/drawing/2014/main" id="{73832D39-27AA-4417-A012-F3F6F091BE6E}"/>
               </a:ext>
             </a:extLst>
           </p:cNvPr>
@@ -2917,9 +2926,9 @@
           <a:bodyPr/>
           <a:lstStyle/>
           <a:p>
-            <a:fld id="{E51B74C6-72FD-4C22-8EFF-6E78FB6865D9}" type="datetimeFigureOut">
+            <a:fld id="{E847F966-ADEE-4571-9A7F-6902E2B314A7}" type="datetimeFigureOut">
               <a:rPr kumimoji="1" lang="ja-JP" altLang="en-US" smtClean="0"/>
-              <a:t>2026/5/28</a:t>
+              <a:t>2026/6/2</a:t>
             </a:fld>
             <a:endParaRPr kumimoji="1" lang="ja-JP" altLang="en-US"/>
           </a:p>
@@ -2930,7 +2939,7 @@
           <p:cNvPr id="6" name="フッター プレースホルダー 5">
             <a:extLst>
               <a:ext uri="{FF2B5EF4-FFF2-40B4-BE49-F238E27FC236}">
-                <a16:creationId xmlns:a16="http://schemas.microsoft.com/office/drawing/2014/main" id="{F599281D-1834-4224-8AE1-EB3217331E94}"/>
+                <a16:creationId xmlns:a16="http://schemas.microsoft.com/office/drawing/2014/main" id="{E8D29212-C93F-4705-BF45-8F0A1D9DFAC2}"/>
               </a:ext>
             </a:extLst>
           </p:cNvPr>
@@ -2955,7 +2964,7 @@
           <p:cNvPr id="7" name="スライド番号プレースホルダー 6">
             <a:extLst>
               <a:ext uri="{FF2B5EF4-FFF2-40B4-BE49-F238E27FC236}">
-                <a16:creationId xmlns:a16="http://schemas.microsoft.com/office/drawing/2014/main" id="{3A42041D-52DA-4A43-BC9D-43B59AAEB578}"/>
+                <a16:creationId xmlns:a16="http://schemas.microsoft.com/office/drawing/2014/main" id="{CA638C4B-DB4B-4261-9BCE-B694C0BC46CC}"/>
               </a:ext>
             </a:extLst>
           </p:cNvPr>
@@ -2971,7 +2980,7 @@
           <a:bodyPr/>
           <a:lstStyle/>
           <a:p>
-            <a:fld id="{ED409326-E4BD-4B55-942C-5160B1C4B3D4}" type="slidenum">
+            <a:fld id="{9FFA33D7-3DB4-4063-8E8B-ED2A0D6080F9}" type="slidenum">
               <a:rPr kumimoji="1" lang="ja-JP" altLang="en-US" smtClean="0"/>
               <a:t>‹#›</a:t>
             </a:fld>
@@ -2982,7 +2991,7 @@
     </p:spTree>
     <p:extLst>
       <p:ext uri="{BB962C8B-B14F-4D97-AF65-F5344CB8AC3E}">
-        <p14:creationId xmlns:p14="http://schemas.microsoft.com/office/powerpoint/2010/main" val="3980016967"/>
+        <p14:creationId xmlns:p14="http://schemas.microsoft.com/office/powerpoint/2010/main" val="2063029304"/>
       </p:ext>
     </p:extLst>
   </p:cSld>
@@ -3019,7 +3028,7 @@
           <p:cNvPr id="2" name="タイトル プレースホルダー 1">
             <a:extLst>
               <a:ext uri="{FF2B5EF4-FFF2-40B4-BE49-F238E27FC236}">
-                <a16:creationId xmlns:a16="http://schemas.microsoft.com/office/drawing/2014/main" id="{C11D78AD-AE38-4977-91BA-AEB0DF55A9FD}"/>
+                <a16:creationId xmlns:a16="http://schemas.microsoft.com/office/drawing/2014/main" id="{0C8C3C6D-8C64-48FA-8A9F-32F13AD255B6}"/>
               </a:ext>
             </a:extLst>
           </p:cNvPr>
@@ -3057,7 +3066,7 @@
           <p:cNvPr id="3" name="テキスト プレースホルダー 2">
             <a:extLst>
               <a:ext uri="{FF2B5EF4-FFF2-40B4-BE49-F238E27FC236}">
-                <a16:creationId xmlns:a16="http://schemas.microsoft.com/office/drawing/2014/main" id="{18601E69-A22B-459C-9F25-340E56452634}"/>
+                <a16:creationId xmlns:a16="http://schemas.microsoft.com/office/drawing/2014/main" id="{08992169-569E-4883-9978-79F195038E4F}"/>
               </a:ext>
             </a:extLst>
           </p:cNvPr>
@@ -3156,7 +3165,7 @@
           <p:cNvPr id="4" name="日付プレースホルダー 3">
             <a:extLst>
               <a:ext uri="{FF2B5EF4-FFF2-40B4-BE49-F238E27FC236}">
-                <a16:creationId xmlns:a16="http://schemas.microsoft.com/office/drawing/2014/main" id="{9D28F57D-3916-4277-9635-ABEBD1001EF3}"/>
+                <a16:creationId xmlns:a16="http://schemas.microsoft.com/office/drawing/2014/main" id="{3CB89EF0-DAEE-4EA8-B324-86493BD004CF}"/>
               </a:ext>
             </a:extLst>
           </p:cNvPr>
@@ -3190,9 +3199,9 @@
             </a:lvl1pPr>
           </a:lstStyle>
           <a:p>
-            <a:fld id="{E51B74C6-72FD-4C22-8EFF-6E78FB6865D9}" type="datetimeFigureOut">
+            <a:fld id="{E847F966-ADEE-4571-9A7F-6902E2B314A7}" type="datetimeFigureOut">
               <a:rPr kumimoji="1" lang="ja-JP" altLang="en-US" smtClean="0"/>
-              <a:t>2026/5/28</a:t>
+              <a:t>2026/6/2</a:t>
             </a:fld>
             <a:endParaRPr kumimoji="1" lang="ja-JP" altLang="en-US"/>
           </a:p>
@@ -3203,7 +3212,7 @@
           <p:cNvPr id="5" name="フッター プレースホルダー 4">
             <a:extLst>
               <a:ext uri="{FF2B5EF4-FFF2-40B4-BE49-F238E27FC236}">
-                <a16:creationId xmlns:a16="http://schemas.microsoft.com/office/drawing/2014/main" id="{03E145D2-A5F2-40CB-AEF1-9469F9CBC0EC}"/>
+                <a16:creationId xmlns:a16="http://schemas.microsoft.com/office/drawing/2014/main" id="{2ACB9965-319A-462D-9830-558BA6B88CD6}"/>
               </a:ext>
             </a:extLst>
           </p:cNvPr>
@@ -3246,7 +3255,7 @@
           <p:cNvPr id="6" name="スライド番号プレースホルダー 5">
             <a:extLst>
               <a:ext uri="{FF2B5EF4-FFF2-40B4-BE49-F238E27FC236}">
-                <a16:creationId xmlns:a16="http://schemas.microsoft.com/office/drawing/2014/main" id="{843256D9-18E8-4424-B3CB-6A5A89F69145}"/>
+                <a16:creationId xmlns:a16="http://schemas.microsoft.com/office/drawing/2014/main" id="{F3BDD5B3-C43B-402B-BEF2-A7F165420DCE}"/>
               </a:ext>
             </a:extLst>
           </p:cNvPr>
@@ -3280,7 +3289,7 @@
             </a:lvl1pPr>
           </a:lstStyle>
           <a:p>
-            <a:fld id="{ED409326-E4BD-4B55-942C-5160B1C4B3D4}" type="slidenum">
+            <a:fld id="{9FFA33D7-3DB4-4063-8E8B-ED2A0D6080F9}" type="slidenum">
               <a:rPr kumimoji="1" lang="ja-JP" altLang="en-US" smtClean="0"/>
               <a:t>‹#›</a:t>
             </a:fld>
@@ -3291,23 +3300,23 @@
     </p:spTree>
     <p:extLst>
       <p:ext uri="{BB962C8B-B14F-4D97-AF65-F5344CB8AC3E}">
-        <p14:creationId xmlns:p14="http://schemas.microsoft.com/office/powerpoint/2010/main" val="4033382762"/>
+        <p14:creationId xmlns:p14="http://schemas.microsoft.com/office/powerpoint/2010/main" val="2543980985"/>
       </p:ext>
     </p:extLst>
   </p:cSld>
   <p:clrMap bg1="lt1" tx1="dk1" bg2="lt2" tx2="dk2" accent1="accent1" accent2="accent2" accent3="accent3" accent4="accent4" accent5="accent5" accent6="accent6" hlink="hlink" folHlink="folHlink"/>
   <p:sldLayoutIdLst>
-    <p:sldLayoutId id="2147483649" r:id="rId1"/>
-    <p:sldLayoutId id="2147483650" r:id="rId2"/>
-    <p:sldLayoutId id="2147483651" r:id="rId3"/>
-    <p:sldLayoutId id="2147483652" r:id="rId4"/>
-    <p:sldLayoutId id="2147483653" r:id="rId5"/>
-    <p:sldLayoutId id="2147483654" r:id="rId6"/>
-    <p:sldLayoutId id="2147483655" r:id="rId7"/>
-    <p:sldLayoutId id="2147483656" r:id="rId8"/>
-    <p:sldLayoutId id="2147483657" r:id="rId9"/>
-    <p:sldLayoutId id="2147483658" r:id="rId10"/>
-    <p:sldLayoutId id="2147483659" r:id="rId11"/>
+    <p:sldLayoutId id="2147483697" r:id="rId1"/>
+    <p:sldLayoutId id="2147483698" r:id="rId2"/>
+    <p:sldLayoutId id="2147483699" r:id="rId3"/>
+    <p:sldLayoutId id="2147483700" r:id="rId4"/>
+    <p:sldLayoutId id="2147483701" r:id="rId5"/>
+    <p:sldLayoutId id="2147483702" r:id="rId6"/>
+    <p:sldLayoutId id="2147483703" r:id="rId7"/>
+    <p:sldLayoutId id="2147483704" r:id="rId8"/>
+    <p:sldLayoutId id="2147483705" r:id="rId9"/>
+    <p:sldLayoutId id="2147483706" r:id="rId10"/>
+    <p:sldLayoutId id="2147483707" r:id="rId11"/>
   </p:sldLayoutIdLst>
   <p:txStyles>
     <p:titleStyle>
@@ -3609,10 +3618,4343 @@
           <a:chExt cx="0" cy="0"/>
         </a:xfrm>
       </p:grpSpPr>
+      <p:sp>
+        <p:nvSpPr>
+          <p:cNvPr id="2" name="タイトル 1">
+            <a:extLst>
+              <a:ext uri="{FF2B5EF4-FFF2-40B4-BE49-F238E27FC236}">
+                <a16:creationId xmlns:a16="http://schemas.microsoft.com/office/drawing/2014/main" id="{B7AFE148-444F-4D17-9EB2-EB30D868D324}"/>
+              </a:ext>
+            </a:extLst>
+          </p:cNvPr>
+          <p:cNvSpPr>
+            <a:spLocks noGrp="1"/>
+          </p:cNvSpPr>
+          <p:nvPr>
+            <p:ph type="title"/>
+          </p:nvPr>
+        </p:nvSpPr>
+        <p:spPr>
+          <a:xfrm>
+            <a:off x="0" y="2200363"/>
+            <a:ext cx="10515600" cy="1325563"/>
+          </a:xfrm>
+        </p:spPr>
+        <p:txBody>
+          <a:bodyPr>
+            <a:normAutofit/>
+          </a:bodyPr>
+          <a:lstStyle/>
+          <a:p>
+            <a:r>
+              <a:rPr kumimoji="1" lang="ja-JP" altLang="en-US" sz="6000" dirty="0"/>
+              <a:t>コンセプト</a:t>
+            </a:r>
+          </a:p>
+        </p:txBody>
+      </p:sp>
+      <p:sp>
+        <p:nvSpPr>
+          <p:cNvPr id="3" name="コンテンツ プレースホルダー 2">
+            <a:extLst>
+              <a:ext uri="{FF2B5EF4-FFF2-40B4-BE49-F238E27FC236}">
+                <a16:creationId xmlns:a16="http://schemas.microsoft.com/office/drawing/2014/main" id="{E8645006-8522-42F6-9445-E05D2C66E314}"/>
+              </a:ext>
+            </a:extLst>
+          </p:cNvPr>
+          <p:cNvSpPr>
+            <a:spLocks noGrp="1"/>
+          </p:cNvSpPr>
+          <p:nvPr>
+            <p:ph idx="1"/>
+          </p:nvPr>
+        </p:nvSpPr>
+        <p:spPr>
+          <a:xfrm>
+            <a:off x="23988" y="3269853"/>
+            <a:ext cx="11985977" cy="1211086"/>
+          </a:xfrm>
+        </p:spPr>
+        <p:txBody>
+          <a:bodyPr>
+            <a:noAutofit/>
+          </a:bodyPr>
+          <a:lstStyle/>
+          <a:p>
+            <a:pPr marL="0" indent="0">
+              <a:buNone/>
+            </a:pPr>
+            <a:r>
+              <a:rPr kumimoji="1" lang="en-US" altLang="ja-JP" sz="4400" dirty="0"/>
+              <a:t>『</a:t>
+            </a:r>
+            <a:r>
+              <a:rPr kumimoji="1" lang="ja-JP" altLang="en-US" sz="4400" dirty="0"/>
+              <a:t>ステージの回転を上手く使って走り抜ける</a:t>
+            </a:r>
+            <a:r>
+              <a:rPr kumimoji="1" lang="en-US" altLang="ja-JP" sz="4400" dirty="0"/>
+              <a:t>』</a:t>
+            </a:r>
+            <a:endParaRPr kumimoji="1" lang="ja-JP" altLang="en-US" sz="4400" dirty="0"/>
+          </a:p>
+        </p:txBody>
+      </p:sp>
+      <p:sp>
+        <p:nvSpPr>
+          <p:cNvPr id="4" name="タイトル 1">
+            <a:extLst>
+              <a:ext uri="{FF2B5EF4-FFF2-40B4-BE49-F238E27FC236}">
+                <a16:creationId xmlns:a16="http://schemas.microsoft.com/office/drawing/2014/main" id="{E0CE1673-F014-4EED-B3EC-914865334EAD}"/>
+              </a:ext>
+            </a:extLst>
+          </p:cNvPr>
+          <p:cNvSpPr txBox="1">
+            <a:spLocks/>
+          </p:cNvSpPr>
+          <p:nvPr/>
+        </p:nvSpPr>
+        <p:spPr>
+          <a:xfrm>
+            <a:off x="206023" y="3875396"/>
+            <a:ext cx="10515600" cy="1737255"/>
+          </a:xfrm>
+          <a:prstGeom prst="rect">
+            <a:avLst/>
+          </a:prstGeom>
+        </p:spPr>
+        <p:txBody>
+          <a:bodyPr vert="horz" lIns="91440" tIns="45720" rIns="91440" bIns="45720" rtlCol="0" anchor="ctr">
+            <a:normAutofit/>
+          </a:bodyPr>
+          <a:lstStyle>
+            <a:lvl1pPr algn="l" defTabSz="914400" rtl="0" eaLnBrk="1" latinLnBrk="0" hangingPunct="1">
+              <a:lnSpc>
+                <a:spcPct val="90000"/>
+              </a:lnSpc>
+              <a:spcBef>
+                <a:spcPct val="0"/>
+              </a:spcBef>
+              <a:buNone/>
+              <a:defRPr kumimoji="1" sz="4400" kern="1200">
+                <a:solidFill>
+                  <a:schemeClr val="tx1"/>
+                </a:solidFill>
+                <a:latin typeface="+mj-lt"/>
+                <a:ea typeface="+mj-ea"/>
+                <a:cs typeface="+mj-cs"/>
+              </a:defRPr>
+            </a:lvl1pPr>
+          </a:lstStyle>
+          <a:p>
+            <a:r>
+              <a:rPr lang="ja-JP" altLang="en-US" sz="6000" dirty="0"/>
+              <a:t>要素</a:t>
+            </a:r>
+          </a:p>
+        </p:txBody>
+      </p:sp>
+      <p:sp>
+        <p:nvSpPr>
+          <p:cNvPr id="5" name="コンテンツ プレースホルダー 2">
+            <a:extLst>
+              <a:ext uri="{FF2B5EF4-FFF2-40B4-BE49-F238E27FC236}">
+                <a16:creationId xmlns:a16="http://schemas.microsoft.com/office/drawing/2014/main" id="{1AD843C7-8103-4EAE-8F10-65A0214E61D3}"/>
+              </a:ext>
+            </a:extLst>
+          </p:cNvPr>
+          <p:cNvSpPr txBox="1">
+            <a:spLocks/>
+          </p:cNvSpPr>
+          <p:nvPr/>
+        </p:nvSpPr>
+        <p:spPr>
+          <a:xfrm>
+            <a:off x="0" y="5420608"/>
+            <a:ext cx="12192000" cy="1211086"/>
+          </a:xfrm>
+          <a:prstGeom prst="rect">
+            <a:avLst/>
+          </a:prstGeom>
+        </p:spPr>
+        <p:txBody>
+          <a:bodyPr vert="horz" lIns="91440" tIns="45720" rIns="91440" bIns="45720" rtlCol="0">
+            <a:noAutofit/>
+          </a:bodyPr>
+          <a:lstStyle>
+            <a:lvl1pPr marL="228600" indent="-228600" algn="l" defTabSz="914400" rtl="0" eaLnBrk="1" latinLnBrk="0" hangingPunct="1">
+              <a:lnSpc>
+                <a:spcPct val="90000"/>
+              </a:lnSpc>
+              <a:spcBef>
+                <a:spcPts val="1000"/>
+              </a:spcBef>
+              <a:buFont typeface="Arial" panose="020B0604020202020204" pitchFamily="34" charset="0"/>
+              <a:buChar char="•"/>
+              <a:defRPr kumimoji="1" sz="2800" kern="1200">
+                <a:solidFill>
+                  <a:schemeClr val="tx1"/>
+                </a:solidFill>
+                <a:latin typeface="+mn-lt"/>
+                <a:ea typeface="+mn-ea"/>
+                <a:cs typeface="+mn-cs"/>
+              </a:defRPr>
+            </a:lvl1pPr>
+            <a:lvl2pPr marL="685800" indent="-228600" algn="l" defTabSz="914400" rtl="0" eaLnBrk="1" latinLnBrk="0" hangingPunct="1">
+              <a:lnSpc>
+                <a:spcPct val="90000"/>
+              </a:lnSpc>
+              <a:spcBef>
+                <a:spcPts val="500"/>
+              </a:spcBef>
+              <a:buFont typeface="Arial" panose="020B0604020202020204" pitchFamily="34" charset="0"/>
+              <a:buChar char="•"/>
+              <a:defRPr kumimoji="1" sz="2400" kern="1200">
+                <a:solidFill>
+                  <a:schemeClr val="tx1"/>
+                </a:solidFill>
+                <a:latin typeface="+mn-lt"/>
+                <a:ea typeface="+mn-ea"/>
+                <a:cs typeface="+mn-cs"/>
+              </a:defRPr>
+            </a:lvl2pPr>
+            <a:lvl3pPr marL="1143000" indent="-228600" algn="l" defTabSz="914400" rtl="0" eaLnBrk="1" latinLnBrk="0" hangingPunct="1">
+              <a:lnSpc>
+                <a:spcPct val="90000"/>
+              </a:lnSpc>
+              <a:spcBef>
+                <a:spcPts val="500"/>
+              </a:spcBef>
+              <a:buFont typeface="Arial" panose="020B0604020202020204" pitchFamily="34" charset="0"/>
+              <a:buChar char="•"/>
+              <a:defRPr kumimoji="1" sz="2000" kern="1200">
+                <a:solidFill>
+                  <a:schemeClr val="tx1"/>
+                </a:solidFill>
+                <a:latin typeface="+mn-lt"/>
+                <a:ea typeface="+mn-ea"/>
+                <a:cs typeface="+mn-cs"/>
+              </a:defRPr>
+            </a:lvl3pPr>
+            <a:lvl4pPr marL="1600200" indent="-228600" algn="l" defTabSz="914400" rtl="0" eaLnBrk="1" latinLnBrk="0" hangingPunct="1">
+              <a:lnSpc>
+                <a:spcPct val="90000"/>
+              </a:lnSpc>
+              <a:spcBef>
+                <a:spcPts val="500"/>
+              </a:spcBef>
+              <a:buFont typeface="Arial" panose="020B0604020202020204" pitchFamily="34" charset="0"/>
+              <a:buChar char="•"/>
+              <a:defRPr kumimoji="1" sz="1800" kern="1200">
+                <a:solidFill>
+                  <a:schemeClr val="tx1"/>
+                </a:solidFill>
+                <a:latin typeface="+mn-lt"/>
+                <a:ea typeface="+mn-ea"/>
+                <a:cs typeface="+mn-cs"/>
+              </a:defRPr>
+            </a:lvl4pPr>
+            <a:lvl5pPr marL="2057400" indent="-228600" algn="l" defTabSz="914400" rtl="0" eaLnBrk="1" latinLnBrk="0" hangingPunct="1">
+              <a:lnSpc>
+                <a:spcPct val="90000"/>
+              </a:lnSpc>
+              <a:spcBef>
+                <a:spcPts val="500"/>
+              </a:spcBef>
+              <a:buFont typeface="Arial" panose="020B0604020202020204" pitchFamily="34" charset="0"/>
+              <a:buChar char="•"/>
+              <a:defRPr kumimoji="1" sz="1800" kern="1200">
+                <a:solidFill>
+                  <a:schemeClr val="tx1"/>
+                </a:solidFill>
+                <a:latin typeface="+mn-lt"/>
+                <a:ea typeface="+mn-ea"/>
+                <a:cs typeface="+mn-cs"/>
+              </a:defRPr>
+            </a:lvl5pPr>
+            <a:lvl6pPr marL="2514600" indent="-228600" algn="l" defTabSz="914400" rtl="0" eaLnBrk="1" latinLnBrk="0" hangingPunct="1">
+              <a:lnSpc>
+                <a:spcPct val="90000"/>
+              </a:lnSpc>
+              <a:spcBef>
+                <a:spcPts val="500"/>
+              </a:spcBef>
+              <a:buFont typeface="Arial" panose="020B0604020202020204" pitchFamily="34" charset="0"/>
+              <a:buChar char="•"/>
+              <a:defRPr kumimoji="1" sz="1800" kern="1200">
+                <a:solidFill>
+                  <a:schemeClr val="tx1"/>
+                </a:solidFill>
+                <a:latin typeface="+mn-lt"/>
+                <a:ea typeface="+mn-ea"/>
+                <a:cs typeface="+mn-cs"/>
+              </a:defRPr>
+            </a:lvl6pPr>
+            <a:lvl7pPr marL="2971800" indent="-228600" algn="l" defTabSz="914400" rtl="0" eaLnBrk="1" latinLnBrk="0" hangingPunct="1">
+              <a:lnSpc>
+                <a:spcPct val="90000"/>
+              </a:lnSpc>
+              <a:spcBef>
+                <a:spcPts val="500"/>
+              </a:spcBef>
+              <a:buFont typeface="Arial" panose="020B0604020202020204" pitchFamily="34" charset="0"/>
+              <a:buChar char="•"/>
+              <a:defRPr kumimoji="1" sz="1800" kern="1200">
+                <a:solidFill>
+                  <a:schemeClr val="tx1"/>
+                </a:solidFill>
+                <a:latin typeface="+mn-lt"/>
+                <a:ea typeface="+mn-ea"/>
+                <a:cs typeface="+mn-cs"/>
+              </a:defRPr>
+            </a:lvl7pPr>
+            <a:lvl8pPr marL="3429000" indent="-228600" algn="l" defTabSz="914400" rtl="0" eaLnBrk="1" latinLnBrk="0" hangingPunct="1">
+              <a:lnSpc>
+                <a:spcPct val="90000"/>
+              </a:lnSpc>
+              <a:spcBef>
+                <a:spcPts val="500"/>
+              </a:spcBef>
+              <a:buFont typeface="Arial" panose="020B0604020202020204" pitchFamily="34" charset="0"/>
+              <a:buChar char="•"/>
+              <a:defRPr kumimoji="1" sz="1800" kern="1200">
+                <a:solidFill>
+                  <a:schemeClr val="tx1"/>
+                </a:solidFill>
+                <a:latin typeface="+mn-lt"/>
+                <a:ea typeface="+mn-ea"/>
+                <a:cs typeface="+mn-cs"/>
+              </a:defRPr>
+            </a:lvl8pPr>
+            <a:lvl9pPr marL="3886200" indent="-228600" algn="l" defTabSz="914400" rtl="0" eaLnBrk="1" latinLnBrk="0" hangingPunct="1">
+              <a:lnSpc>
+                <a:spcPct val="90000"/>
+              </a:lnSpc>
+              <a:spcBef>
+                <a:spcPts val="500"/>
+              </a:spcBef>
+              <a:buFont typeface="Arial" panose="020B0604020202020204" pitchFamily="34" charset="0"/>
+              <a:buChar char="•"/>
+              <a:defRPr kumimoji="1" sz="1800" kern="1200">
+                <a:solidFill>
+                  <a:schemeClr val="tx1"/>
+                </a:solidFill>
+                <a:latin typeface="+mn-lt"/>
+                <a:ea typeface="+mn-ea"/>
+                <a:cs typeface="+mn-cs"/>
+              </a:defRPr>
+            </a:lvl9pPr>
+          </a:lstStyle>
+          <a:p>
+            <a:pPr marL="0" indent="0">
+              <a:buNone/>
+            </a:pPr>
+            <a:r>
+              <a:rPr kumimoji="1" lang="en-US" altLang="ja-JP" sz="4400" dirty="0"/>
+              <a:t>『</a:t>
+            </a:r>
+            <a:r>
+              <a:rPr kumimoji="1" lang="ja-JP" altLang="en-US" sz="4400" dirty="0"/>
+              <a:t>ステージ回転</a:t>
+            </a:r>
+            <a:r>
+              <a:rPr kumimoji="1" lang="en-US" altLang="ja-JP" sz="4400" dirty="0"/>
+              <a:t>』</a:t>
+            </a:r>
+            <a:r>
+              <a:rPr lang="en-US" altLang="ja-JP" sz="4400" dirty="0"/>
+              <a:t>『</a:t>
+            </a:r>
+            <a:r>
+              <a:rPr kumimoji="1" lang="ja-JP" altLang="en-US" sz="4400" dirty="0"/>
+              <a:t>走り続ける</a:t>
+            </a:r>
+            <a:r>
+              <a:rPr kumimoji="1" lang="en-US" altLang="ja-JP" sz="4400" dirty="0"/>
+              <a:t>』『</a:t>
+            </a:r>
+            <a:r>
+              <a:rPr kumimoji="1" lang="ja-JP" altLang="en-US" sz="4400" dirty="0"/>
+              <a:t>ループ</a:t>
+            </a:r>
+            <a:r>
+              <a:rPr kumimoji="1" lang="en-US" altLang="ja-JP" sz="4400" dirty="0"/>
+              <a:t>』</a:t>
+            </a:r>
+            <a:endParaRPr kumimoji="1" lang="ja-JP" altLang="en-US" sz="4400" dirty="0"/>
+          </a:p>
+        </p:txBody>
+      </p:sp>
+      <p:sp>
+        <p:nvSpPr>
+          <p:cNvPr id="6" name="タイトル 1">
+            <a:extLst>
+              <a:ext uri="{FF2B5EF4-FFF2-40B4-BE49-F238E27FC236}">
+                <a16:creationId xmlns:a16="http://schemas.microsoft.com/office/drawing/2014/main" id="{271CEB45-BE98-469F-A004-6972D7990BBC}"/>
+              </a:ext>
+            </a:extLst>
+          </p:cNvPr>
+          <p:cNvSpPr txBox="1">
+            <a:spLocks/>
+          </p:cNvSpPr>
+          <p:nvPr/>
+        </p:nvSpPr>
+        <p:spPr>
+          <a:xfrm>
+            <a:off x="23988" y="154780"/>
+            <a:ext cx="10515600" cy="1325563"/>
+          </a:xfrm>
+          <a:prstGeom prst="rect">
+            <a:avLst/>
+          </a:prstGeom>
+        </p:spPr>
+        <p:txBody>
+          <a:bodyPr vert="horz" lIns="91440" tIns="45720" rIns="91440" bIns="45720" rtlCol="0" anchor="ctr">
+            <a:normAutofit/>
+          </a:bodyPr>
+          <a:lstStyle>
+            <a:lvl1pPr algn="l" defTabSz="914400" rtl="0" eaLnBrk="1" latinLnBrk="0" hangingPunct="1">
+              <a:lnSpc>
+                <a:spcPct val="90000"/>
+              </a:lnSpc>
+              <a:spcBef>
+                <a:spcPct val="0"/>
+              </a:spcBef>
+              <a:buNone/>
+              <a:defRPr kumimoji="1" sz="4400" kern="1200">
+                <a:solidFill>
+                  <a:schemeClr val="tx1"/>
+                </a:solidFill>
+                <a:latin typeface="+mj-lt"/>
+                <a:ea typeface="+mj-ea"/>
+                <a:cs typeface="+mj-cs"/>
+              </a:defRPr>
+            </a:lvl1pPr>
+          </a:lstStyle>
+          <a:p>
+            <a:r>
+              <a:rPr lang="ja-JP" altLang="en-US" sz="6000" dirty="0"/>
+              <a:t>タイトル</a:t>
+            </a:r>
+          </a:p>
+        </p:txBody>
+      </p:sp>
+      <p:sp>
+        <p:nvSpPr>
+          <p:cNvPr id="7" name="コンテンツ プレースホルダー 2">
+            <a:extLst>
+              <a:ext uri="{FF2B5EF4-FFF2-40B4-BE49-F238E27FC236}">
+                <a16:creationId xmlns:a16="http://schemas.microsoft.com/office/drawing/2014/main" id="{236C0403-310F-4A3B-93F8-F7A5C23A632A}"/>
+              </a:ext>
+            </a:extLst>
+          </p:cNvPr>
+          <p:cNvSpPr txBox="1">
+            <a:spLocks/>
+          </p:cNvSpPr>
+          <p:nvPr/>
+        </p:nvSpPr>
+        <p:spPr>
+          <a:xfrm>
+            <a:off x="104421" y="1245349"/>
+            <a:ext cx="10515600" cy="1211086"/>
+          </a:xfrm>
+          <a:prstGeom prst="rect">
+            <a:avLst/>
+          </a:prstGeom>
+        </p:spPr>
+        <p:txBody>
+          <a:bodyPr vert="horz" lIns="91440" tIns="45720" rIns="91440" bIns="45720" rtlCol="0">
+            <a:normAutofit/>
+          </a:bodyPr>
+          <a:lstStyle>
+            <a:lvl1pPr marL="228600" indent="-228600" algn="l" defTabSz="914400" rtl="0" eaLnBrk="1" latinLnBrk="0" hangingPunct="1">
+              <a:lnSpc>
+                <a:spcPct val="90000"/>
+              </a:lnSpc>
+              <a:spcBef>
+                <a:spcPts val="1000"/>
+              </a:spcBef>
+              <a:buFont typeface="Arial" panose="020B0604020202020204" pitchFamily="34" charset="0"/>
+              <a:buChar char="•"/>
+              <a:defRPr kumimoji="1" sz="2800" kern="1200">
+                <a:solidFill>
+                  <a:schemeClr val="tx1"/>
+                </a:solidFill>
+                <a:latin typeface="+mn-lt"/>
+                <a:ea typeface="+mn-ea"/>
+                <a:cs typeface="+mn-cs"/>
+              </a:defRPr>
+            </a:lvl1pPr>
+            <a:lvl2pPr marL="685800" indent="-228600" algn="l" defTabSz="914400" rtl="0" eaLnBrk="1" latinLnBrk="0" hangingPunct="1">
+              <a:lnSpc>
+                <a:spcPct val="90000"/>
+              </a:lnSpc>
+              <a:spcBef>
+                <a:spcPts val="500"/>
+              </a:spcBef>
+              <a:buFont typeface="Arial" panose="020B0604020202020204" pitchFamily="34" charset="0"/>
+              <a:buChar char="•"/>
+              <a:defRPr kumimoji="1" sz="2400" kern="1200">
+                <a:solidFill>
+                  <a:schemeClr val="tx1"/>
+                </a:solidFill>
+                <a:latin typeface="+mn-lt"/>
+                <a:ea typeface="+mn-ea"/>
+                <a:cs typeface="+mn-cs"/>
+              </a:defRPr>
+            </a:lvl2pPr>
+            <a:lvl3pPr marL="1143000" indent="-228600" algn="l" defTabSz="914400" rtl="0" eaLnBrk="1" latinLnBrk="0" hangingPunct="1">
+              <a:lnSpc>
+                <a:spcPct val="90000"/>
+              </a:lnSpc>
+              <a:spcBef>
+                <a:spcPts val="500"/>
+              </a:spcBef>
+              <a:buFont typeface="Arial" panose="020B0604020202020204" pitchFamily="34" charset="0"/>
+              <a:buChar char="•"/>
+              <a:defRPr kumimoji="1" sz="2000" kern="1200">
+                <a:solidFill>
+                  <a:schemeClr val="tx1"/>
+                </a:solidFill>
+                <a:latin typeface="+mn-lt"/>
+                <a:ea typeface="+mn-ea"/>
+                <a:cs typeface="+mn-cs"/>
+              </a:defRPr>
+            </a:lvl3pPr>
+            <a:lvl4pPr marL="1600200" indent="-228600" algn="l" defTabSz="914400" rtl="0" eaLnBrk="1" latinLnBrk="0" hangingPunct="1">
+              <a:lnSpc>
+                <a:spcPct val="90000"/>
+              </a:lnSpc>
+              <a:spcBef>
+                <a:spcPts val="500"/>
+              </a:spcBef>
+              <a:buFont typeface="Arial" panose="020B0604020202020204" pitchFamily="34" charset="0"/>
+              <a:buChar char="•"/>
+              <a:defRPr kumimoji="1" sz="1800" kern="1200">
+                <a:solidFill>
+                  <a:schemeClr val="tx1"/>
+                </a:solidFill>
+                <a:latin typeface="+mn-lt"/>
+                <a:ea typeface="+mn-ea"/>
+                <a:cs typeface="+mn-cs"/>
+              </a:defRPr>
+            </a:lvl4pPr>
+            <a:lvl5pPr marL="2057400" indent="-228600" algn="l" defTabSz="914400" rtl="0" eaLnBrk="1" latinLnBrk="0" hangingPunct="1">
+              <a:lnSpc>
+                <a:spcPct val="90000"/>
+              </a:lnSpc>
+              <a:spcBef>
+                <a:spcPts val="500"/>
+              </a:spcBef>
+              <a:buFont typeface="Arial" panose="020B0604020202020204" pitchFamily="34" charset="0"/>
+              <a:buChar char="•"/>
+              <a:defRPr kumimoji="1" sz="1800" kern="1200">
+                <a:solidFill>
+                  <a:schemeClr val="tx1"/>
+                </a:solidFill>
+                <a:latin typeface="+mn-lt"/>
+                <a:ea typeface="+mn-ea"/>
+                <a:cs typeface="+mn-cs"/>
+              </a:defRPr>
+            </a:lvl5pPr>
+            <a:lvl6pPr marL="2514600" indent="-228600" algn="l" defTabSz="914400" rtl="0" eaLnBrk="1" latinLnBrk="0" hangingPunct="1">
+              <a:lnSpc>
+                <a:spcPct val="90000"/>
+              </a:lnSpc>
+              <a:spcBef>
+                <a:spcPts val="500"/>
+              </a:spcBef>
+              <a:buFont typeface="Arial" panose="020B0604020202020204" pitchFamily="34" charset="0"/>
+              <a:buChar char="•"/>
+              <a:defRPr kumimoji="1" sz="1800" kern="1200">
+                <a:solidFill>
+                  <a:schemeClr val="tx1"/>
+                </a:solidFill>
+                <a:latin typeface="+mn-lt"/>
+                <a:ea typeface="+mn-ea"/>
+                <a:cs typeface="+mn-cs"/>
+              </a:defRPr>
+            </a:lvl6pPr>
+            <a:lvl7pPr marL="2971800" indent="-228600" algn="l" defTabSz="914400" rtl="0" eaLnBrk="1" latinLnBrk="0" hangingPunct="1">
+              <a:lnSpc>
+                <a:spcPct val="90000"/>
+              </a:lnSpc>
+              <a:spcBef>
+                <a:spcPts val="500"/>
+              </a:spcBef>
+              <a:buFont typeface="Arial" panose="020B0604020202020204" pitchFamily="34" charset="0"/>
+              <a:buChar char="•"/>
+              <a:defRPr kumimoji="1" sz="1800" kern="1200">
+                <a:solidFill>
+                  <a:schemeClr val="tx1"/>
+                </a:solidFill>
+                <a:latin typeface="+mn-lt"/>
+                <a:ea typeface="+mn-ea"/>
+                <a:cs typeface="+mn-cs"/>
+              </a:defRPr>
+            </a:lvl7pPr>
+            <a:lvl8pPr marL="3429000" indent="-228600" algn="l" defTabSz="914400" rtl="0" eaLnBrk="1" latinLnBrk="0" hangingPunct="1">
+              <a:lnSpc>
+                <a:spcPct val="90000"/>
+              </a:lnSpc>
+              <a:spcBef>
+                <a:spcPts val="500"/>
+              </a:spcBef>
+              <a:buFont typeface="Arial" panose="020B0604020202020204" pitchFamily="34" charset="0"/>
+              <a:buChar char="•"/>
+              <a:defRPr kumimoji="1" sz="1800" kern="1200">
+                <a:solidFill>
+                  <a:schemeClr val="tx1"/>
+                </a:solidFill>
+                <a:latin typeface="+mn-lt"/>
+                <a:ea typeface="+mn-ea"/>
+                <a:cs typeface="+mn-cs"/>
+              </a:defRPr>
+            </a:lvl8pPr>
+            <a:lvl9pPr marL="3886200" indent="-228600" algn="l" defTabSz="914400" rtl="0" eaLnBrk="1" latinLnBrk="0" hangingPunct="1">
+              <a:lnSpc>
+                <a:spcPct val="90000"/>
+              </a:lnSpc>
+              <a:spcBef>
+                <a:spcPts val="500"/>
+              </a:spcBef>
+              <a:buFont typeface="Arial" panose="020B0604020202020204" pitchFamily="34" charset="0"/>
+              <a:buChar char="•"/>
+              <a:defRPr kumimoji="1" sz="1800" kern="1200">
+                <a:solidFill>
+                  <a:schemeClr val="tx1"/>
+                </a:solidFill>
+                <a:latin typeface="+mn-lt"/>
+                <a:ea typeface="+mn-ea"/>
+                <a:cs typeface="+mn-cs"/>
+              </a:defRPr>
+            </a:lvl9pPr>
+          </a:lstStyle>
+          <a:p>
+            <a:pPr marL="0" indent="0">
+              <a:buFont typeface="Arial" panose="020B0604020202020204" pitchFamily="34" charset="0"/>
+              <a:buNone/>
+            </a:pPr>
+            <a:r>
+              <a:rPr lang="en-US" altLang="ja-JP" sz="4400" dirty="0"/>
+              <a:t>『』</a:t>
+            </a:r>
+            <a:endParaRPr lang="ja-JP" altLang="en-US" sz="4400" dirty="0"/>
+          </a:p>
+        </p:txBody>
+      </p:sp>
     </p:spTree>
     <p:extLst>
       <p:ext uri="{BB962C8B-B14F-4D97-AF65-F5344CB8AC3E}">
-        <p14:creationId xmlns:p14="http://schemas.microsoft.com/office/powerpoint/2010/main" val="4138280426"/>
+        <p14:creationId xmlns:p14="http://schemas.microsoft.com/office/powerpoint/2010/main" val="3931441095"/>
+      </p:ext>
+    </p:extLst>
+  </p:cSld>
+  <p:clrMapOvr>
+    <a:masterClrMapping/>
+  </p:clrMapOvr>
+</p:sld>
+</file>
+
+<file path=ppt/slides/slide2.xml><?xml version="1.0" encoding="utf-8"?>
+<p:sld xmlns:a="http://schemas.openxmlformats.org/drawingml/2006/main" xmlns:r="http://schemas.openxmlformats.org/officeDocument/2006/relationships" xmlns:p="http://schemas.openxmlformats.org/presentationml/2006/main">
+  <p:cSld>
+    <p:spTree>
+      <p:nvGrpSpPr>
+        <p:cNvPr id="1" name=""/>
+        <p:cNvGrpSpPr/>
+        <p:nvPr/>
+      </p:nvGrpSpPr>
+      <p:grpSpPr>
+        <a:xfrm>
+          <a:off x="0" y="0"/>
+          <a:ext cx="0" cy="0"/>
+          <a:chOff x="0" y="0"/>
+          <a:chExt cx="0" cy="0"/>
+        </a:xfrm>
+      </p:grpSpPr>
+      <p:sp>
+        <p:nvSpPr>
+          <p:cNvPr id="2" name="タイトル 1">
+            <a:extLst>
+              <a:ext uri="{FF2B5EF4-FFF2-40B4-BE49-F238E27FC236}">
+                <a16:creationId xmlns:a16="http://schemas.microsoft.com/office/drawing/2014/main" id="{26BAFEC3-C274-404F-899E-4B756C272EBA}"/>
+              </a:ext>
+            </a:extLst>
+          </p:cNvPr>
+          <p:cNvSpPr>
+            <a:spLocks noGrp="1"/>
+          </p:cNvSpPr>
+          <p:nvPr>
+            <p:ph type="title"/>
+          </p:nvPr>
+        </p:nvSpPr>
+        <p:spPr>
+          <a:xfrm>
+            <a:off x="0" y="0"/>
+            <a:ext cx="10515600" cy="1325563"/>
+          </a:xfrm>
+        </p:spPr>
+        <p:txBody>
+          <a:bodyPr/>
+          <a:lstStyle/>
+          <a:p>
+            <a:r>
+              <a:rPr kumimoji="1" lang="ja-JP" altLang="en-US" b="1" u="sng" dirty="0">
+                <a:solidFill>
+                  <a:srgbClr val="002060"/>
+                </a:solidFill>
+                <a:effectLst>
+                  <a:outerShdw blurRad="38100" dist="38100" dir="2700000" algn="tl">
+                    <a:srgbClr val="000000">
+                      <a:alpha val="43137"/>
+                    </a:srgbClr>
+                  </a:outerShdw>
+                </a:effectLst>
+              </a:rPr>
+              <a:t>ゲーム内容</a:t>
+            </a:r>
+          </a:p>
+        </p:txBody>
+      </p:sp>
+      <p:sp>
+        <p:nvSpPr>
+          <p:cNvPr id="5" name="テキスト ボックス 4">
+            <a:extLst>
+              <a:ext uri="{FF2B5EF4-FFF2-40B4-BE49-F238E27FC236}">
+                <a16:creationId xmlns:a16="http://schemas.microsoft.com/office/drawing/2014/main" id="{7D12438B-FF29-481B-B97D-41A65A7C2657}"/>
+              </a:ext>
+            </a:extLst>
+          </p:cNvPr>
+          <p:cNvSpPr txBox="1"/>
+          <p:nvPr/>
+        </p:nvSpPr>
+        <p:spPr>
+          <a:xfrm>
+            <a:off x="0" y="896083"/>
+            <a:ext cx="10758312" cy="2339102"/>
+          </a:xfrm>
+          <a:prstGeom prst="rect">
+            <a:avLst/>
+          </a:prstGeom>
+          <a:noFill/>
+        </p:spPr>
+        <p:txBody>
+          <a:bodyPr wrap="square" rtlCol="0">
+            <a:spAutoFit/>
+          </a:bodyPr>
+          <a:lstStyle/>
+          <a:p>
+            <a:r>
+              <a:rPr kumimoji="1" lang="ja-JP" altLang="en-US" sz="2400" dirty="0"/>
+              <a:t>・四角形の</a:t>
+            </a:r>
+            <a:r>
+              <a:rPr kumimoji="1" lang="ja-JP" altLang="en-US" sz="2400" u="sng" dirty="0">
+                <a:solidFill>
+                  <a:schemeClr val="accent1">
+                    <a:lumMod val="75000"/>
+                  </a:schemeClr>
+                </a:solidFill>
+              </a:rPr>
+              <a:t>箱型のステージ</a:t>
+            </a:r>
+            <a:r>
+              <a:rPr kumimoji="1" lang="ja-JP" altLang="en-US" sz="2400" dirty="0"/>
+              <a:t>を止まることなく奥に向かって走り続けるゲーム</a:t>
+            </a:r>
+            <a:endParaRPr kumimoji="1" lang="en-US" altLang="ja-JP" sz="2400" dirty="0"/>
+          </a:p>
+          <a:p>
+            <a:r>
+              <a:rPr kumimoji="1" lang="ja-JP" altLang="en-US" sz="2400" dirty="0"/>
+              <a:t>・自動で進むため</a:t>
+            </a:r>
+            <a:r>
+              <a:rPr kumimoji="1" lang="ja-JP" altLang="en-US" sz="2400" u="sng" dirty="0">
+                <a:solidFill>
+                  <a:srgbClr val="FF0000"/>
+                </a:solidFill>
+              </a:rPr>
+              <a:t>止まることはできない</a:t>
+            </a:r>
+            <a:endParaRPr kumimoji="1" lang="en-US" altLang="ja-JP" sz="2400" u="sng" dirty="0">
+              <a:solidFill>
+                <a:srgbClr val="FF0000"/>
+              </a:solidFill>
+            </a:endParaRPr>
+          </a:p>
+          <a:p>
+            <a:r>
+              <a:rPr lang="ja-JP" altLang="en-US" sz="2400" dirty="0"/>
+              <a:t>・ステージには障害物などが置いてあり、正面から当たるとゲームオーバーになるためジャンプ、左右移動で避けながら進まなければならない</a:t>
+            </a:r>
+            <a:endParaRPr lang="en-US" altLang="ja-JP" sz="2400" dirty="0"/>
+          </a:p>
+          <a:p>
+            <a:endParaRPr kumimoji="1" lang="en-US" altLang="ja-JP" sz="3200" dirty="0"/>
+          </a:p>
+          <a:p>
+            <a:endParaRPr kumimoji="1" lang="en-US" altLang="ja-JP" dirty="0"/>
+          </a:p>
+        </p:txBody>
+      </p:sp>
+      <p:grpSp>
+        <p:nvGrpSpPr>
+          <p:cNvPr id="12" name="グループ化 11">
+            <a:extLst>
+              <a:ext uri="{FF2B5EF4-FFF2-40B4-BE49-F238E27FC236}">
+                <a16:creationId xmlns:a16="http://schemas.microsoft.com/office/drawing/2014/main" id="{C37CBD88-12B4-4564-9576-8F1033B20527}"/>
+              </a:ext>
+            </a:extLst>
+          </p:cNvPr>
+          <p:cNvGrpSpPr/>
+          <p:nvPr/>
+        </p:nvGrpSpPr>
+        <p:grpSpPr>
+          <a:xfrm>
+            <a:off x="2243023" y="5008754"/>
+            <a:ext cx="975146" cy="533401"/>
+            <a:chOff x="2178754" y="4999037"/>
+            <a:chExt cx="1151467" cy="533401"/>
+          </a:xfrm>
+        </p:grpSpPr>
+        <p:sp>
+          <p:nvSpPr>
+            <p:cNvPr id="9" name="テキスト ボックス 8">
+              <a:extLst>
+                <a:ext uri="{FF2B5EF4-FFF2-40B4-BE49-F238E27FC236}">
+                  <a16:creationId xmlns:a16="http://schemas.microsoft.com/office/drawing/2014/main" id="{C27202E7-C292-41D6-B70E-1EEF101AC0FE}"/>
+                </a:ext>
+              </a:extLst>
+            </p:cNvPr>
+            <p:cNvSpPr txBox="1"/>
+            <p:nvPr/>
+          </p:nvSpPr>
+          <p:spPr>
+            <a:xfrm>
+              <a:off x="2427111" y="5163106"/>
+              <a:ext cx="654755" cy="369332"/>
+            </a:xfrm>
+            <a:prstGeom prst="rect">
+              <a:avLst/>
+            </a:prstGeom>
+            <a:noFill/>
+          </p:spPr>
+          <p:txBody>
+            <a:bodyPr wrap="square" rtlCol="0">
+              <a:spAutoFit/>
+            </a:bodyPr>
+            <a:lstStyle/>
+            <a:p>
+              <a:r>
+                <a:rPr kumimoji="1" lang="ja-JP" altLang="en-US" dirty="0">
+                  <a:solidFill>
+                    <a:srgbClr val="FF0000"/>
+                  </a:solidFill>
+                </a:rPr>
+                <a:t>●</a:t>
+              </a:r>
+            </a:p>
+          </p:txBody>
+        </p:sp>
+        <p:sp>
+          <p:nvSpPr>
+            <p:cNvPr id="10" name="テキスト ボックス 9">
+              <a:extLst>
+                <a:ext uri="{FF2B5EF4-FFF2-40B4-BE49-F238E27FC236}">
+                  <a16:creationId xmlns:a16="http://schemas.microsoft.com/office/drawing/2014/main" id="{2526EF94-0668-4517-ADBF-4DF8702928D8}"/>
+                </a:ext>
+              </a:extLst>
+            </p:cNvPr>
+            <p:cNvSpPr txBox="1"/>
+            <p:nvPr/>
+          </p:nvSpPr>
+          <p:spPr>
+            <a:xfrm>
+              <a:off x="2178754" y="4999037"/>
+              <a:ext cx="1151467" cy="276999"/>
+            </a:xfrm>
+            <a:prstGeom prst="rect">
+              <a:avLst/>
+            </a:prstGeom>
+            <a:noFill/>
+          </p:spPr>
+          <p:txBody>
+            <a:bodyPr wrap="square" rtlCol="0">
+              <a:spAutoFit/>
+            </a:bodyPr>
+            <a:lstStyle/>
+            <a:p>
+              <a:r>
+                <a:rPr kumimoji="1" lang="ja-JP" altLang="en-US" sz="1200" dirty="0"/>
+                <a:t>プレイヤー</a:t>
+              </a:r>
+            </a:p>
+          </p:txBody>
+        </p:sp>
+      </p:grpSp>
+      <p:grpSp>
+        <p:nvGrpSpPr>
+          <p:cNvPr id="35" name="グループ化 34">
+            <a:extLst>
+              <a:ext uri="{FF2B5EF4-FFF2-40B4-BE49-F238E27FC236}">
+                <a16:creationId xmlns:a16="http://schemas.microsoft.com/office/drawing/2014/main" id="{E52CB9E2-99DF-4333-8EAD-D39F82C02C12}"/>
+              </a:ext>
+            </a:extLst>
+          </p:cNvPr>
+          <p:cNvGrpSpPr/>
+          <p:nvPr/>
+        </p:nvGrpSpPr>
+        <p:grpSpPr>
+          <a:xfrm>
+            <a:off x="790499" y="2393572"/>
+            <a:ext cx="3945467" cy="3945467"/>
+            <a:chOff x="659631" y="2359377"/>
+            <a:chExt cx="3945467" cy="3945467"/>
+          </a:xfrm>
+        </p:grpSpPr>
+        <p:pic>
+          <p:nvPicPr>
+            <p:cNvPr id="7" name="図 6">
+              <a:extLst>
+                <a:ext uri="{FF2B5EF4-FFF2-40B4-BE49-F238E27FC236}">
+                  <a16:creationId xmlns:a16="http://schemas.microsoft.com/office/drawing/2014/main" id="{55087E74-7C8C-4222-93AF-3401FE244229}"/>
+                </a:ext>
+              </a:extLst>
+            </p:cNvPr>
+            <p:cNvPicPr>
+              <a:picLocks noChangeAspect="1"/>
+            </p:cNvPicPr>
+            <p:nvPr/>
+          </p:nvPicPr>
+          <p:blipFill>
+            <a:blip r:embed="rId2">
+              <a:extLst>
+                <a:ext uri="{28A0092B-C50C-407E-A947-70E740481C1C}">
+                  <a14:useLocalDpi xmlns:a14="http://schemas.microsoft.com/office/drawing/2010/main" val="0"/>
+                </a:ext>
+              </a:extLst>
+            </a:blip>
+            <a:stretch>
+              <a:fillRect/>
+            </a:stretch>
+          </p:blipFill>
+          <p:spPr>
+            <a:xfrm>
+              <a:off x="659631" y="2359377"/>
+              <a:ext cx="3945467" cy="3945467"/>
+            </a:xfrm>
+            <a:prstGeom prst="rect">
+              <a:avLst/>
+            </a:prstGeom>
+          </p:spPr>
+        </p:pic>
+        <p:sp>
+          <p:nvSpPr>
+            <p:cNvPr id="13" name="テキスト ボックス 12">
+              <a:extLst>
+                <a:ext uri="{FF2B5EF4-FFF2-40B4-BE49-F238E27FC236}">
+                  <a16:creationId xmlns:a16="http://schemas.microsoft.com/office/drawing/2014/main" id="{EE8166DD-F08A-4694-B8A3-94FF16B1E000}"/>
+                </a:ext>
+              </a:extLst>
+            </p:cNvPr>
+            <p:cNvSpPr txBox="1"/>
+            <p:nvPr/>
+          </p:nvSpPr>
+          <p:spPr>
+            <a:xfrm>
+              <a:off x="3239912" y="5204178"/>
+              <a:ext cx="756355" cy="461665"/>
+            </a:xfrm>
+            <a:prstGeom prst="rect">
+              <a:avLst/>
+            </a:prstGeom>
+            <a:noFill/>
+          </p:spPr>
+          <p:txBody>
+            <a:bodyPr wrap="square" rtlCol="0">
+              <a:spAutoFit/>
+            </a:bodyPr>
+            <a:lstStyle/>
+            <a:p>
+              <a:r>
+                <a:rPr kumimoji="1" lang="ja-JP" altLang="en-US" sz="2400" dirty="0"/>
+                <a:t>■</a:t>
+              </a:r>
+            </a:p>
+          </p:txBody>
+        </p:sp>
+        <p:sp>
+          <p:nvSpPr>
+            <p:cNvPr id="14" name="テキスト ボックス 13">
+              <a:extLst>
+                <a:ext uri="{FF2B5EF4-FFF2-40B4-BE49-F238E27FC236}">
+                  <a16:creationId xmlns:a16="http://schemas.microsoft.com/office/drawing/2014/main" id="{07610C3D-5133-4459-8B1B-87D92FEB7055}"/>
+                </a:ext>
+              </a:extLst>
+            </p:cNvPr>
+            <p:cNvSpPr txBox="1"/>
+            <p:nvPr/>
+          </p:nvSpPr>
+          <p:spPr>
+            <a:xfrm>
+              <a:off x="1577239" y="5204178"/>
+              <a:ext cx="756355" cy="461665"/>
+            </a:xfrm>
+            <a:prstGeom prst="rect">
+              <a:avLst/>
+            </a:prstGeom>
+            <a:noFill/>
+          </p:spPr>
+          <p:txBody>
+            <a:bodyPr wrap="square" rtlCol="0">
+              <a:spAutoFit/>
+            </a:bodyPr>
+            <a:lstStyle/>
+            <a:p>
+              <a:r>
+                <a:rPr kumimoji="1" lang="ja-JP" altLang="en-US" sz="2400" dirty="0"/>
+                <a:t>■</a:t>
+              </a:r>
+            </a:p>
+          </p:txBody>
+        </p:sp>
+        <p:sp>
+          <p:nvSpPr>
+            <p:cNvPr id="15" name="テキスト ボックス 14">
+              <a:extLst>
+                <a:ext uri="{FF2B5EF4-FFF2-40B4-BE49-F238E27FC236}">
+                  <a16:creationId xmlns:a16="http://schemas.microsoft.com/office/drawing/2014/main" id="{F219F707-7326-448A-B74C-F78A4D43B523}"/>
+                </a:ext>
+              </a:extLst>
+            </p:cNvPr>
+            <p:cNvSpPr txBox="1"/>
+            <p:nvPr/>
+          </p:nvSpPr>
+          <p:spPr>
+            <a:xfrm>
+              <a:off x="1577239" y="4984634"/>
+              <a:ext cx="756355" cy="461665"/>
+            </a:xfrm>
+            <a:prstGeom prst="rect">
+              <a:avLst/>
+            </a:prstGeom>
+            <a:noFill/>
+          </p:spPr>
+          <p:txBody>
+            <a:bodyPr wrap="square" rtlCol="0">
+              <a:spAutoFit/>
+            </a:bodyPr>
+            <a:lstStyle/>
+            <a:p>
+              <a:r>
+                <a:rPr kumimoji="1" lang="ja-JP" altLang="en-US" sz="2400" dirty="0"/>
+                <a:t>■</a:t>
+              </a:r>
+            </a:p>
+          </p:txBody>
+        </p:sp>
+        <p:sp>
+          <p:nvSpPr>
+            <p:cNvPr id="16" name="テキスト ボックス 15">
+              <a:extLst>
+                <a:ext uri="{FF2B5EF4-FFF2-40B4-BE49-F238E27FC236}">
+                  <a16:creationId xmlns:a16="http://schemas.microsoft.com/office/drawing/2014/main" id="{44786783-ABFD-43E2-8EE1-940FF7287B4D}"/>
+                </a:ext>
+              </a:extLst>
+            </p:cNvPr>
+            <p:cNvSpPr txBox="1"/>
+            <p:nvPr/>
+          </p:nvSpPr>
+          <p:spPr>
+            <a:xfrm>
+              <a:off x="1763505" y="5204177"/>
+              <a:ext cx="756355" cy="461665"/>
+            </a:xfrm>
+            <a:prstGeom prst="rect">
+              <a:avLst/>
+            </a:prstGeom>
+            <a:noFill/>
+          </p:spPr>
+          <p:txBody>
+            <a:bodyPr wrap="square" rtlCol="0">
+              <a:spAutoFit/>
+            </a:bodyPr>
+            <a:lstStyle/>
+            <a:p>
+              <a:r>
+                <a:rPr kumimoji="1" lang="ja-JP" altLang="en-US" sz="2400" dirty="0"/>
+                <a:t>■</a:t>
+              </a:r>
+            </a:p>
+          </p:txBody>
+        </p:sp>
+        <p:sp>
+          <p:nvSpPr>
+            <p:cNvPr id="17" name="テキスト ボックス 16">
+              <a:extLst>
+                <a:ext uri="{FF2B5EF4-FFF2-40B4-BE49-F238E27FC236}">
+                  <a16:creationId xmlns:a16="http://schemas.microsoft.com/office/drawing/2014/main" id="{9DE19353-77FC-4CA7-A974-45CAB75ACD4E}"/>
+                </a:ext>
+              </a:extLst>
+            </p:cNvPr>
+            <p:cNvSpPr txBox="1"/>
+            <p:nvPr/>
+          </p:nvSpPr>
+          <p:spPr>
+            <a:xfrm>
+              <a:off x="2833513" y="5204177"/>
+              <a:ext cx="756355" cy="461665"/>
+            </a:xfrm>
+            <a:prstGeom prst="rect">
+              <a:avLst/>
+            </a:prstGeom>
+            <a:noFill/>
+          </p:spPr>
+          <p:txBody>
+            <a:bodyPr wrap="square" rtlCol="0">
+              <a:spAutoFit/>
+            </a:bodyPr>
+            <a:lstStyle/>
+            <a:p>
+              <a:r>
+                <a:rPr kumimoji="1" lang="ja-JP" altLang="en-US" sz="2400" dirty="0"/>
+                <a:t>■</a:t>
+              </a:r>
+            </a:p>
+          </p:txBody>
+        </p:sp>
+        <p:sp>
+          <p:nvSpPr>
+            <p:cNvPr id="18" name="テキスト ボックス 17">
+              <a:extLst>
+                <a:ext uri="{FF2B5EF4-FFF2-40B4-BE49-F238E27FC236}">
+                  <a16:creationId xmlns:a16="http://schemas.microsoft.com/office/drawing/2014/main" id="{A6773250-B8B6-4BDD-B23F-5AF2BB7D717D}"/>
+                </a:ext>
+              </a:extLst>
+            </p:cNvPr>
+            <p:cNvSpPr txBox="1"/>
+            <p:nvPr/>
+          </p:nvSpPr>
+          <p:spPr>
+            <a:xfrm>
+              <a:off x="3031903" y="5181599"/>
+              <a:ext cx="756355" cy="461665"/>
+            </a:xfrm>
+            <a:prstGeom prst="rect">
+              <a:avLst/>
+            </a:prstGeom>
+            <a:noFill/>
+          </p:spPr>
+          <p:txBody>
+            <a:bodyPr wrap="square" rtlCol="0">
+              <a:spAutoFit/>
+            </a:bodyPr>
+            <a:lstStyle/>
+            <a:p>
+              <a:r>
+                <a:rPr kumimoji="1" lang="ja-JP" altLang="en-US" sz="2400" dirty="0"/>
+                <a:t>■</a:t>
+              </a:r>
+            </a:p>
+          </p:txBody>
+        </p:sp>
+        <p:sp>
+          <p:nvSpPr>
+            <p:cNvPr id="19" name="テキスト ボックス 18">
+              <a:extLst>
+                <a:ext uri="{FF2B5EF4-FFF2-40B4-BE49-F238E27FC236}">
+                  <a16:creationId xmlns:a16="http://schemas.microsoft.com/office/drawing/2014/main" id="{EDEE7675-A0E0-4F84-8896-BE6A8F836760}"/>
+                </a:ext>
+              </a:extLst>
+            </p:cNvPr>
+            <p:cNvSpPr txBox="1"/>
+            <p:nvPr/>
+          </p:nvSpPr>
+          <p:spPr>
+            <a:xfrm>
+              <a:off x="3031903" y="4962056"/>
+              <a:ext cx="756355" cy="461665"/>
+            </a:xfrm>
+            <a:prstGeom prst="rect">
+              <a:avLst/>
+            </a:prstGeom>
+            <a:noFill/>
+          </p:spPr>
+          <p:txBody>
+            <a:bodyPr wrap="square" rtlCol="0">
+              <a:spAutoFit/>
+            </a:bodyPr>
+            <a:lstStyle/>
+            <a:p>
+              <a:r>
+                <a:rPr kumimoji="1" lang="ja-JP" altLang="en-US" sz="2400" dirty="0"/>
+                <a:t>■</a:t>
+              </a:r>
+            </a:p>
+          </p:txBody>
+        </p:sp>
+        <p:sp>
+          <p:nvSpPr>
+            <p:cNvPr id="20" name="テキスト ボックス 19">
+              <a:extLst>
+                <a:ext uri="{FF2B5EF4-FFF2-40B4-BE49-F238E27FC236}">
+                  <a16:creationId xmlns:a16="http://schemas.microsoft.com/office/drawing/2014/main" id="{38502A13-9702-4DC6-B0DA-1DCEE6E2EB07}"/>
+                </a:ext>
+              </a:extLst>
+            </p:cNvPr>
+            <p:cNvSpPr txBox="1"/>
+            <p:nvPr/>
+          </p:nvSpPr>
+          <p:spPr>
+            <a:xfrm>
+              <a:off x="3438754" y="3297533"/>
+              <a:ext cx="756355" cy="461665"/>
+            </a:xfrm>
+            <a:prstGeom prst="rect">
+              <a:avLst/>
+            </a:prstGeom>
+            <a:noFill/>
+          </p:spPr>
+          <p:txBody>
+            <a:bodyPr wrap="square" rtlCol="0">
+              <a:spAutoFit/>
+            </a:bodyPr>
+            <a:lstStyle/>
+            <a:p>
+              <a:r>
+                <a:rPr kumimoji="1" lang="ja-JP" altLang="en-US" sz="2400" dirty="0"/>
+                <a:t>■</a:t>
+              </a:r>
+            </a:p>
+          </p:txBody>
+        </p:sp>
+        <p:sp>
+          <p:nvSpPr>
+            <p:cNvPr id="21" name="テキスト ボックス 20">
+              <a:extLst>
+                <a:ext uri="{FF2B5EF4-FFF2-40B4-BE49-F238E27FC236}">
+                  <a16:creationId xmlns:a16="http://schemas.microsoft.com/office/drawing/2014/main" id="{97D6ADCA-827E-41D8-9454-E4118EA0663E}"/>
+                </a:ext>
+              </a:extLst>
+            </p:cNvPr>
+            <p:cNvSpPr txBox="1"/>
+            <p:nvPr/>
+          </p:nvSpPr>
+          <p:spPr>
+            <a:xfrm>
+              <a:off x="3521751" y="4824610"/>
+              <a:ext cx="756355" cy="461665"/>
+            </a:xfrm>
+            <a:prstGeom prst="rect">
+              <a:avLst/>
+            </a:prstGeom>
+            <a:noFill/>
+          </p:spPr>
+          <p:txBody>
+            <a:bodyPr wrap="square" rtlCol="0">
+              <a:spAutoFit/>
+            </a:bodyPr>
+            <a:lstStyle/>
+            <a:p>
+              <a:r>
+                <a:rPr kumimoji="1" lang="ja-JP" altLang="en-US" sz="2400" dirty="0"/>
+                <a:t>■</a:t>
+              </a:r>
+            </a:p>
+          </p:txBody>
+        </p:sp>
+        <p:sp>
+          <p:nvSpPr>
+            <p:cNvPr id="22" name="テキスト ボックス 21">
+              <a:extLst>
+                <a:ext uri="{FF2B5EF4-FFF2-40B4-BE49-F238E27FC236}">
+                  <a16:creationId xmlns:a16="http://schemas.microsoft.com/office/drawing/2014/main" id="{CC8FB718-3B39-4BF3-BAE7-BBAA4F97A8B8}"/>
+                </a:ext>
+              </a:extLst>
+            </p:cNvPr>
+            <p:cNvSpPr txBox="1"/>
+            <p:nvPr/>
+          </p:nvSpPr>
+          <p:spPr>
+            <a:xfrm>
+              <a:off x="3438754" y="3519983"/>
+              <a:ext cx="756355" cy="461665"/>
+            </a:xfrm>
+            <a:prstGeom prst="rect">
+              <a:avLst/>
+            </a:prstGeom>
+            <a:noFill/>
+          </p:spPr>
+          <p:txBody>
+            <a:bodyPr wrap="square" rtlCol="0">
+              <a:spAutoFit/>
+            </a:bodyPr>
+            <a:lstStyle/>
+            <a:p>
+              <a:r>
+                <a:rPr kumimoji="1" lang="ja-JP" altLang="en-US" sz="2400" dirty="0"/>
+                <a:t>■</a:t>
+              </a:r>
+            </a:p>
+          </p:txBody>
+        </p:sp>
+        <p:sp>
+          <p:nvSpPr>
+            <p:cNvPr id="23" name="テキスト ボックス 22">
+              <a:extLst>
+                <a:ext uri="{FF2B5EF4-FFF2-40B4-BE49-F238E27FC236}">
+                  <a16:creationId xmlns:a16="http://schemas.microsoft.com/office/drawing/2014/main" id="{01BBE4E9-2BCF-4C2E-8F14-FC2DF4A3EE37}"/>
+                </a:ext>
+              </a:extLst>
+            </p:cNvPr>
+            <p:cNvSpPr txBox="1"/>
+            <p:nvPr/>
+          </p:nvSpPr>
+          <p:spPr>
+            <a:xfrm>
+              <a:off x="1676660" y="3066700"/>
+              <a:ext cx="756355" cy="461665"/>
+            </a:xfrm>
+            <a:prstGeom prst="rect">
+              <a:avLst/>
+            </a:prstGeom>
+            <a:noFill/>
+          </p:spPr>
+          <p:txBody>
+            <a:bodyPr wrap="square" rtlCol="0">
+              <a:spAutoFit/>
+            </a:bodyPr>
+            <a:lstStyle/>
+            <a:p>
+              <a:r>
+                <a:rPr kumimoji="1" lang="ja-JP" altLang="en-US" sz="2400" dirty="0"/>
+                <a:t>■</a:t>
+              </a:r>
+            </a:p>
+          </p:txBody>
+        </p:sp>
+        <p:sp>
+          <p:nvSpPr>
+            <p:cNvPr id="24" name="テキスト ボックス 23">
+              <a:extLst>
+                <a:ext uri="{FF2B5EF4-FFF2-40B4-BE49-F238E27FC236}">
+                  <a16:creationId xmlns:a16="http://schemas.microsoft.com/office/drawing/2014/main" id="{EB118DE2-4FC7-444C-9AF4-D6DC068FE991}"/>
+                </a:ext>
+              </a:extLst>
+            </p:cNvPr>
+            <p:cNvSpPr txBox="1"/>
+            <p:nvPr/>
+          </p:nvSpPr>
+          <p:spPr>
+            <a:xfrm>
+              <a:off x="1887298" y="3063457"/>
+              <a:ext cx="756355" cy="461665"/>
+            </a:xfrm>
+            <a:prstGeom prst="rect">
+              <a:avLst/>
+            </a:prstGeom>
+            <a:noFill/>
+          </p:spPr>
+          <p:txBody>
+            <a:bodyPr wrap="square" rtlCol="0">
+              <a:spAutoFit/>
+            </a:bodyPr>
+            <a:lstStyle/>
+            <a:p>
+              <a:r>
+                <a:rPr kumimoji="1" lang="ja-JP" altLang="en-US" sz="2400" dirty="0"/>
+                <a:t>■</a:t>
+              </a:r>
+            </a:p>
+          </p:txBody>
+        </p:sp>
+        <p:sp>
+          <p:nvSpPr>
+            <p:cNvPr id="25" name="テキスト ボックス 24">
+              <a:extLst>
+                <a:ext uri="{FF2B5EF4-FFF2-40B4-BE49-F238E27FC236}">
+                  <a16:creationId xmlns:a16="http://schemas.microsoft.com/office/drawing/2014/main" id="{D6ECF5B6-7831-4824-9582-ED54732D6DB1}"/>
+                </a:ext>
+              </a:extLst>
+            </p:cNvPr>
+            <p:cNvSpPr txBox="1"/>
+            <p:nvPr/>
+          </p:nvSpPr>
+          <p:spPr>
+            <a:xfrm>
+              <a:off x="1781979" y="3289150"/>
+              <a:ext cx="756355" cy="461665"/>
+            </a:xfrm>
+            <a:prstGeom prst="rect">
+              <a:avLst/>
+            </a:prstGeom>
+            <a:noFill/>
+          </p:spPr>
+          <p:txBody>
+            <a:bodyPr wrap="square" rtlCol="0">
+              <a:spAutoFit/>
+            </a:bodyPr>
+            <a:lstStyle/>
+            <a:p>
+              <a:r>
+                <a:rPr kumimoji="1" lang="ja-JP" altLang="en-US" sz="2400" dirty="0"/>
+                <a:t>■</a:t>
+              </a:r>
+            </a:p>
+          </p:txBody>
+        </p:sp>
+        <p:sp>
+          <p:nvSpPr>
+            <p:cNvPr id="26" name="テキスト ボックス 25">
+              <a:extLst>
+                <a:ext uri="{FF2B5EF4-FFF2-40B4-BE49-F238E27FC236}">
+                  <a16:creationId xmlns:a16="http://schemas.microsoft.com/office/drawing/2014/main" id="{CD116DE5-AC1C-49EA-89B0-BD5FE06EEC38}"/>
+                </a:ext>
+              </a:extLst>
+            </p:cNvPr>
+            <p:cNvSpPr txBox="1"/>
+            <p:nvPr/>
+          </p:nvSpPr>
+          <p:spPr>
+            <a:xfrm>
+              <a:off x="3438753" y="3075083"/>
+              <a:ext cx="756355" cy="461665"/>
+            </a:xfrm>
+            <a:prstGeom prst="rect">
+              <a:avLst/>
+            </a:prstGeom>
+            <a:noFill/>
+          </p:spPr>
+          <p:txBody>
+            <a:bodyPr wrap="square" rtlCol="0">
+              <a:spAutoFit/>
+            </a:bodyPr>
+            <a:lstStyle/>
+            <a:p>
+              <a:r>
+                <a:rPr kumimoji="1" lang="ja-JP" altLang="en-US" sz="2400" dirty="0"/>
+                <a:t>■</a:t>
+              </a:r>
+            </a:p>
+          </p:txBody>
+        </p:sp>
+        <p:sp>
+          <p:nvSpPr>
+            <p:cNvPr id="27" name="テキスト ボックス 26">
+              <a:extLst>
+                <a:ext uri="{FF2B5EF4-FFF2-40B4-BE49-F238E27FC236}">
+                  <a16:creationId xmlns:a16="http://schemas.microsoft.com/office/drawing/2014/main" id="{67F75C4A-B5EE-48B2-B8C0-02186C6E2D1C}"/>
+                </a:ext>
+              </a:extLst>
+            </p:cNvPr>
+            <p:cNvSpPr txBox="1"/>
+            <p:nvPr/>
+          </p:nvSpPr>
+          <p:spPr>
+            <a:xfrm>
+              <a:off x="3239912" y="3063457"/>
+              <a:ext cx="756355" cy="461665"/>
+            </a:xfrm>
+            <a:prstGeom prst="rect">
+              <a:avLst/>
+            </a:prstGeom>
+            <a:noFill/>
+          </p:spPr>
+          <p:txBody>
+            <a:bodyPr wrap="square" rtlCol="0">
+              <a:spAutoFit/>
+            </a:bodyPr>
+            <a:lstStyle/>
+            <a:p>
+              <a:r>
+                <a:rPr kumimoji="1" lang="ja-JP" altLang="en-US" sz="2400" dirty="0"/>
+                <a:t>■</a:t>
+              </a:r>
+            </a:p>
+          </p:txBody>
+        </p:sp>
+        <p:sp>
+          <p:nvSpPr>
+            <p:cNvPr id="28" name="テキスト ボックス 27">
+              <a:extLst>
+                <a:ext uri="{FF2B5EF4-FFF2-40B4-BE49-F238E27FC236}">
+                  <a16:creationId xmlns:a16="http://schemas.microsoft.com/office/drawing/2014/main" id="{D53BA763-D66B-4C42-96E4-67D60FF72B20}"/>
+                </a:ext>
+              </a:extLst>
+            </p:cNvPr>
+            <p:cNvSpPr txBox="1"/>
+            <p:nvPr/>
+          </p:nvSpPr>
+          <p:spPr>
+            <a:xfrm>
+              <a:off x="3041071" y="3063457"/>
+              <a:ext cx="756355" cy="461665"/>
+            </a:xfrm>
+            <a:prstGeom prst="rect">
+              <a:avLst/>
+            </a:prstGeom>
+            <a:noFill/>
+          </p:spPr>
+          <p:txBody>
+            <a:bodyPr wrap="square" rtlCol="0">
+              <a:spAutoFit/>
+            </a:bodyPr>
+            <a:lstStyle/>
+            <a:p>
+              <a:r>
+                <a:rPr kumimoji="1" lang="ja-JP" altLang="en-US" sz="2400" dirty="0"/>
+                <a:t>■</a:t>
+              </a:r>
+            </a:p>
+          </p:txBody>
+        </p:sp>
+        <p:sp>
+          <p:nvSpPr>
+            <p:cNvPr id="29" name="テキスト ボックス 28">
+              <a:extLst>
+                <a:ext uri="{FF2B5EF4-FFF2-40B4-BE49-F238E27FC236}">
+                  <a16:creationId xmlns:a16="http://schemas.microsoft.com/office/drawing/2014/main" id="{7EF4354F-3424-48AB-833B-A1DA40F47D3B}"/>
+                </a:ext>
+              </a:extLst>
+            </p:cNvPr>
+            <p:cNvSpPr txBox="1"/>
+            <p:nvPr/>
+          </p:nvSpPr>
+          <p:spPr>
+            <a:xfrm>
+              <a:off x="1298482" y="3742432"/>
+              <a:ext cx="756355" cy="461665"/>
+            </a:xfrm>
+            <a:prstGeom prst="rect">
+              <a:avLst/>
+            </a:prstGeom>
+            <a:noFill/>
+          </p:spPr>
+          <p:txBody>
+            <a:bodyPr wrap="square" rtlCol="0">
+              <a:spAutoFit/>
+            </a:bodyPr>
+            <a:lstStyle/>
+            <a:p>
+              <a:r>
+                <a:rPr kumimoji="1" lang="ja-JP" altLang="en-US" sz="2400" dirty="0"/>
+                <a:t>■</a:t>
+              </a:r>
+            </a:p>
+          </p:txBody>
+        </p:sp>
+        <p:sp>
+          <p:nvSpPr>
+            <p:cNvPr id="30" name="テキスト ボックス 29">
+              <a:extLst>
+                <a:ext uri="{FF2B5EF4-FFF2-40B4-BE49-F238E27FC236}">
+                  <a16:creationId xmlns:a16="http://schemas.microsoft.com/office/drawing/2014/main" id="{53CF248D-C050-4388-95B8-AFA3911C733B}"/>
+                </a:ext>
+              </a:extLst>
+            </p:cNvPr>
+            <p:cNvSpPr txBox="1"/>
+            <p:nvPr/>
+          </p:nvSpPr>
+          <p:spPr>
+            <a:xfrm>
+              <a:off x="1298481" y="3912606"/>
+              <a:ext cx="756355" cy="461665"/>
+            </a:xfrm>
+            <a:prstGeom prst="rect">
+              <a:avLst/>
+            </a:prstGeom>
+            <a:noFill/>
+          </p:spPr>
+          <p:txBody>
+            <a:bodyPr wrap="square" rtlCol="0">
+              <a:spAutoFit/>
+            </a:bodyPr>
+            <a:lstStyle/>
+            <a:p>
+              <a:r>
+                <a:rPr kumimoji="1" lang="ja-JP" altLang="en-US" sz="2400" dirty="0"/>
+                <a:t>■</a:t>
+              </a:r>
+            </a:p>
+          </p:txBody>
+        </p:sp>
+        <p:sp>
+          <p:nvSpPr>
+            <p:cNvPr id="31" name="テキスト ボックス 30">
+              <a:extLst>
+                <a:ext uri="{FF2B5EF4-FFF2-40B4-BE49-F238E27FC236}">
+                  <a16:creationId xmlns:a16="http://schemas.microsoft.com/office/drawing/2014/main" id="{663A20E3-5DD3-494E-A8DC-90BF8A0A9DBC}"/>
+                </a:ext>
+              </a:extLst>
+            </p:cNvPr>
+            <p:cNvSpPr txBox="1"/>
+            <p:nvPr/>
+          </p:nvSpPr>
+          <p:spPr>
+            <a:xfrm>
+              <a:off x="1298480" y="4082780"/>
+              <a:ext cx="756355" cy="461665"/>
+            </a:xfrm>
+            <a:prstGeom prst="rect">
+              <a:avLst/>
+            </a:prstGeom>
+            <a:noFill/>
+          </p:spPr>
+          <p:txBody>
+            <a:bodyPr wrap="square" rtlCol="0">
+              <a:spAutoFit/>
+            </a:bodyPr>
+            <a:lstStyle/>
+            <a:p>
+              <a:r>
+                <a:rPr kumimoji="1" lang="ja-JP" altLang="en-US" sz="2400" dirty="0"/>
+                <a:t>■</a:t>
+              </a:r>
+            </a:p>
+          </p:txBody>
+        </p:sp>
+        <p:sp>
+          <p:nvSpPr>
+            <p:cNvPr id="32" name="テキスト ボックス 31">
+              <a:extLst>
+                <a:ext uri="{FF2B5EF4-FFF2-40B4-BE49-F238E27FC236}">
+                  <a16:creationId xmlns:a16="http://schemas.microsoft.com/office/drawing/2014/main" id="{2D499AF2-AA34-49EB-BE6B-B724B6CFFD4B}"/>
+                </a:ext>
+              </a:extLst>
+            </p:cNvPr>
+            <p:cNvSpPr txBox="1"/>
+            <p:nvPr/>
+          </p:nvSpPr>
+          <p:spPr>
+            <a:xfrm>
+              <a:off x="1298479" y="4252954"/>
+              <a:ext cx="756355" cy="461665"/>
+            </a:xfrm>
+            <a:prstGeom prst="rect">
+              <a:avLst/>
+            </a:prstGeom>
+            <a:noFill/>
+          </p:spPr>
+          <p:txBody>
+            <a:bodyPr wrap="square" rtlCol="0">
+              <a:spAutoFit/>
+            </a:bodyPr>
+            <a:lstStyle/>
+            <a:p>
+              <a:r>
+                <a:rPr kumimoji="1" lang="ja-JP" altLang="en-US" sz="2400" dirty="0"/>
+                <a:t>■</a:t>
+              </a:r>
+            </a:p>
+          </p:txBody>
+        </p:sp>
+        <p:sp>
+          <p:nvSpPr>
+            <p:cNvPr id="33" name="テキスト ボックス 32">
+              <a:extLst>
+                <a:ext uri="{FF2B5EF4-FFF2-40B4-BE49-F238E27FC236}">
+                  <a16:creationId xmlns:a16="http://schemas.microsoft.com/office/drawing/2014/main" id="{E1D99EF6-FE4B-47E0-9E24-F7DE0E25A61C}"/>
+                </a:ext>
+              </a:extLst>
+            </p:cNvPr>
+            <p:cNvSpPr txBox="1"/>
+            <p:nvPr/>
+          </p:nvSpPr>
+          <p:spPr>
+            <a:xfrm>
+              <a:off x="1347678" y="5191109"/>
+              <a:ext cx="756355" cy="461665"/>
+            </a:xfrm>
+            <a:prstGeom prst="rect">
+              <a:avLst/>
+            </a:prstGeom>
+            <a:noFill/>
+          </p:spPr>
+          <p:txBody>
+            <a:bodyPr wrap="square" rtlCol="0">
+              <a:spAutoFit/>
+            </a:bodyPr>
+            <a:lstStyle/>
+            <a:p>
+              <a:r>
+                <a:rPr kumimoji="1" lang="ja-JP" altLang="en-US" sz="2400" dirty="0"/>
+                <a:t>■</a:t>
+              </a:r>
+            </a:p>
+          </p:txBody>
+        </p:sp>
+        <p:sp>
+          <p:nvSpPr>
+            <p:cNvPr id="34" name="テキスト ボックス 33">
+              <a:extLst>
+                <a:ext uri="{FF2B5EF4-FFF2-40B4-BE49-F238E27FC236}">
+                  <a16:creationId xmlns:a16="http://schemas.microsoft.com/office/drawing/2014/main" id="{665A56CA-306B-4DE3-B5B5-A60BEE94470B}"/>
+                </a:ext>
+              </a:extLst>
+            </p:cNvPr>
+            <p:cNvSpPr txBox="1"/>
+            <p:nvPr/>
+          </p:nvSpPr>
+          <p:spPr>
+            <a:xfrm rot="16200000">
+              <a:off x="3214009" y="3278686"/>
+              <a:ext cx="489729" cy="338554"/>
+            </a:xfrm>
+            <a:prstGeom prst="rect">
+              <a:avLst/>
+            </a:prstGeom>
+            <a:noFill/>
+          </p:spPr>
+          <p:txBody>
+            <a:bodyPr wrap="square" rtlCol="0">
+              <a:spAutoFit/>
+            </a:bodyPr>
+            <a:lstStyle/>
+            <a:p>
+              <a:r>
+                <a:rPr kumimoji="1" lang="ja-JP" altLang="en-US" sz="1600" dirty="0">
+                  <a:solidFill>
+                    <a:schemeClr val="accent2"/>
+                  </a:solidFill>
+                </a:rPr>
+                <a:t>▲</a:t>
+              </a:r>
+            </a:p>
+          </p:txBody>
+        </p:sp>
+      </p:grpSp>
+      <p:pic>
+        <p:nvPicPr>
+          <p:cNvPr id="1026" name="Picture 2">
+            <a:extLst>
+              <a:ext uri="{FF2B5EF4-FFF2-40B4-BE49-F238E27FC236}">
+                <a16:creationId xmlns:a16="http://schemas.microsoft.com/office/drawing/2014/main" id="{AED99686-8E3D-432D-9282-75364E517B2C}"/>
+              </a:ext>
+            </a:extLst>
+          </p:cNvPr>
+          <p:cNvPicPr>
+            <a:picLocks noChangeAspect="1" noChangeArrowheads="1"/>
+          </p:cNvPicPr>
+          <p:nvPr/>
+        </p:nvPicPr>
+        <p:blipFill>
+          <a:blip r:embed="rId3">
+            <a:extLst>
+              <a:ext uri="{28A0092B-C50C-407E-A947-70E740481C1C}">
+                <a14:useLocalDpi xmlns:a14="http://schemas.microsoft.com/office/drawing/2010/main" val="0"/>
+              </a:ext>
+            </a:extLst>
+          </a:blip>
+          <a:srcRect/>
+          <a:stretch>
+            <a:fillRect/>
+          </a:stretch>
+        </p:blipFill>
+        <p:spPr bwMode="auto">
+          <a:xfrm>
+            <a:off x="5701465" y="2873579"/>
+            <a:ext cx="2197777" cy="3358160"/>
+          </a:xfrm>
+          <a:prstGeom prst="rect">
+            <a:avLst/>
+          </a:prstGeom>
+          <a:noFill/>
+          <a:extLst>
+            <a:ext uri="{909E8E84-426E-40DD-AFC4-6F175D3DCCD1}">
+              <a14:hiddenFill xmlns:a14="http://schemas.microsoft.com/office/drawing/2010/main">
+                <a:solidFill>
+                  <a:srgbClr val="FFFFFF"/>
+                </a:solidFill>
+              </a14:hiddenFill>
+            </a:ext>
+          </a:extLst>
+        </p:spPr>
+      </p:pic>
+      <p:pic>
+        <p:nvPicPr>
+          <p:cNvPr id="1028" name="Picture 4">
+            <a:extLst>
+              <a:ext uri="{FF2B5EF4-FFF2-40B4-BE49-F238E27FC236}">
+                <a16:creationId xmlns:a16="http://schemas.microsoft.com/office/drawing/2014/main" id="{91E4482D-EA6F-41C5-9C20-D6454F39816D}"/>
+              </a:ext>
+            </a:extLst>
+          </p:cNvPr>
+          <p:cNvPicPr>
+            <a:picLocks noChangeAspect="1" noChangeArrowheads="1"/>
+          </p:cNvPicPr>
+          <p:nvPr/>
+        </p:nvPicPr>
+        <p:blipFill>
+          <a:blip r:embed="rId4">
+            <a:extLst>
+              <a:ext uri="{28A0092B-C50C-407E-A947-70E740481C1C}">
+                <a14:useLocalDpi xmlns:a14="http://schemas.microsoft.com/office/drawing/2010/main" val="0"/>
+              </a:ext>
+            </a:extLst>
+          </a:blip>
+          <a:srcRect/>
+          <a:stretch>
+            <a:fillRect/>
+          </a:stretch>
+        </p:blipFill>
+        <p:spPr bwMode="auto">
+          <a:xfrm>
+            <a:off x="8364906" y="2910612"/>
+            <a:ext cx="1632324" cy="3428427"/>
+          </a:xfrm>
+          <a:prstGeom prst="rect">
+            <a:avLst/>
+          </a:prstGeom>
+          <a:noFill/>
+          <a:extLst>
+            <a:ext uri="{909E8E84-426E-40DD-AFC4-6F175D3DCCD1}">
+              <a14:hiddenFill xmlns:a14="http://schemas.microsoft.com/office/drawing/2010/main">
+                <a:solidFill>
+                  <a:srgbClr val="FFFFFF"/>
+                </a:solidFill>
+              </a14:hiddenFill>
+            </a:ext>
+          </a:extLst>
+        </p:spPr>
+      </p:pic>
+      <p:sp>
+        <p:nvSpPr>
+          <p:cNvPr id="1024" name="テキスト ボックス 1023">
+            <a:extLst>
+              <a:ext uri="{FF2B5EF4-FFF2-40B4-BE49-F238E27FC236}">
+                <a16:creationId xmlns:a16="http://schemas.microsoft.com/office/drawing/2014/main" id="{95F86F28-CDC4-4636-BB05-0B110B15532E}"/>
+              </a:ext>
+            </a:extLst>
+          </p:cNvPr>
+          <p:cNvSpPr txBox="1"/>
+          <p:nvPr/>
+        </p:nvSpPr>
+        <p:spPr>
+          <a:xfrm>
+            <a:off x="5111492" y="2105417"/>
+            <a:ext cx="3621290" cy="2400657"/>
+          </a:xfrm>
+          <a:prstGeom prst="rect">
+            <a:avLst/>
+          </a:prstGeom>
+          <a:noFill/>
+        </p:spPr>
+        <p:txBody>
+          <a:bodyPr wrap="square" rtlCol="0">
+            <a:spAutoFit/>
+          </a:bodyPr>
+          <a:lstStyle/>
+          <a:p>
+            <a:r>
+              <a:rPr kumimoji="1" lang="ja-JP" altLang="en-US" sz="15000" dirty="0">
+                <a:solidFill>
+                  <a:srgbClr val="FF0000"/>
+                </a:solidFill>
+              </a:rPr>
+              <a:t>〇</a:t>
+            </a:r>
+          </a:p>
+        </p:txBody>
+      </p:sp>
+      <p:sp>
+        <p:nvSpPr>
+          <p:cNvPr id="3" name="テキスト ボックス 2">
+            <a:extLst>
+              <a:ext uri="{FF2B5EF4-FFF2-40B4-BE49-F238E27FC236}">
+                <a16:creationId xmlns:a16="http://schemas.microsoft.com/office/drawing/2014/main" id="{779B1B2E-6077-477D-B44E-4E2640032670}"/>
+              </a:ext>
+            </a:extLst>
+          </p:cNvPr>
+          <p:cNvSpPr txBox="1"/>
+          <p:nvPr/>
+        </p:nvSpPr>
+        <p:spPr>
+          <a:xfrm>
+            <a:off x="7189545" y="1641118"/>
+            <a:ext cx="3136128" cy="3170099"/>
+          </a:xfrm>
+          <a:prstGeom prst="rect">
+            <a:avLst/>
+          </a:prstGeom>
+          <a:noFill/>
+        </p:spPr>
+        <p:txBody>
+          <a:bodyPr wrap="square" rtlCol="0">
+            <a:spAutoFit/>
+          </a:bodyPr>
+          <a:lstStyle/>
+          <a:p>
+            <a:r>
+              <a:rPr kumimoji="1" lang="en-US" altLang="ja-JP" sz="20000" dirty="0">
+                <a:solidFill>
+                  <a:srgbClr val="0070C0"/>
+                </a:solidFill>
+              </a:rPr>
+              <a:t>×</a:t>
+            </a:r>
+            <a:endParaRPr kumimoji="1" lang="ja-JP" altLang="en-US" sz="20000" dirty="0">
+              <a:solidFill>
+                <a:srgbClr val="0070C0"/>
+              </a:solidFill>
+            </a:endParaRPr>
+          </a:p>
+        </p:txBody>
+      </p:sp>
+    </p:spTree>
+    <p:extLst>
+      <p:ext uri="{BB962C8B-B14F-4D97-AF65-F5344CB8AC3E}">
+        <p14:creationId xmlns:p14="http://schemas.microsoft.com/office/powerpoint/2010/main" val="1912513981"/>
+      </p:ext>
+    </p:extLst>
+  </p:cSld>
+  <p:clrMapOvr>
+    <a:masterClrMapping/>
+  </p:clrMapOvr>
+</p:sld>
+</file>
+
+<file path=ppt/slides/slide3.xml><?xml version="1.0" encoding="utf-8"?>
+<p:sld xmlns:a="http://schemas.openxmlformats.org/drawingml/2006/main" xmlns:r="http://schemas.openxmlformats.org/officeDocument/2006/relationships" xmlns:p="http://schemas.openxmlformats.org/presentationml/2006/main">
+  <p:cSld>
+    <p:spTree>
+      <p:nvGrpSpPr>
+        <p:cNvPr id="1" name=""/>
+        <p:cNvGrpSpPr/>
+        <p:nvPr/>
+      </p:nvGrpSpPr>
+      <p:grpSpPr>
+        <a:xfrm>
+          <a:off x="0" y="0"/>
+          <a:ext cx="0" cy="0"/>
+          <a:chOff x="0" y="0"/>
+          <a:chExt cx="0" cy="0"/>
+        </a:xfrm>
+      </p:grpSpPr>
+      <p:sp>
+        <p:nvSpPr>
+          <p:cNvPr id="2" name="タイトル 1">
+            <a:extLst>
+              <a:ext uri="{FF2B5EF4-FFF2-40B4-BE49-F238E27FC236}">
+                <a16:creationId xmlns:a16="http://schemas.microsoft.com/office/drawing/2014/main" id="{26BAFEC3-C274-404F-899E-4B756C272EBA}"/>
+              </a:ext>
+            </a:extLst>
+          </p:cNvPr>
+          <p:cNvSpPr>
+            <a:spLocks noGrp="1"/>
+          </p:cNvSpPr>
+          <p:nvPr>
+            <p:ph type="title"/>
+          </p:nvPr>
+        </p:nvSpPr>
+        <p:spPr>
+          <a:xfrm>
+            <a:off x="0" y="0"/>
+            <a:ext cx="10515600" cy="1325563"/>
+          </a:xfrm>
+        </p:spPr>
+        <p:txBody>
+          <a:bodyPr/>
+          <a:lstStyle/>
+          <a:p>
+            <a:r>
+              <a:rPr kumimoji="1" lang="ja-JP" altLang="en-US" b="1" u="sng" dirty="0">
+                <a:solidFill>
+                  <a:srgbClr val="00B050"/>
+                </a:solidFill>
+                <a:effectLst>
+                  <a:outerShdw blurRad="38100" dist="38100" dir="2700000" algn="tl">
+                    <a:srgbClr val="000000">
+                      <a:alpha val="43137"/>
+                    </a:srgbClr>
+                  </a:outerShdw>
+                </a:effectLst>
+              </a:rPr>
+              <a:t>ステージの回転</a:t>
+            </a:r>
+          </a:p>
+        </p:txBody>
+      </p:sp>
+      <p:sp>
+        <p:nvSpPr>
+          <p:cNvPr id="5" name="テキスト ボックス 4">
+            <a:extLst>
+              <a:ext uri="{FF2B5EF4-FFF2-40B4-BE49-F238E27FC236}">
+                <a16:creationId xmlns:a16="http://schemas.microsoft.com/office/drawing/2014/main" id="{7D12438B-FF29-481B-B97D-41A65A7C2657}"/>
+              </a:ext>
+            </a:extLst>
+          </p:cNvPr>
+          <p:cNvSpPr txBox="1"/>
+          <p:nvPr/>
+        </p:nvSpPr>
+        <p:spPr>
+          <a:xfrm>
+            <a:off x="0" y="1005738"/>
+            <a:ext cx="11593690" cy="2031325"/>
+          </a:xfrm>
+          <a:prstGeom prst="rect">
+            <a:avLst/>
+          </a:prstGeom>
+          <a:noFill/>
+        </p:spPr>
+        <p:txBody>
+          <a:bodyPr wrap="square" rtlCol="0">
+            <a:spAutoFit/>
+          </a:bodyPr>
+          <a:lstStyle/>
+          <a:p>
+            <a:r>
+              <a:rPr lang="ja-JP" altLang="en-US" sz="2400" dirty="0"/>
+              <a:t>・</a:t>
+            </a:r>
+            <a:r>
+              <a:rPr kumimoji="1" lang="ja-JP" altLang="en-US" sz="2400" dirty="0"/>
+              <a:t>ステージを</a:t>
+            </a:r>
+            <a:r>
+              <a:rPr kumimoji="1" lang="en-US" altLang="ja-JP" sz="2400" dirty="0"/>
+              <a:t>90</a:t>
+            </a:r>
+            <a:r>
+              <a:rPr kumimoji="1" lang="ja-JP" altLang="en-US" sz="2400" dirty="0"/>
+              <a:t>度回転させることができる</a:t>
+            </a:r>
+            <a:r>
+              <a:rPr kumimoji="1" lang="en-US" altLang="ja-JP" sz="2400" dirty="0"/>
+              <a:t>(</a:t>
+            </a:r>
+            <a:r>
+              <a:rPr kumimoji="1" lang="ja-JP" altLang="en-US" sz="2400" dirty="0"/>
+              <a:t>一度回転を使うと</a:t>
+            </a:r>
+            <a:r>
+              <a:rPr kumimoji="1" lang="en-US" altLang="ja-JP" sz="2400" u="sng" dirty="0">
+                <a:solidFill>
+                  <a:srgbClr val="FF0000"/>
+                </a:solidFill>
+              </a:rPr>
+              <a:t>5</a:t>
+            </a:r>
+            <a:r>
+              <a:rPr kumimoji="1" lang="ja-JP" altLang="en-US" sz="2400" u="sng" dirty="0">
+                <a:solidFill>
+                  <a:srgbClr val="FF0000"/>
+                </a:solidFill>
+              </a:rPr>
+              <a:t>秒間は使えない</a:t>
+            </a:r>
+            <a:r>
+              <a:rPr kumimoji="1" lang="en-US" altLang="ja-JP" sz="2400" dirty="0"/>
+              <a:t>)</a:t>
+            </a:r>
+            <a:endParaRPr lang="en-US" altLang="ja-JP" sz="2400" dirty="0"/>
+          </a:p>
+          <a:p>
+            <a:r>
+              <a:rPr kumimoji="1" lang="ja-JP" altLang="en-US" sz="2400" dirty="0"/>
+              <a:t>・回転させることで壁に置いていて</a:t>
+            </a:r>
+            <a:r>
+              <a:rPr kumimoji="1" lang="ja-JP" altLang="en-US" sz="2400" dirty="0">
+                <a:solidFill>
+                  <a:srgbClr val="00B050"/>
+                </a:solidFill>
+              </a:rPr>
+              <a:t>取れない</a:t>
+            </a:r>
+            <a:r>
+              <a:rPr lang="ja-JP" altLang="en-US" sz="2400" dirty="0">
+                <a:solidFill>
+                  <a:srgbClr val="00B050"/>
+                </a:solidFill>
+              </a:rPr>
+              <a:t>鍵など</a:t>
+            </a:r>
+            <a:r>
+              <a:rPr kumimoji="1" lang="ja-JP" altLang="en-US" sz="2400" dirty="0">
+                <a:solidFill>
+                  <a:srgbClr val="00B050"/>
+                </a:solidFill>
+              </a:rPr>
+              <a:t>を取る</a:t>
+            </a:r>
+            <a:r>
+              <a:rPr kumimoji="1" lang="ja-JP" altLang="en-US" sz="2400" dirty="0"/>
+              <a:t>ことができるようになったり</a:t>
+            </a:r>
+            <a:r>
+              <a:rPr lang="ja-JP" altLang="en-US" sz="2400" dirty="0"/>
+              <a:t>、</a:t>
+            </a:r>
+            <a:r>
+              <a:rPr lang="ja-JP" altLang="en-US" sz="2400" dirty="0">
+                <a:solidFill>
+                  <a:srgbClr val="00B050"/>
+                </a:solidFill>
+              </a:rPr>
+              <a:t>簡単そうなルート</a:t>
+            </a:r>
+            <a:r>
+              <a:rPr lang="ja-JP" altLang="en-US" sz="2400" dirty="0"/>
+              <a:t>選んだりできる</a:t>
+            </a:r>
+            <a:endParaRPr kumimoji="1" lang="en-US" altLang="ja-JP" sz="2400" dirty="0"/>
+          </a:p>
+          <a:p>
+            <a:endParaRPr lang="en-US" altLang="ja-JP" dirty="0"/>
+          </a:p>
+          <a:p>
+            <a:endParaRPr kumimoji="1" lang="en-US" altLang="ja-JP" dirty="0"/>
+          </a:p>
+          <a:p>
+            <a:endParaRPr kumimoji="1" lang="en-US" altLang="ja-JP" dirty="0"/>
+          </a:p>
+        </p:txBody>
+      </p:sp>
+      <p:grpSp>
+        <p:nvGrpSpPr>
+          <p:cNvPr id="12" name="グループ化 11">
+            <a:extLst>
+              <a:ext uri="{FF2B5EF4-FFF2-40B4-BE49-F238E27FC236}">
+                <a16:creationId xmlns:a16="http://schemas.microsoft.com/office/drawing/2014/main" id="{C37CBD88-12B4-4564-9576-8F1033B20527}"/>
+              </a:ext>
+            </a:extLst>
+          </p:cNvPr>
+          <p:cNvGrpSpPr/>
+          <p:nvPr/>
+        </p:nvGrpSpPr>
+        <p:grpSpPr>
+          <a:xfrm>
+            <a:off x="2243023" y="5008754"/>
+            <a:ext cx="975146" cy="533401"/>
+            <a:chOff x="2178754" y="4999037"/>
+            <a:chExt cx="1151467" cy="533401"/>
+          </a:xfrm>
+        </p:grpSpPr>
+        <p:sp>
+          <p:nvSpPr>
+            <p:cNvPr id="9" name="テキスト ボックス 8">
+              <a:extLst>
+                <a:ext uri="{FF2B5EF4-FFF2-40B4-BE49-F238E27FC236}">
+                  <a16:creationId xmlns:a16="http://schemas.microsoft.com/office/drawing/2014/main" id="{C27202E7-C292-41D6-B70E-1EEF101AC0FE}"/>
+                </a:ext>
+              </a:extLst>
+            </p:cNvPr>
+            <p:cNvSpPr txBox="1"/>
+            <p:nvPr/>
+          </p:nvSpPr>
+          <p:spPr>
+            <a:xfrm>
+              <a:off x="2427111" y="5163106"/>
+              <a:ext cx="654755" cy="369332"/>
+            </a:xfrm>
+            <a:prstGeom prst="rect">
+              <a:avLst/>
+            </a:prstGeom>
+            <a:noFill/>
+          </p:spPr>
+          <p:txBody>
+            <a:bodyPr wrap="square" rtlCol="0">
+              <a:spAutoFit/>
+            </a:bodyPr>
+            <a:lstStyle/>
+            <a:p>
+              <a:r>
+                <a:rPr kumimoji="1" lang="ja-JP" altLang="en-US" dirty="0">
+                  <a:solidFill>
+                    <a:srgbClr val="FF0000"/>
+                  </a:solidFill>
+                </a:rPr>
+                <a:t>●</a:t>
+              </a:r>
+            </a:p>
+          </p:txBody>
+        </p:sp>
+        <p:sp>
+          <p:nvSpPr>
+            <p:cNvPr id="10" name="テキスト ボックス 9">
+              <a:extLst>
+                <a:ext uri="{FF2B5EF4-FFF2-40B4-BE49-F238E27FC236}">
+                  <a16:creationId xmlns:a16="http://schemas.microsoft.com/office/drawing/2014/main" id="{2526EF94-0668-4517-ADBF-4DF8702928D8}"/>
+                </a:ext>
+              </a:extLst>
+            </p:cNvPr>
+            <p:cNvSpPr txBox="1"/>
+            <p:nvPr/>
+          </p:nvSpPr>
+          <p:spPr>
+            <a:xfrm>
+              <a:off x="2178754" y="4999037"/>
+              <a:ext cx="1151467" cy="276999"/>
+            </a:xfrm>
+            <a:prstGeom prst="rect">
+              <a:avLst/>
+            </a:prstGeom>
+            <a:noFill/>
+          </p:spPr>
+          <p:txBody>
+            <a:bodyPr wrap="square" rtlCol="0">
+              <a:spAutoFit/>
+            </a:bodyPr>
+            <a:lstStyle/>
+            <a:p>
+              <a:r>
+                <a:rPr kumimoji="1" lang="ja-JP" altLang="en-US" sz="1200" dirty="0"/>
+                <a:t>プレイヤー</a:t>
+              </a:r>
+            </a:p>
+          </p:txBody>
+        </p:sp>
+      </p:grpSp>
+      <p:grpSp>
+        <p:nvGrpSpPr>
+          <p:cNvPr id="35" name="グループ化 34">
+            <a:extLst>
+              <a:ext uri="{FF2B5EF4-FFF2-40B4-BE49-F238E27FC236}">
+                <a16:creationId xmlns:a16="http://schemas.microsoft.com/office/drawing/2014/main" id="{E52CB9E2-99DF-4333-8EAD-D39F82C02C12}"/>
+              </a:ext>
+            </a:extLst>
+          </p:cNvPr>
+          <p:cNvGrpSpPr/>
+          <p:nvPr/>
+        </p:nvGrpSpPr>
+        <p:grpSpPr>
+          <a:xfrm>
+            <a:off x="795682" y="2401536"/>
+            <a:ext cx="3945467" cy="3945467"/>
+            <a:chOff x="670920" y="2359377"/>
+            <a:chExt cx="3945467" cy="3945467"/>
+          </a:xfrm>
+        </p:grpSpPr>
+        <p:pic>
+          <p:nvPicPr>
+            <p:cNvPr id="7" name="図 6">
+              <a:extLst>
+                <a:ext uri="{FF2B5EF4-FFF2-40B4-BE49-F238E27FC236}">
+                  <a16:creationId xmlns:a16="http://schemas.microsoft.com/office/drawing/2014/main" id="{55087E74-7C8C-4222-93AF-3401FE244229}"/>
+                </a:ext>
+              </a:extLst>
+            </p:cNvPr>
+            <p:cNvPicPr>
+              <a:picLocks noChangeAspect="1"/>
+            </p:cNvPicPr>
+            <p:nvPr/>
+          </p:nvPicPr>
+          <p:blipFill>
+            <a:blip r:embed="rId2">
+              <a:extLst>
+                <a:ext uri="{28A0092B-C50C-407E-A947-70E740481C1C}">
+                  <a14:useLocalDpi xmlns:a14="http://schemas.microsoft.com/office/drawing/2010/main" val="0"/>
+                </a:ext>
+              </a:extLst>
+            </a:blip>
+            <a:stretch>
+              <a:fillRect/>
+            </a:stretch>
+          </p:blipFill>
+          <p:spPr>
+            <a:xfrm>
+              <a:off x="670920" y="2359377"/>
+              <a:ext cx="3945467" cy="3945467"/>
+            </a:xfrm>
+            <a:prstGeom prst="rect">
+              <a:avLst/>
+            </a:prstGeom>
+          </p:spPr>
+        </p:pic>
+        <p:sp>
+          <p:nvSpPr>
+            <p:cNvPr id="13" name="テキスト ボックス 12">
+              <a:extLst>
+                <a:ext uri="{FF2B5EF4-FFF2-40B4-BE49-F238E27FC236}">
+                  <a16:creationId xmlns:a16="http://schemas.microsoft.com/office/drawing/2014/main" id="{EE8166DD-F08A-4694-B8A3-94FF16B1E000}"/>
+                </a:ext>
+              </a:extLst>
+            </p:cNvPr>
+            <p:cNvSpPr txBox="1"/>
+            <p:nvPr/>
+          </p:nvSpPr>
+          <p:spPr>
+            <a:xfrm>
+              <a:off x="3239912" y="5204178"/>
+              <a:ext cx="756355" cy="461665"/>
+            </a:xfrm>
+            <a:prstGeom prst="rect">
+              <a:avLst/>
+            </a:prstGeom>
+            <a:noFill/>
+          </p:spPr>
+          <p:txBody>
+            <a:bodyPr wrap="square" rtlCol="0">
+              <a:spAutoFit/>
+            </a:bodyPr>
+            <a:lstStyle/>
+            <a:p>
+              <a:r>
+                <a:rPr kumimoji="1" lang="ja-JP" altLang="en-US" sz="2400" dirty="0"/>
+                <a:t>■</a:t>
+              </a:r>
+            </a:p>
+          </p:txBody>
+        </p:sp>
+        <p:sp>
+          <p:nvSpPr>
+            <p:cNvPr id="14" name="テキスト ボックス 13">
+              <a:extLst>
+                <a:ext uri="{FF2B5EF4-FFF2-40B4-BE49-F238E27FC236}">
+                  <a16:creationId xmlns:a16="http://schemas.microsoft.com/office/drawing/2014/main" id="{07610C3D-5133-4459-8B1B-87D92FEB7055}"/>
+                </a:ext>
+              </a:extLst>
+            </p:cNvPr>
+            <p:cNvSpPr txBox="1"/>
+            <p:nvPr/>
+          </p:nvSpPr>
+          <p:spPr>
+            <a:xfrm>
+              <a:off x="1577239" y="5204178"/>
+              <a:ext cx="756355" cy="461665"/>
+            </a:xfrm>
+            <a:prstGeom prst="rect">
+              <a:avLst/>
+            </a:prstGeom>
+            <a:noFill/>
+          </p:spPr>
+          <p:txBody>
+            <a:bodyPr wrap="square" rtlCol="0">
+              <a:spAutoFit/>
+            </a:bodyPr>
+            <a:lstStyle/>
+            <a:p>
+              <a:r>
+                <a:rPr kumimoji="1" lang="ja-JP" altLang="en-US" sz="2400" dirty="0"/>
+                <a:t>■</a:t>
+              </a:r>
+            </a:p>
+          </p:txBody>
+        </p:sp>
+        <p:sp>
+          <p:nvSpPr>
+            <p:cNvPr id="15" name="テキスト ボックス 14">
+              <a:extLst>
+                <a:ext uri="{FF2B5EF4-FFF2-40B4-BE49-F238E27FC236}">
+                  <a16:creationId xmlns:a16="http://schemas.microsoft.com/office/drawing/2014/main" id="{F219F707-7326-448A-B74C-F78A4D43B523}"/>
+                </a:ext>
+              </a:extLst>
+            </p:cNvPr>
+            <p:cNvSpPr txBox="1"/>
+            <p:nvPr/>
+          </p:nvSpPr>
+          <p:spPr>
+            <a:xfrm>
+              <a:off x="1577239" y="4984634"/>
+              <a:ext cx="756355" cy="461665"/>
+            </a:xfrm>
+            <a:prstGeom prst="rect">
+              <a:avLst/>
+            </a:prstGeom>
+            <a:noFill/>
+          </p:spPr>
+          <p:txBody>
+            <a:bodyPr wrap="square" rtlCol="0">
+              <a:spAutoFit/>
+            </a:bodyPr>
+            <a:lstStyle/>
+            <a:p>
+              <a:r>
+                <a:rPr kumimoji="1" lang="ja-JP" altLang="en-US" sz="2400" dirty="0"/>
+                <a:t>■</a:t>
+              </a:r>
+            </a:p>
+          </p:txBody>
+        </p:sp>
+        <p:sp>
+          <p:nvSpPr>
+            <p:cNvPr id="16" name="テキスト ボックス 15">
+              <a:extLst>
+                <a:ext uri="{FF2B5EF4-FFF2-40B4-BE49-F238E27FC236}">
+                  <a16:creationId xmlns:a16="http://schemas.microsoft.com/office/drawing/2014/main" id="{44786783-ABFD-43E2-8EE1-940FF7287B4D}"/>
+                </a:ext>
+              </a:extLst>
+            </p:cNvPr>
+            <p:cNvSpPr txBox="1"/>
+            <p:nvPr/>
+          </p:nvSpPr>
+          <p:spPr>
+            <a:xfrm>
+              <a:off x="1763505" y="5204177"/>
+              <a:ext cx="756355" cy="461665"/>
+            </a:xfrm>
+            <a:prstGeom prst="rect">
+              <a:avLst/>
+            </a:prstGeom>
+            <a:noFill/>
+          </p:spPr>
+          <p:txBody>
+            <a:bodyPr wrap="square" rtlCol="0">
+              <a:spAutoFit/>
+            </a:bodyPr>
+            <a:lstStyle/>
+            <a:p>
+              <a:r>
+                <a:rPr kumimoji="1" lang="ja-JP" altLang="en-US" sz="2400" dirty="0"/>
+                <a:t>■</a:t>
+              </a:r>
+            </a:p>
+          </p:txBody>
+        </p:sp>
+        <p:sp>
+          <p:nvSpPr>
+            <p:cNvPr id="17" name="テキスト ボックス 16">
+              <a:extLst>
+                <a:ext uri="{FF2B5EF4-FFF2-40B4-BE49-F238E27FC236}">
+                  <a16:creationId xmlns:a16="http://schemas.microsoft.com/office/drawing/2014/main" id="{9DE19353-77FC-4CA7-A974-45CAB75ACD4E}"/>
+                </a:ext>
+              </a:extLst>
+            </p:cNvPr>
+            <p:cNvSpPr txBox="1"/>
+            <p:nvPr/>
+          </p:nvSpPr>
+          <p:spPr>
+            <a:xfrm>
+              <a:off x="2833513" y="5204177"/>
+              <a:ext cx="756355" cy="461665"/>
+            </a:xfrm>
+            <a:prstGeom prst="rect">
+              <a:avLst/>
+            </a:prstGeom>
+            <a:noFill/>
+          </p:spPr>
+          <p:txBody>
+            <a:bodyPr wrap="square" rtlCol="0">
+              <a:spAutoFit/>
+            </a:bodyPr>
+            <a:lstStyle/>
+            <a:p>
+              <a:r>
+                <a:rPr kumimoji="1" lang="ja-JP" altLang="en-US" sz="2400" dirty="0"/>
+                <a:t>■</a:t>
+              </a:r>
+            </a:p>
+          </p:txBody>
+        </p:sp>
+        <p:sp>
+          <p:nvSpPr>
+            <p:cNvPr id="18" name="テキスト ボックス 17">
+              <a:extLst>
+                <a:ext uri="{FF2B5EF4-FFF2-40B4-BE49-F238E27FC236}">
+                  <a16:creationId xmlns:a16="http://schemas.microsoft.com/office/drawing/2014/main" id="{A6773250-B8B6-4BDD-B23F-5AF2BB7D717D}"/>
+                </a:ext>
+              </a:extLst>
+            </p:cNvPr>
+            <p:cNvSpPr txBox="1"/>
+            <p:nvPr/>
+          </p:nvSpPr>
+          <p:spPr>
+            <a:xfrm>
+              <a:off x="3031903" y="5181599"/>
+              <a:ext cx="756355" cy="461665"/>
+            </a:xfrm>
+            <a:prstGeom prst="rect">
+              <a:avLst/>
+            </a:prstGeom>
+            <a:noFill/>
+          </p:spPr>
+          <p:txBody>
+            <a:bodyPr wrap="square" rtlCol="0">
+              <a:spAutoFit/>
+            </a:bodyPr>
+            <a:lstStyle/>
+            <a:p>
+              <a:r>
+                <a:rPr kumimoji="1" lang="ja-JP" altLang="en-US" sz="2400" dirty="0"/>
+                <a:t>■</a:t>
+              </a:r>
+            </a:p>
+          </p:txBody>
+        </p:sp>
+        <p:sp>
+          <p:nvSpPr>
+            <p:cNvPr id="19" name="テキスト ボックス 18">
+              <a:extLst>
+                <a:ext uri="{FF2B5EF4-FFF2-40B4-BE49-F238E27FC236}">
+                  <a16:creationId xmlns:a16="http://schemas.microsoft.com/office/drawing/2014/main" id="{EDEE7675-A0E0-4F84-8896-BE6A8F836760}"/>
+                </a:ext>
+              </a:extLst>
+            </p:cNvPr>
+            <p:cNvSpPr txBox="1"/>
+            <p:nvPr/>
+          </p:nvSpPr>
+          <p:spPr>
+            <a:xfrm>
+              <a:off x="3031903" y="4962056"/>
+              <a:ext cx="756355" cy="461665"/>
+            </a:xfrm>
+            <a:prstGeom prst="rect">
+              <a:avLst/>
+            </a:prstGeom>
+            <a:noFill/>
+          </p:spPr>
+          <p:txBody>
+            <a:bodyPr wrap="square" rtlCol="0">
+              <a:spAutoFit/>
+            </a:bodyPr>
+            <a:lstStyle/>
+            <a:p>
+              <a:r>
+                <a:rPr kumimoji="1" lang="ja-JP" altLang="en-US" sz="2400" dirty="0"/>
+                <a:t>■</a:t>
+              </a:r>
+            </a:p>
+          </p:txBody>
+        </p:sp>
+        <p:sp>
+          <p:nvSpPr>
+            <p:cNvPr id="20" name="テキスト ボックス 19">
+              <a:extLst>
+                <a:ext uri="{FF2B5EF4-FFF2-40B4-BE49-F238E27FC236}">
+                  <a16:creationId xmlns:a16="http://schemas.microsoft.com/office/drawing/2014/main" id="{38502A13-9702-4DC6-B0DA-1DCEE6E2EB07}"/>
+                </a:ext>
+              </a:extLst>
+            </p:cNvPr>
+            <p:cNvSpPr txBox="1"/>
+            <p:nvPr/>
+          </p:nvSpPr>
+          <p:spPr>
+            <a:xfrm>
+              <a:off x="3438754" y="3297533"/>
+              <a:ext cx="756355" cy="461665"/>
+            </a:xfrm>
+            <a:prstGeom prst="rect">
+              <a:avLst/>
+            </a:prstGeom>
+            <a:noFill/>
+          </p:spPr>
+          <p:txBody>
+            <a:bodyPr wrap="square" rtlCol="0">
+              <a:spAutoFit/>
+            </a:bodyPr>
+            <a:lstStyle/>
+            <a:p>
+              <a:r>
+                <a:rPr kumimoji="1" lang="ja-JP" altLang="en-US" sz="2400" dirty="0"/>
+                <a:t>■</a:t>
+              </a:r>
+            </a:p>
+          </p:txBody>
+        </p:sp>
+        <p:sp>
+          <p:nvSpPr>
+            <p:cNvPr id="21" name="テキスト ボックス 20">
+              <a:extLst>
+                <a:ext uri="{FF2B5EF4-FFF2-40B4-BE49-F238E27FC236}">
+                  <a16:creationId xmlns:a16="http://schemas.microsoft.com/office/drawing/2014/main" id="{97D6ADCA-827E-41D8-9454-E4118EA0663E}"/>
+                </a:ext>
+              </a:extLst>
+            </p:cNvPr>
+            <p:cNvSpPr txBox="1"/>
+            <p:nvPr/>
+          </p:nvSpPr>
+          <p:spPr>
+            <a:xfrm>
+              <a:off x="3521751" y="4824610"/>
+              <a:ext cx="756355" cy="461665"/>
+            </a:xfrm>
+            <a:prstGeom prst="rect">
+              <a:avLst/>
+            </a:prstGeom>
+            <a:noFill/>
+          </p:spPr>
+          <p:txBody>
+            <a:bodyPr wrap="square" rtlCol="0">
+              <a:spAutoFit/>
+            </a:bodyPr>
+            <a:lstStyle/>
+            <a:p>
+              <a:r>
+                <a:rPr kumimoji="1" lang="ja-JP" altLang="en-US" sz="2400" dirty="0"/>
+                <a:t>■</a:t>
+              </a:r>
+            </a:p>
+          </p:txBody>
+        </p:sp>
+        <p:sp>
+          <p:nvSpPr>
+            <p:cNvPr id="22" name="テキスト ボックス 21">
+              <a:extLst>
+                <a:ext uri="{FF2B5EF4-FFF2-40B4-BE49-F238E27FC236}">
+                  <a16:creationId xmlns:a16="http://schemas.microsoft.com/office/drawing/2014/main" id="{CC8FB718-3B39-4BF3-BAE7-BBAA4F97A8B8}"/>
+                </a:ext>
+              </a:extLst>
+            </p:cNvPr>
+            <p:cNvSpPr txBox="1"/>
+            <p:nvPr/>
+          </p:nvSpPr>
+          <p:spPr>
+            <a:xfrm>
+              <a:off x="3438754" y="3519983"/>
+              <a:ext cx="756355" cy="461665"/>
+            </a:xfrm>
+            <a:prstGeom prst="rect">
+              <a:avLst/>
+            </a:prstGeom>
+            <a:noFill/>
+          </p:spPr>
+          <p:txBody>
+            <a:bodyPr wrap="square" rtlCol="0">
+              <a:spAutoFit/>
+            </a:bodyPr>
+            <a:lstStyle/>
+            <a:p>
+              <a:r>
+                <a:rPr kumimoji="1" lang="ja-JP" altLang="en-US" sz="2400" dirty="0"/>
+                <a:t>■</a:t>
+              </a:r>
+            </a:p>
+          </p:txBody>
+        </p:sp>
+        <p:sp>
+          <p:nvSpPr>
+            <p:cNvPr id="23" name="テキスト ボックス 22">
+              <a:extLst>
+                <a:ext uri="{FF2B5EF4-FFF2-40B4-BE49-F238E27FC236}">
+                  <a16:creationId xmlns:a16="http://schemas.microsoft.com/office/drawing/2014/main" id="{01BBE4E9-2BCF-4C2E-8F14-FC2DF4A3EE37}"/>
+                </a:ext>
+              </a:extLst>
+            </p:cNvPr>
+            <p:cNvSpPr txBox="1"/>
+            <p:nvPr/>
+          </p:nvSpPr>
+          <p:spPr>
+            <a:xfrm>
+              <a:off x="1676660" y="3066700"/>
+              <a:ext cx="756355" cy="461665"/>
+            </a:xfrm>
+            <a:prstGeom prst="rect">
+              <a:avLst/>
+            </a:prstGeom>
+            <a:noFill/>
+          </p:spPr>
+          <p:txBody>
+            <a:bodyPr wrap="square" rtlCol="0">
+              <a:spAutoFit/>
+            </a:bodyPr>
+            <a:lstStyle/>
+            <a:p>
+              <a:r>
+                <a:rPr kumimoji="1" lang="ja-JP" altLang="en-US" sz="2400" dirty="0"/>
+                <a:t>■</a:t>
+              </a:r>
+            </a:p>
+          </p:txBody>
+        </p:sp>
+        <p:sp>
+          <p:nvSpPr>
+            <p:cNvPr id="24" name="テキスト ボックス 23">
+              <a:extLst>
+                <a:ext uri="{FF2B5EF4-FFF2-40B4-BE49-F238E27FC236}">
+                  <a16:creationId xmlns:a16="http://schemas.microsoft.com/office/drawing/2014/main" id="{EB118DE2-4FC7-444C-9AF4-D6DC068FE991}"/>
+                </a:ext>
+              </a:extLst>
+            </p:cNvPr>
+            <p:cNvSpPr txBox="1"/>
+            <p:nvPr/>
+          </p:nvSpPr>
+          <p:spPr>
+            <a:xfrm>
+              <a:off x="1887298" y="3063457"/>
+              <a:ext cx="756355" cy="461665"/>
+            </a:xfrm>
+            <a:prstGeom prst="rect">
+              <a:avLst/>
+            </a:prstGeom>
+            <a:noFill/>
+          </p:spPr>
+          <p:txBody>
+            <a:bodyPr wrap="square" rtlCol="0">
+              <a:spAutoFit/>
+            </a:bodyPr>
+            <a:lstStyle/>
+            <a:p>
+              <a:r>
+                <a:rPr kumimoji="1" lang="ja-JP" altLang="en-US" sz="2400" dirty="0"/>
+                <a:t>■</a:t>
+              </a:r>
+            </a:p>
+          </p:txBody>
+        </p:sp>
+        <p:sp>
+          <p:nvSpPr>
+            <p:cNvPr id="25" name="テキスト ボックス 24">
+              <a:extLst>
+                <a:ext uri="{FF2B5EF4-FFF2-40B4-BE49-F238E27FC236}">
+                  <a16:creationId xmlns:a16="http://schemas.microsoft.com/office/drawing/2014/main" id="{D6ECF5B6-7831-4824-9582-ED54732D6DB1}"/>
+                </a:ext>
+              </a:extLst>
+            </p:cNvPr>
+            <p:cNvSpPr txBox="1"/>
+            <p:nvPr/>
+          </p:nvSpPr>
+          <p:spPr>
+            <a:xfrm>
+              <a:off x="1781979" y="3289150"/>
+              <a:ext cx="756355" cy="461665"/>
+            </a:xfrm>
+            <a:prstGeom prst="rect">
+              <a:avLst/>
+            </a:prstGeom>
+            <a:noFill/>
+          </p:spPr>
+          <p:txBody>
+            <a:bodyPr wrap="square" rtlCol="0">
+              <a:spAutoFit/>
+            </a:bodyPr>
+            <a:lstStyle/>
+            <a:p>
+              <a:r>
+                <a:rPr kumimoji="1" lang="ja-JP" altLang="en-US" sz="2400" dirty="0"/>
+                <a:t>■</a:t>
+              </a:r>
+            </a:p>
+          </p:txBody>
+        </p:sp>
+        <p:sp>
+          <p:nvSpPr>
+            <p:cNvPr id="26" name="テキスト ボックス 25">
+              <a:extLst>
+                <a:ext uri="{FF2B5EF4-FFF2-40B4-BE49-F238E27FC236}">
+                  <a16:creationId xmlns:a16="http://schemas.microsoft.com/office/drawing/2014/main" id="{CD116DE5-AC1C-49EA-89B0-BD5FE06EEC38}"/>
+                </a:ext>
+              </a:extLst>
+            </p:cNvPr>
+            <p:cNvSpPr txBox="1"/>
+            <p:nvPr/>
+          </p:nvSpPr>
+          <p:spPr>
+            <a:xfrm>
+              <a:off x="3438753" y="3075083"/>
+              <a:ext cx="756355" cy="461665"/>
+            </a:xfrm>
+            <a:prstGeom prst="rect">
+              <a:avLst/>
+            </a:prstGeom>
+            <a:noFill/>
+          </p:spPr>
+          <p:txBody>
+            <a:bodyPr wrap="square" rtlCol="0">
+              <a:spAutoFit/>
+            </a:bodyPr>
+            <a:lstStyle/>
+            <a:p>
+              <a:r>
+                <a:rPr kumimoji="1" lang="ja-JP" altLang="en-US" sz="2400" dirty="0"/>
+                <a:t>■</a:t>
+              </a:r>
+            </a:p>
+          </p:txBody>
+        </p:sp>
+        <p:sp>
+          <p:nvSpPr>
+            <p:cNvPr id="27" name="テキスト ボックス 26">
+              <a:extLst>
+                <a:ext uri="{FF2B5EF4-FFF2-40B4-BE49-F238E27FC236}">
+                  <a16:creationId xmlns:a16="http://schemas.microsoft.com/office/drawing/2014/main" id="{67F75C4A-B5EE-48B2-B8C0-02186C6E2D1C}"/>
+                </a:ext>
+              </a:extLst>
+            </p:cNvPr>
+            <p:cNvSpPr txBox="1"/>
+            <p:nvPr/>
+          </p:nvSpPr>
+          <p:spPr>
+            <a:xfrm>
+              <a:off x="3239912" y="3063457"/>
+              <a:ext cx="756355" cy="461665"/>
+            </a:xfrm>
+            <a:prstGeom prst="rect">
+              <a:avLst/>
+            </a:prstGeom>
+            <a:noFill/>
+          </p:spPr>
+          <p:txBody>
+            <a:bodyPr wrap="square" rtlCol="0">
+              <a:spAutoFit/>
+            </a:bodyPr>
+            <a:lstStyle/>
+            <a:p>
+              <a:r>
+                <a:rPr kumimoji="1" lang="ja-JP" altLang="en-US" sz="2400" dirty="0"/>
+                <a:t>■</a:t>
+              </a:r>
+            </a:p>
+          </p:txBody>
+        </p:sp>
+        <p:sp>
+          <p:nvSpPr>
+            <p:cNvPr id="28" name="テキスト ボックス 27">
+              <a:extLst>
+                <a:ext uri="{FF2B5EF4-FFF2-40B4-BE49-F238E27FC236}">
+                  <a16:creationId xmlns:a16="http://schemas.microsoft.com/office/drawing/2014/main" id="{D53BA763-D66B-4C42-96E4-67D60FF72B20}"/>
+                </a:ext>
+              </a:extLst>
+            </p:cNvPr>
+            <p:cNvSpPr txBox="1"/>
+            <p:nvPr/>
+          </p:nvSpPr>
+          <p:spPr>
+            <a:xfrm>
+              <a:off x="3041071" y="3063457"/>
+              <a:ext cx="756355" cy="461665"/>
+            </a:xfrm>
+            <a:prstGeom prst="rect">
+              <a:avLst/>
+            </a:prstGeom>
+            <a:noFill/>
+          </p:spPr>
+          <p:txBody>
+            <a:bodyPr wrap="square" rtlCol="0">
+              <a:spAutoFit/>
+            </a:bodyPr>
+            <a:lstStyle/>
+            <a:p>
+              <a:r>
+                <a:rPr kumimoji="1" lang="ja-JP" altLang="en-US" sz="2400" dirty="0"/>
+                <a:t>■</a:t>
+              </a:r>
+            </a:p>
+          </p:txBody>
+        </p:sp>
+        <p:sp>
+          <p:nvSpPr>
+            <p:cNvPr id="29" name="テキスト ボックス 28">
+              <a:extLst>
+                <a:ext uri="{FF2B5EF4-FFF2-40B4-BE49-F238E27FC236}">
+                  <a16:creationId xmlns:a16="http://schemas.microsoft.com/office/drawing/2014/main" id="{7EF4354F-3424-48AB-833B-A1DA40F47D3B}"/>
+                </a:ext>
+              </a:extLst>
+            </p:cNvPr>
+            <p:cNvSpPr txBox="1"/>
+            <p:nvPr/>
+          </p:nvSpPr>
+          <p:spPr>
+            <a:xfrm>
+              <a:off x="1298482" y="3742432"/>
+              <a:ext cx="756355" cy="461665"/>
+            </a:xfrm>
+            <a:prstGeom prst="rect">
+              <a:avLst/>
+            </a:prstGeom>
+            <a:noFill/>
+          </p:spPr>
+          <p:txBody>
+            <a:bodyPr wrap="square" rtlCol="0">
+              <a:spAutoFit/>
+            </a:bodyPr>
+            <a:lstStyle/>
+            <a:p>
+              <a:r>
+                <a:rPr kumimoji="1" lang="ja-JP" altLang="en-US" sz="2400" dirty="0"/>
+                <a:t>■</a:t>
+              </a:r>
+            </a:p>
+          </p:txBody>
+        </p:sp>
+        <p:sp>
+          <p:nvSpPr>
+            <p:cNvPr id="30" name="テキスト ボックス 29">
+              <a:extLst>
+                <a:ext uri="{FF2B5EF4-FFF2-40B4-BE49-F238E27FC236}">
+                  <a16:creationId xmlns:a16="http://schemas.microsoft.com/office/drawing/2014/main" id="{53CF248D-C050-4388-95B8-AFA3911C733B}"/>
+                </a:ext>
+              </a:extLst>
+            </p:cNvPr>
+            <p:cNvSpPr txBox="1"/>
+            <p:nvPr/>
+          </p:nvSpPr>
+          <p:spPr>
+            <a:xfrm>
+              <a:off x="1298481" y="3912606"/>
+              <a:ext cx="756355" cy="461665"/>
+            </a:xfrm>
+            <a:prstGeom prst="rect">
+              <a:avLst/>
+            </a:prstGeom>
+            <a:noFill/>
+          </p:spPr>
+          <p:txBody>
+            <a:bodyPr wrap="square" rtlCol="0">
+              <a:spAutoFit/>
+            </a:bodyPr>
+            <a:lstStyle/>
+            <a:p>
+              <a:r>
+                <a:rPr kumimoji="1" lang="ja-JP" altLang="en-US" sz="2400" dirty="0"/>
+                <a:t>■</a:t>
+              </a:r>
+            </a:p>
+          </p:txBody>
+        </p:sp>
+        <p:sp>
+          <p:nvSpPr>
+            <p:cNvPr id="31" name="テキスト ボックス 30">
+              <a:extLst>
+                <a:ext uri="{FF2B5EF4-FFF2-40B4-BE49-F238E27FC236}">
+                  <a16:creationId xmlns:a16="http://schemas.microsoft.com/office/drawing/2014/main" id="{663A20E3-5DD3-494E-A8DC-90BF8A0A9DBC}"/>
+                </a:ext>
+              </a:extLst>
+            </p:cNvPr>
+            <p:cNvSpPr txBox="1"/>
+            <p:nvPr/>
+          </p:nvSpPr>
+          <p:spPr>
+            <a:xfrm>
+              <a:off x="1298480" y="4082780"/>
+              <a:ext cx="756355" cy="461665"/>
+            </a:xfrm>
+            <a:prstGeom prst="rect">
+              <a:avLst/>
+            </a:prstGeom>
+            <a:noFill/>
+          </p:spPr>
+          <p:txBody>
+            <a:bodyPr wrap="square" rtlCol="0">
+              <a:spAutoFit/>
+            </a:bodyPr>
+            <a:lstStyle/>
+            <a:p>
+              <a:r>
+                <a:rPr kumimoji="1" lang="ja-JP" altLang="en-US" sz="2400" dirty="0"/>
+                <a:t>■</a:t>
+              </a:r>
+            </a:p>
+          </p:txBody>
+        </p:sp>
+        <p:sp>
+          <p:nvSpPr>
+            <p:cNvPr id="32" name="テキスト ボックス 31">
+              <a:extLst>
+                <a:ext uri="{FF2B5EF4-FFF2-40B4-BE49-F238E27FC236}">
+                  <a16:creationId xmlns:a16="http://schemas.microsoft.com/office/drawing/2014/main" id="{2D499AF2-AA34-49EB-BE6B-B724B6CFFD4B}"/>
+                </a:ext>
+              </a:extLst>
+            </p:cNvPr>
+            <p:cNvSpPr txBox="1"/>
+            <p:nvPr/>
+          </p:nvSpPr>
+          <p:spPr>
+            <a:xfrm>
+              <a:off x="1298479" y="4252954"/>
+              <a:ext cx="756355" cy="461665"/>
+            </a:xfrm>
+            <a:prstGeom prst="rect">
+              <a:avLst/>
+            </a:prstGeom>
+            <a:noFill/>
+          </p:spPr>
+          <p:txBody>
+            <a:bodyPr wrap="square" rtlCol="0">
+              <a:spAutoFit/>
+            </a:bodyPr>
+            <a:lstStyle/>
+            <a:p>
+              <a:r>
+                <a:rPr kumimoji="1" lang="ja-JP" altLang="en-US" sz="2400" dirty="0"/>
+                <a:t>■</a:t>
+              </a:r>
+            </a:p>
+          </p:txBody>
+        </p:sp>
+        <p:sp>
+          <p:nvSpPr>
+            <p:cNvPr id="33" name="テキスト ボックス 32">
+              <a:extLst>
+                <a:ext uri="{FF2B5EF4-FFF2-40B4-BE49-F238E27FC236}">
+                  <a16:creationId xmlns:a16="http://schemas.microsoft.com/office/drawing/2014/main" id="{E1D99EF6-FE4B-47E0-9E24-F7DE0E25A61C}"/>
+                </a:ext>
+              </a:extLst>
+            </p:cNvPr>
+            <p:cNvSpPr txBox="1"/>
+            <p:nvPr/>
+          </p:nvSpPr>
+          <p:spPr>
+            <a:xfrm>
+              <a:off x="1347678" y="5191109"/>
+              <a:ext cx="756355" cy="461665"/>
+            </a:xfrm>
+            <a:prstGeom prst="rect">
+              <a:avLst/>
+            </a:prstGeom>
+            <a:noFill/>
+          </p:spPr>
+          <p:txBody>
+            <a:bodyPr wrap="square" rtlCol="0">
+              <a:spAutoFit/>
+            </a:bodyPr>
+            <a:lstStyle/>
+            <a:p>
+              <a:r>
+                <a:rPr kumimoji="1" lang="ja-JP" altLang="en-US" sz="2400" dirty="0"/>
+                <a:t>■</a:t>
+              </a:r>
+            </a:p>
+          </p:txBody>
+        </p:sp>
+        <p:sp>
+          <p:nvSpPr>
+            <p:cNvPr id="34" name="テキスト ボックス 33">
+              <a:extLst>
+                <a:ext uri="{FF2B5EF4-FFF2-40B4-BE49-F238E27FC236}">
+                  <a16:creationId xmlns:a16="http://schemas.microsoft.com/office/drawing/2014/main" id="{665A56CA-306B-4DE3-B5B5-A60BEE94470B}"/>
+                </a:ext>
+              </a:extLst>
+            </p:cNvPr>
+            <p:cNvSpPr txBox="1"/>
+            <p:nvPr/>
+          </p:nvSpPr>
+          <p:spPr>
+            <a:xfrm rot="16200000">
+              <a:off x="3214009" y="3278686"/>
+              <a:ext cx="489729" cy="338554"/>
+            </a:xfrm>
+            <a:prstGeom prst="rect">
+              <a:avLst/>
+            </a:prstGeom>
+            <a:noFill/>
+          </p:spPr>
+          <p:txBody>
+            <a:bodyPr wrap="square" rtlCol="0">
+              <a:spAutoFit/>
+            </a:bodyPr>
+            <a:lstStyle/>
+            <a:p>
+              <a:r>
+                <a:rPr kumimoji="1" lang="ja-JP" altLang="en-US" sz="1600" dirty="0">
+                  <a:solidFill>
+                    <a:schemeClr val="accent2"/>
+                  </a:solidFill>
+                </a:rPr>
+                <a:t>▲</a:t>
+              </a:r>
+            </a:p>
+          </p:txBody>
+        </p:sp>
+      </p:grpSp>
+      <p:sp>
+        <p:nvSpPr>
+          <p:cNvPr id="36" name="テキスト ボックス 35">
+            <a:extLst>
+              <a:ext uri="{FF2B5EF4-FFF2-40B4-BE49-F238E27FC236}">
+                <a16:creationId xmlns:a16="http://schemas.microsoft.com/office/drawing/2014/main" id="{CC20B10F-5B5E-4AEE-9045-421B61D5F084}"/>
+              </a:ext>
+            </a:extLst>
+          </p:cNvPr>
+          <p:cNvSpPr txBox="1"/>
+          <p:nvPr/>
+        </p:nvSpPr>
+        <p:spPr>
+          <a:xfrm>
+            <a:off x="4680094" y="3875515"/>
+            <a:ext cx="2134437" cy="1323439"/>
+          </a:xfrm>
+          <a:prstGeom prst="rect">
+            <a:avLst/>
+          </a:prstGeom>
+          <a:noFill/>
+        </p:spPr>
+        <p:txBody>
+          <a:bodyPr wrap="square" rtlCol="0">
+            <a:spAutoFit/>
+          </a:bodyPr>
+          <a:lstStyle/>
+          <a:p>
+            <a:r>
+              <a:rPr kumimoji="1" lang="ja-JP" altLang="en-US" sz="8000" dirty="0"/>
+              <a:t>→</a:t>
+            </a:r>
+          </a:p>
+        </p:txBody>
+      </p:sp>
+      <p:grpSp>
+        <p:nvGrpSpPr>
+          <p:cNvPr id="37" name="グループ化 36">
+            <a:extLst>
+              <a:ext uri="{FF2B5EF4-FFF2-40B4-BE49-F238E27FC236}">
+                <a16:creationId xmlns:a16="http://schemas.microsoft.com/office/drawing/2014/main" id="{8B298DF6-2C54-4D1C-BCF7-0CF6D6E72DD9}"/>
+              </a:ext>
+            </a:extLst>
+          </p:cNvPr>
+          <p:cNvGrpSpPr/>
+          <p:nvPr/>
+        </p:nvGrpSpPr>
+        <p:grpSpPr>
+          <a:xfrm rot="5400000">
+            <a:off x="5889915" y="2443696"/>
+            <a:ext cx="3945467" cy="3945467"/>
+            <a:chOff x="670920" y="2359377"/>
+            <a:chExt cx="3945467" cy="3945467"/>
+          </a:xfrm>
+        </p:grpSpPr>
+        <p:pic>
+          <p:nvPicPr>
+            <p:cNvPr id="38" name="図 37">
+              <a:extLst>
+                <a:ext uri="{FF2B5EF4-FFF2-40B4-BE49-F238E27FC236}">
+                  <a16:creationId xmlns:a16="http://schemas.microsoft.com/office/drawing/2014/main" id="{0D06508E-263C-4DDC-BD7F-2CE5656C00C3}"/>
+                </a:ext>
+              </a:extLst>
+            </p:cNvPr>
+            <p:cNvPicPr>
+              <a:picLocks noChangeAspect="1"/>
+            </p:cNvPicPr>
+            <p:nvPr/>
+          </p:nvPicPr>
+          <p:blipFill>
+            <a:blip r:embed="rId2">
+              <a:extLst>
+                <a:ext uri="{28A0092B-C50C-407E-A947-70E740481C1C}">
+                  <a14:useLocalDpi xmlns:a14="http://schemas.microsoft.com/office/drawing/2010/main" val="0"/>
+                </a:ext>
+              </a:extLst>
+            </a:blip>
+            <a:stretch>
+              <a:fillRect/>
+            </a:stretch>
+          </p:blipFill>
+          <p:spPr>
+            <a:xfrm>
+              <a:off x="670920" y="2359377"/>
+              <a:ext cx="3945467" cy="3945467"/>
+            </a:xfrm>
+            <a:prstGeom prst="rect">
+              <a:avLst/>
+            </a:prstGeom>
+          </p:spPr>
+        </p:pic>
+        <p:sp>
+          <p:nvSpPr>
+            <p:cNvPr id="39" name="テキスト ボックス 38">
+              <a:extLst>
+                <a:ext uri="{FF2B5EF4-FFF2-40B4-BE49-F238E27FC236}">
+                  <a16:creationId xmlns:a16="http://schemas.microsoft.com/office/drawing/2014/main" id="{DB1A2653-EC1D-4A1A-A191-2EEE859A81F3}"/>
+                </a:ext>
+              </a:extLst>
+            </p:cNvPr>
+            <p:cNvSpPr txBox="1"/>
+            <p:nvPr/>
+          </p:nvSpPr>
+          <p:spPr>
+            <a:xfrm>
+              <a:off x="3239912" y="5204178"/>
+              <a:ext cx="756355" cy="461665"/>
+            </a:xfrm>
+            <a:prstGeom prst="rect">
+              <a:avLst/>
+            </a:prstGeom>
+            <a:noFill/>
+          </p:spPr>
+          <p:txBody>
+            <a:bodyPr wrap="square" rtlCol="0">
+              <a:spAutoFit/>
+            </a:bodyPr>
+            <a:lstStyle/>
+            <a:p>
+              <a:r>
+                <a:rPr kumimoji="1" lang="ja-JP" altLang="en-US" sz="2400" dirty="0"/>
+                <a:t>■</a:t>
+              </a:r>
+            </a:p>
+          </p:txBody>
+        </p:sp>
+        <p:sp>
+          <p:nvSpPr>
+            <p:cNvPr id="40" name="テキスト ボックス 39">
+              <a:extLst>
+                <a:ext uri="{FF2B5EF4-FFF2-40B4-BE49-F238E27FC236}">
+                  <a16:creationId xmlns:a16="http://schemas.microsoft.com/office/drawing/2014/main" id="{7A7BA513-D768-4414-A58C-279438F1AB42}"/>
+                </a:ext>
+              </a:extLst>
+            </p:cNvPr>
+            <p:cNvSpPr txBox="1"/>
+            <p:nvPr/>
+          </p:nvSpPr>
+          <p:spPr>
+            <a:xfrm>
+              <a:off x="1577239" y="5204178"/>
+              <a:ext cx="756355" cy="461665"/>
+            </a:xfrm>
+            <a:prstGeom prst="rect">
+              <a:avLst/>
+            </a:prstGeom>
+            <a:noFill/>
+          </p:spPr>
+          <p:txBody>
+            <a:bodyPr wrap="square" rtlCol="0">
+              <a:spAutoFit/>
+            </a:bodyPr>
+            <a:lstStyle/>
+            <a:p>
+              <a:r>
+                <a:rPr kumimoji="1" lang="ja-JP" altLang="en-US" sz="2400" dirty="0"/>
+                <a:t>■</a:t>
+              </a:r>
+            </a:p>
+          </p:txBody>
+        </p:sp>
+        <p:sp>
+          <p:nvSpPr>
+            <p:cNvPr id="41" name="テキスト ボックス 40">
+              <a:extLst>
+                <a:ext uri="{FF2B5EF4-FFF2-40B4-BE49-F238E27FC236}">
+                  <a16:creationId xmlns:a16="http://schemas.microsoft.com/office/drawing/2014/main" id="{F1832EB4-97B9-4972-A121-5101F9DE1005}"/>
+                </a:ext>
+              </a:extLst>
+            </p:cNvPr>
+            <p:cNvSpPr txBox="1"/>
+            <p:nvPr/>
+          </p:nvSpPr>
+          <p:spPr>
+            <a:xfrm>
+              <a:off x="1577239" y="4984634"/>
+              <a:ext cx="756355" cy="461665"/>
+            </a:xfrm>
+            <a:prstGeom prst="rect">
+              <a:avLst/>
+            </a:prstGeom>
+            <a:noFill/>
+          </p:spPr>
+          <p:txBody>
+            <a:bodyPr wrap="square" rtlCol="0">
+              <a:spAutoFit/>
+            </a:bodyPr>
+            <a:lstStyle/>
+            <a:p>
+              <a:r>
+                <a:rPr kumimoji="1" lang="ja-JP" altLang="en-US" sz="2400" dirty="0"/>
+                <a:t>■</a:t>
+              </a:r>
+            </a:p>
+          </p:txBody>
+        </p:sp>
+        <p:sp>
+          <p:nvSpPr>
+            <p:cNvPr id="42" name="テキスト ボックス 41">
+              <a:extLst>
+                <a:ext uri="{FF2B5EF4-FFF2-40B4-BE49-F238E27FC236}">
+                  <a16:creationId xmlns:a16="http://schemas.microsoft.com/office/drawing/2014/main" id="{CBCFE9E0-E7D0-4A37-A526-37E963857D45}"/>
+                </a:ext>
+              </a:extLst>
+            </p:cNvPr>
+            <p:cNvSpPr txBox="1"/>
+            <p:nvPr/>
+          </p:nvSpPr>
+          <p:spPr>
+            <a:xfrm>
+              <a:off x="1763505" y="5204177"/>
+              <a:ext cx="756355" cy="461665"/>
+            </a:xfrm>
+            <a:prstGeom prst="rect">
+              <a:avLst/>
+            </a:prstGeom>
+            <a:noFill/>
+          </p:spPr>
+          <p:txBody>
+            <a:bodyPr wrap="square" rtlCol="0">
+              <a:spAutoFit/>
+            </a:bodyPr>
+            <a:lstStyle/>
+            <a:p>
+              <a:r>
+                <a:rPr kumimoji="1" lang="ja-JP" altLang="en-US" sz="2400" dirty="0"/>
+                <a:t>■</a:t>
+              </a:r>
+            </a:p>
+          </p:txBody>
+        </p:sp>
+        <p:sp>
+          <p:nvSpPr>
+            <p:cNvPr id="43" name="テキスト ボックス 42">
+              <a:extLst>
+                <a:ext uri="{FF2B5EF4-FFF2-40B4-BE49-F238E27FC236}">
+                  <a16:creationId xmlns:a16="http://schemas.microsoft.com/office/drawing/2014/main" id="{BBFF0C9A-6DE0-4A1C-9F93-AC184FA635B8}"/>
+                </a:ext>
+              </a:extLst>
+            </p:cNvPr>
+            <p:cNvSpPr txBox="1"/>
+            <p:nvPr/>
+          </p:nvSpPr>
+          <p:spPr>
+            <a:xfrm>
+              <a:off x="2833513" y="5204177"/>
+              <a:ext cx="756355" cy="461665"/>
+            </a:xfrm>
+            <a:prstGeom prst="rect">
+              <a:avLst/>
+            </a:prstGeom>
+            <a:noFill/>
+          </p:spPr>
+          <p:txBody>
+            <a:bodyPr wrap="square" rtlCol="0">
+              <a:spAutoFit/>
+            </a:bodyPr>
+            <a:lstStyle/>
+            <a:p>
+              <a:r>
+                <a:rPr kumimoji="1" lang="ja-JP" altLang="en-US" sz="2400" dirty="0"/>
+                <a:t>■</a:t>
+              </a:r>
+            </a:p>
+          </p:txBody>
+        </p:sp>
+        <p:sp>
+          <p:nvSpPr>
+            <p:cNvPr id="44" name="テキスト ボックス 43">
+              <a:extLst>
+                <a:ext uri="{FF2B5EF4-FFF2-40B4-BE49-F238E27FC236}">
+                  <a16:creationId xmlns:a16="http://schemas.microsoft.com/office/drawing/2014/main" id="{0AF8AE8C-535D-4696-AC87-DB558B2DD803}"/>
+                </a:ext>
+              </a:extLst>
+            </p:cNvPr>
+            <p:cNvSpPr txBox="1"/>
+            <p:nvPr/>
+          </p:nvSpPr>
+          <p:spPr>
+            <a:xfrm>
+              <a:off x="3031903" y="5181599"/>
+              <a:ext cx="756355" cy="461665"/>
+            </a:xfrm>
+            <a:prstGeom prst="rect">
+              <a:avLst/>
+            </a:prstGeom>
+            <a:noFill/>
+          </p:spPr>
+          <p:txBody>
+            <a:bodyPr wrap="square" rtlCol="0">
+              <a:spAutoFit/>
+            </a:bodyPr>
+            <a:lstStyle/>
+            <a:p>
+              <a:r>
+                <a:rPr kumimoji="1" lang="ja-JP" altLang="en-US" sz="2400" dirty="0"/>
+                <a:t>■</a:t>
+              </a:r>
+            </a:p>
+          </p:txBody>
+        </p:sp>
+        <p:sp>
+          <p:nvSpPr>
+            <p:cNvPr id="45" name="テキスト ボックス 44">
+              <a:extLst>
+                <a:ext uri="{FF2B5EF4-FFF2-40B4-BE49-F238E27FC236}">
+                  <a16:creationId xmlns:a16="http://schemas.microsoft.com/office/drawing/2014/main" id="{A446627A-A58B-4A2F-9C7A-4FA5CED1C3E3}"/>
+                </a:ext>
+              </a:extLst>
+            </p:cNvPr>
+            <p:cNvSpPr txBox="1"/>
+            <p:nvPr/>
+          </p:nvSpPr>
+          <p:spPr>
+            <a:xfrm>
+              <a:off x="3031903" y="4962056"/>
+              <a:ext cx="756355" cy="461665"/>
+            </a:xfrm>
+            <a:prstGeom prst="rect">
+              <a:avLst/>
+            </a:prstGeom>
+            <a:noFill/>
+          </p:spPr>
+          <p:txBody>
+            <a:bodyPr wrap="square" rtlCol="0">
+              <a:spAutoFit/>
+            </a:bodyPr>
+            <a:lstStyle/>
+            <a:p>
+              <a:r>
+                <a:rPr kumimoji="1" lang="ja-JP" altLang="en-US" sz="2400" dirty="0"/>
+                <a:t>■</a:t>
+              </a:r>
+            </a:p>
+          </p:txBody>
+        </p:sp>
+        <p:sp>
+          <p:nvSpPr>
+            <p:cNvPr id="46" name="テキスト ボックス 45">
+              <a:extLst>
+                <a:ext uri="{FF2B5EF4-FFF2-40B4-BE49-F238E27FC236}">
+                  <a16:creationId xmlns:a16="http://schemas.microsoft.com/office/drawing/2014/main" id="{304C3A04-9C16-4DAD-8275-FB1B4C8D531C}"/>
+                </a:ext>
+              </a:extLst>
+            </p:cNvPr>
+            <p:cNvSpPr txBox="1"/>
+            <p:nvPr/>
+          </p:nvSpPr>
+          <p:spPr>
+            <a:xfrm>
+              <a:off x="3438754" y="3297533"/>
+              <a:ext cx="756355" cy="461665"/>
+            </a:xfrm>
+            <a:prstGeom prst="rect">
+              <a:avLst/>
+            </a:prstGeom>
+            <a:noFill/>
+          </p:spPr>
+          <p:txBody>
+            <a:bodyPr wrap="square" rtlCol="0">
+              <a:spAutoFit/>
+            </a:bodyPr>
+            <a:lstStyle/>
+            <a:p>
+              <a:r>
+                <a:rPr kumimoji="1" lang="ja-JP" altLang="en-US" sz="2400" dirty="0"/>
+                <a:t>■</a:t>
+              </a:r>
+            </a:p>
+          </p:txBody>
+        </p:sp>
+        <p:sp>
+          <p:nvSpPr>
+            <p:cNvPr id="47" name="テキスト ボックス 46">
+              <a:extLst>
+                <a:ext uri="{FF2B5EF4-FFF2-40B4-BE49-F238E27FC236}">
+                  <a16:creationId xmlns:a16="http://schemas.microsoft.com/office/drawing/2014/main" id="{CFF96B6A-2D9A-441D-B3B8-1460933AF0C4}"/>
+                </a:ext>
+              </a:extLst>
+            </p:cNvPr>
+            <p:cNvSpPr txBox="1"/>
+            <p:nvPr/>
+          </p:nvSpPr>
+          <p:spPr>
+            <a:xfrm>
+              <a:off x="3521751" y="4824610"/>
+              <a:ext cx="756355" cy="461665"/>
+            </a:xfrm>
+            <a:prstGeom prst="rect">
+              <a:avLst/>
+            </a:prstGeom>
+            <a:noFill/>
+          </p:spPr>
+          <p:txBody>
+            <a:bodyPr wrap="square" rtlCol="0">
+              <a:spAutoFit/>
+            </a:bodyPr>
+            <a:lstStyle/>
+            <a:p>
+              <a:r>
+                <a:rPr kumimoji="1" lang="ja-JP" altLang="en-US" sz="2400" dirty="0"/>
+                <a:t>■</a:t>
+              </a:r>
+            </a:p>
+          </p:txBody>
+        </p:sp>
+        <p:sp>
+          <p:nvSpPr>
+            <p:cNvPr id="48" name="テキスト ボックス 47">
+              <a:extLst>
+                <a:ext uri="{FF2B5EF4-FFF2-40B4-BE49-F238E27FC236}">
+                  <a16:creationId xmlns:a16="http://schemas.microsoft.com/office/drawing/2014/main" id="{AE3EF3A8-7E7E-4452-ADB8-34D2B1D660CC}"/>
+                </a:ext>
+              </a:extLst>
+            </p:cNvPr>
+            <p:cNvSpPr txBox="1"/>
+            <p:nvPr/>
+          </p:nvSpPr>
+          <p:spPr>
+            <a:xfrm>
+              <a:off x="3438754" y="3519983"/>
+              <a:ext cx="756355" cy="461665"/>
+            </a:xfrm>
+            <a:prstGeom prst="rect">
+              <a:avLst/>
+            </a:prstGeom>
+            <a:noFill/>
+          </p:spPr>
+          <p:txBody>
+            <a:bodyPr wrap="square" rtlCol="0">
+              <a:spAutoFit/>
+            </a:bodyPr>
+            <a:lstStyle/>
+            <a:p>
+              <a:r>
+                <a:rPr kumimoji="1" lang="ja-JP" altLang="en-US" sz="2400" dirty="0"/>
+                <a:t>■</a:t>
+              </a:r>
+            </a:p>
+          </p:txBody>
+        </p:sp>
+        <p:sp>
+          <p:nvSpPr>
+            <p:cNvPr id="49" name="テキスト ボックス 48">
+              <a:extLst>
+                <a:ext uri="{FF2B5EF4-FFF2-40B4-BE49-F238E27FC236}">
+                  <a16:creationId xmlns:a16="http://schemas.microsoft.com/office/drawing/2014/main" id="{9CC96C37-2BA0-4D68-B007-2E18582D471F}"/>
+                </a:ext>
+              </a:extLst>
+            </p:cNvPr>
+            <p:cNvSpPr txBox="1"/>
+            <p:nvPr/>
+          </p:nvSpPr>
+          <p:spPr>
+            <a:xfrm>
+              <a:off x="1676660" y="3066700"/>
+              <a:ext cx="756355" cy="461665"/>
+            </a:xfrm>
+            <a:prstGeom prst="rect">
+              <a:avLst/>
+            </a:prstGeom>
+            <a:noFill/>
+          </p:spPr>
+          <p:txBody>
+            <a:bodyPr wrap="square" rtlCol="0">
+              <a:spAutoFit/>
+            </a:bodyPr>
+            <a:lstStyle/>
+            <a:p>
+              <a:r>
+                <a:rPr kumimoji="1" lang="ja-JP" altLang="en-US" sz="2400" dirty="0"/>
+                <a:t>■</a:t>
+              </a:r>
+            </a:p>
+          </p:txBody>
+        </p:sp>
+        <p:sp>
+          <p:nvSpPr>
+            <p:cNvPr id="50" name="テキスト ボックス 49">
+              <a:extLst>
+                <a:ext uri="{FF2B5EF4-FFF2-40B4-BE49-F238E27FC236}">
+                  <a16:creationId xmlns:a16="http://schemas.microsoft.com/office/drawing/2014/main" id="{AF806723-EFB9-4E3D-B42F-BCE32A2DB828}"/>
+                </a:ext>
+              </a:extLst>
+            </p:cNvPr>
+            <p:cNvSpPr txBox="1"/>
+            <p:nvPr/>
+          </p:nvSpPr>
+          <p:spPr>
+            <a:xfrm>
+              <a:off x="1887298" y="3063457"/>
+              <a:ext cx="756355" cy="461665"/>
+            </a:xfrm>
+            <a:prstGeom prst="rect">
+              <a:avLst/>
+            </a:prstGeom>
+            <a:noFill/>
+          </p:spPr>
+          <p:txBody>
+            <a:bodyPr wrap="square" rtlCol="0">
+              <a:spAutoFit/>
+            </a:bodyPr>
+            <a:lstStyle/>
+            <a:p>
+              <a:r>
+                <a:rPr kumimoji="1" lang="ja-JP" altLang="en-US" sz="2400" dirty="0"/>
+                <a:t>■</a:t>
+              </a:r>
+            </a:p>
+          </p:txBody>
+        </p:sp>
+        <p:sp>
+          <p:nvSpPr>
+            <p:cNvPr id="51" name="テキスト ボックス 50">
+              <a:extLst>
+                <a:ext uri="{FF2B5EF4-FFF2-40B4-BE49-F238E27FC236}">
+                  <a16:creationId xmlns:a16="http://schemas.microsoft.com/office/drawing/2014/main" id="{7B996B15-9E5B-4C34-9716-42DFBD362D74}"/>
+                </a:ext>
+              </a:extLst>
+            </p:cNvPr>
+            <p:cNvSpPr txBox="1"/>
+            <p:nvPr/>
+          </p:nvSpPr>
+          <p:spPr>
+            <a:xfrm>
+              <a:off x="1781979" y="3289150"/>
+              <a:ext cx="756355" cy="461665"/>
+            </a:xfrm>
+            <a:prstGeom prst="rect">
+              <a:avLst/>
+            </a:prstGeom>
+            <a:noFill/>
+          </p:spPr>
+          <p:txBody>
+            <a:bodyPr wrap="square" rtlCol="0">
+              <a:spAutoFit/>
+            </a:bodyPr>
+            <a:lstStyle/>
+            <a:p>
+              <a:r>
+                <a:rPr kumimoji="1" lang="ja-JP" altLang="en-US" sz="2400" dirty="0"/>
+                <a:t>■</a:t>
+              </a:r>
+            </a:p>
+          </p:txBody>
+        </p:sp>
+        <p:sp>
+          <p:nvSpPr>
+            <p:cNvPr id="52" name="テキスト ボックス 51">
+              <a:extLst>
+                <a:ext uri="{FF2B5EF4-FFF2-40B4-BE49-F238E27FC236}">
+                  <a16:creationId xmlns:a16="http://schemas.microsoft.com/office/drawing/2014/main" id="{C9F1C57D-0F6A-4819-8542-5E943476E831}"/>
+                </a:ext>
+              </a:extLst>
+            </p:cNvPr>
+            <p:cNvSpPr txBox="1"/>
+            <p:nvPr/>
+          </p:nvSpPr>
+          <p:spPr>
+            <a:xfrm>
+              <a:off x="3438753" y="3075083"/>
+              <a:ext cx="756355" cy="461665"/>
+            </a:xfrm>
+            <a:prstGeom prst="rect">
+              <a:avLst/>
+            </a:prstGeom>
+            <a:noFill/>
+          </p:spPr>
+          <p:txBody>
+            <a:bodyPr wrap="square" rtlCol="0">
+              <a:spAutoFit/>
+            </a:bodyPr>
+            <a:lstStyle/>
+            <a:p>
+              <a:r>
+                <a:rPr kumimoji="1" lang="ja-JP" altLang="en-US" sz="2400" dirty="0"/>
+                <a:t>■</a:t>
+              </a:r>
+            </a:p>
+          </p:txBody>
+        </p:sp>
+        <p:sp>
+          <p:nvSpPr>
+            <p:cNvPr id="53" name="テキスト ボックス 52">
+              <a:extLst>
+                <a:ext uri="{FF2B5EF4-FFF2-40B4-BE49-F238E27FC236}">
+                  <a16:creationId xmlns:a16="http://schemas.microsoft.com/office/drawing/2014/main" id="{58D682B9-FF1D-4F70-A335-26DF1D7559B3}"/>
+                </a:ext>
+              </a:extLst>
+            </p:cNvPr>
+            <p:cNvSpPr txBox="1"/>
+            <p:nvPr/>
+          </p:nvSpPr>
+          <p:spPr>
+            <a:xfrm>
+              <a:off x="3239912" y="3063457"/>
+              <a:ext cx="756355" cy="461665"/>
+            </a:xfrm>
+            <a:prstGeom prst="rect">
+              <a:avLst/>
+            </a:prstGeom>
+            <a:noFill/>
+          </p:spPr>
+          <p:txBody>
+            <a:bodyPr wrap="square" rtlCol="0">
+              <a:spAutoFit/>
+            </a:bodyPr>
+            <a:lstStyle/>
+            <a:p>
+              <a:r>
+                <a:rPr kumimoji="1" lang="ja-JP" altLang="en-US" sz="2400" dirty="0"/>
+                <a:t>■</a:t>
+              </a:r>
+            </a:p>
+          </p:txBody>
+        </p:sp>
+        <p:sp>
+          <p:nvSpPr>
+            <p:cNvPr id="54" name="テキスト ボックス 53">
+              <a:extLst>
+                <a:ext uri="{FF2B5EF4-FFF2-40B4-BE49-F238E27FC236}">
+                  <a16:creationId xmlns:a16="http://schemas.microsoft.com/office/drawing/2014/main" id="{A0F8A73B-3128-4B86-8EE3-110E8AD9D99C}"/>
+                </a:ext>
+              </a:extLst>
+            </p:cNvPr>
+            <p:cNvSpPr txBox="1"/>
+            <p:nvPr/>
+          </p:nvSpPr>
+          <p:spPr>
+            <a:xfrm>
+              <a:off x="3041071" y="3063457"/>
+              <a:ext cx="756355" cy="461665"/>
+            </a:xfrm>
+            <a:prstGeom prst="rect">
+              <a:avLst/>
+            </a:prstGeom>
+            <a:noFill/>
+          </p:spPr>
+          <p:txBody>
+            <a:bodyPr wrap="square" rtlCol="0">
+              <a:spAutoFit/>
+            </a:bodyPr>
+            <a:lstStyle/>
+            <a:p>
+              <a:r>
+                <a:rPr kumimoji="1" lang="ja-JP" altLang="en-US" sz="2400" dirty="0"/>
+                <a:t>■</a:t>
+              </a:r>
+            </a:p>
+          </p:txBody>
+        </p:sp>
+        <p:sp>
+          <p:nvSpPr>
+            <p:cNvPr id="55" name="テキスト ボックス 54">
+              <a:extLst>
+                <a:ext uri="{FF2B5EF4-FFF2-40B4-BE49-F238E27FC236}">
+                  <a16:creationId xmlns:a16="http://schemas.microsoft.com/office/drawing/2014/main" id="{CAF2AF67-F2F2-4A84-A956-0B35239532F2}"/>
+                </a:ext>
+              </a:extLst>
+            </p:cNvPr>
+            <p:cNvSpPr txBox="1"/>
+            <p:nvPr/>
+          </p:nvSpPr>
+          <p:spPr>
+            <a:xfrm>
+              <a:off x="1298482" y="3742432"/>
+              <a:ext cx="756355" cy="461665"/>
+            </a:xfrm>
+            <a:prstGeom prst="rect">
+              <a:avLst/>
+            </a:prstGeom>
+            <a:noFill/>
+          </p:spPr>
+          <p:txBody>
+            <a:bodyPr wrap="square" rtlCol="0">
+              <a:spAutoFit/>
+            </a:bodyPr>
+            <a:lstStyle/>
+            <a:p>
+              <a:r>
+                <a:rPr kumimoji="1" lang="ja-JP" altLang="en-US" sz="2400" dirty="0"/>
+                <a:t>■</a:t>
+              </a:r>
+            </a:p>
+          </p:txBody>
+        </p:sp>
+        <p:sp>
+          <p:nvSpPr>
+            <p:cNvPr id="56" name="テキスト ボックス 55">
+              <a:extLst>
+                <a:ext uri="{FF2B5EF4-FFF2-40B4-BE49-F238E27FC236}">
+                  <a16:creationId xmlns:a16="http://schemas.microsoft.com/office/drawing/2014/main" id="{64207152-BA39-4CCB-AA80-6AF118AB5C31}"/>
+                </a:ext>
+              </a:extLst>
+            </p:cNvPr>
+            <p:cNvSpPr txBox="1"/>
+            <p:nvPr/>
+          </p:nvSpPr>
+          <p:spPr>
+            <a:xfrm>
+              <a:off x="1298481" y="3912606"/>
+              <a:ext cx="756355" cy="461665"/>
+            </a:xfrm>
+            <a:prstGeom prst="rect">
+              <a:avLst/>
+            </a:prstGeom>
+            <a:noFill/>
+          </p:spPr>
+          <p:txBody>
+            <a:bodyPr wrap="square" rtlCol="0">
+              <a:spAutoFit/>
+            </a:bodyPr>
+            <a:lstStyle/>
+            <a:p>
+              <a:r>
+                <a:rPr kumimoji="1" lang="ja-JP" altLang="en-US" sz="2400" dirty="0"/>
+                <a:t>■</a:t>
+              </a:r>
+            </a:p>
+          </p:txBody>
+        </p:sp>
+        <p:sp>
+          <p:nvSpPr>
+            <p:cNvPr id="57" name="テキスト ボックス 56">
+              <a:extLst>
+                <a:ext uri="{FF2B5EF4-FFF2-40B4-BE49-F238E27FC236}">
+                  <a16:creationId xmlns:a16="http://schemas.microsoft.com/office/drawing/2014/main" id="{EDDFA1BD-FE36-4828-B443-F9FCD86E9E18}"/>
+                </a:ext>
+              </a:extLst>
+            </p:cNvPr>
+            <p:cNvSpPr txBox="1"/>
+            <p:nvPr/>
+          </p:nvSpPr>
+          <p:spPr>
+            <a:xfrm>
+              <a:off x="1298480" y="4082780"/>
+              <a:ext cx="756355" cy="461665"/>
+            </a:xfrm>
+            <a:prstGeom prst="rect">
+              <a:avLst/>
+            </a:prstGeom>
+            <a:noFill/>
+          </p:spPr>
+          <p:txBody>
+            <a:bodyPr wrap="square" rtlCol="0">
+              <a:spAutoFit/>
+            </a:bodyPr>
+            <a:lstStyle/>
+            <a:p>
+              <a:r>
+                <a:rPr kumimoji="1" lang="ja-JP" altLang="en-US" sz="2400" dirty="0"/>
+                <a:t>■</a:t>
+              </a:r>
+            </a:p>
+          </p:txBody>
+        </p:sp>
+        <p:sp>
+          <p:nvSpPr>
+            <p:cNvPr id="58" name="テキスト ボックス 57">
+              <a:extLst>
+                <a:ext uri="{FF2B5EF4-FFF2-40B4-BE49-F238E27FC236}">
+                  <a16:creationId xmlns:a16="http://schemas.microsoft.com/office/drawing/2014/main" id="{592FACA4-ABA8-426F-9F0E-0B86760682DA}"/>
+                </a:ext>
+              </a:extLst>
+            </p:cNvPr>
+            <p:cNvSpPr txBox="1"/>
+            <p:nvPr/>
+          </p:nvSpPr>
+          <p:spPr>
+            <a:xfrm>
+              <a:off x="1298479" y="4252954"/>
+              <a:ext cx="756355" cy="461665"/>
+            </a:xfrm>
+            <a:prstGeom prst="rect">
+              <a:avLst/>
+            </a:prstGeom>
+            <a:noFill/>
+          </p:spPr>
+          <p:txBody>
+            <a:bodyPr wrap="square" rtlCol="0">
+              <a:spAutoFit/>
+            </a:bodyPr>
+            <a:lstStyle/>
+            <a:p>
+              <a:r>
+                <a:rPr kumimoji="1" lang="ja-JP" altLang="en-US" sz="2400" dirty="0"/>
+                <a:t>■</a:t>
+              </a:r>
+            </a:p>
+          </p:txBody>
+        </p:sp>
+        <p:sp>
+          <p:nvSpPr>
+            <p:cNvPr id="59" name="テキスト ボックス 58">
+              <a:extLst>
+                <a:ext uri="{FF2B5EF4-FFF2-40B4-BE49-F238E27FC236}">
+                  <a16:creationId xmlns:a16="http://schemas.microsoft.com/office/drawing/2014/main" id="{A89A4178-C78C-4849-AE95-01AF9D556477}"/>
+                </a:ext>
+              </a:extLst>
+            </p:cNvPr>
+            <p:cNvSpPr txBox="1"/>
+            <p:nvPr/>
+          </p:nvSpPr>
+          <p:spPr>
+            <a:xfrm>
+              <a:off x="1347678" y="5191109"/>
+              <a:ext cx="756355" cy="461665"/>
+            </a:xfrm>
+            <a:prstGeom prst="rect">
+              <a:avLst/>
+            </a:prstGeom>
+            <a:noFill/>
+          </p:spPr>
+          <p:txBody>
+            <a:bodyPr wrap="square" rtlCol="0">
+              <a:spAutoFit/>
+            </a:bodyPr>
+            <a:lstStyle/>
+            <a:p>
+              <a:r>
+                <a:rPr kumimoji="1" lang="ja-JP" altLang="en-US" sz="2400" dirty="0"/>
+                <a:t>■</a:t>
+              </a:r>
+            </a:p>
+          </p:txBody>
+        </p:sp>
+        <p:sp>
+          <p:nvSpPr>
+            <p:cNvPr id="60" name="テキスト ボックス 59">
+              <a:extLst>
+                <a:ext uri="{FF2B5EF4-FFF2-40B4-BE49-F238E27FC236}">
+                  <a16:creationId xmlns:a16="http://schemas.microsoft.com/office/drawing/2014/main" id="{9D80E32A-935D-422D-A8F5-4380F562DFBA}"/>
+                </a:ext>
+              </a:extLst>
+            </p:cNvPr>
+            <p:cNvSpPr txBox="1"/>
+            <p:nvPr/>
+          </p:nvSpPr>
+          <p:spPr>
+            <a:xfrm rot="16200000">
+              <a:off x="3214009" y="3278686"/>
+              <a:ext cx="489729" cy="338554"/>
+            </a:xfrm>
+            <a:prstGeom prst="rect">
+              <a:avLst/>
+            </a:prstGeom>
+            <a:noFill/>
+          </p:spPr>
+          <p:txBody>
+            <a:bodyPr wrap="square" rtlCol="0">
+              <a:spAutoFit/>
+            </a:bodyPr>
+            <a:lstStyle/>
+            <a:p>
+              <a:r>
+                <a:rPr kumimoji="1" lang="ja-JP" altLang="en-US" sz="1600" dirty="0">
+                  <a:solidFill>
+                    <a:schemeClr val="accent2"/>
+                  </a:solidFill>
+                </a:rPr>
+                <a:t>▲</a:t>
+              </a:r>
+            </a:p>
+          </p:txBody>
+        </p:sp>
+      </p:grpSp>
+      <p:grpSp>
+        <p:nvGrpSpPr>
+          <p:cNvPr id="61" name="グループ化 60">
+            <a:extLst>
+              <a:ext uri="{FF2B5EF4-FFF2-40B4-BE49-F238E27FC236}">
+                <a16:creationId xmlns:a16="http://schemas.microsoft.com/office/drawing/2014/main" id="{7E9C1F02-57D9-4D7B-AF99-4AA6D60208B8}"/>
+              </a:ext>
+            </a:extLst>
+          </p:cNvPr>
+          <p:cNvGrpSpPr/>
+          <p:nvPr/>
+        </p:nvGrpSpPr>
+        <p:grpSpPr>
+          <a:xfrm>
+            <a:off x="7521854" y="5036006"/>
+            <a:ext cx="975146" cy="533401"/>
+            <a:chOff x="2178754" y="4999037"/>
+            <a:chExt cx="1151467" cy="533401"/>
+          </a:xfrm>
+        </p:grpSpPr>
+        <p:sp>
+          <p:nvSpPr>
+            <p:cNvPr id="62" name="テキスト ボックス 61">
+              <a:extLst>
+                <a:ext uri="{FF2B5EF4-FFF2-40B4-BE49-F238E27FC236}">
+                  <a16:creationId xmlns:a16="http://schemas.microsoft.com/office/drawing/2014/main" id="{A703D11C-6930-473B-8745-18919DE7F065}"/>
+                </a:ext>
+              </a:extLst>
+            </p:cNvPr>
+            <p:cNvSpPr txBox="1"/>
+            <p:nvPr/>
+          </p:nvSpPr>
+          <p:spPr>
+            <a:xfrm>
+              <a:off x="2427111" y="5163106"/>
+              <a:ext cx="654755" cy="369332"/>
+            </a:xfrm>
+            <a:prstGeom prst="rect">
+              <a:avLst/>
+            </a:prstGeom>
+            <a:noFill/>
+          </p:spPr>
+          <p:txBody>
+            <a:bodyPr wrap="square" rtlCol="0">
+              <a:spAutoFit/>
+            </a:bodyPr>
+            <a:lstStyle/>
+            <a:p>
+              <a:r>
+                <a:rPr kumimoji="1" lang="ja-JP" altLang="en-US" dirty="0">
+                  <a:solidFill>
+                    <a:srgbClr val="FF0000"/>
+                  </a:solidFill>
+                </a:rPr>
+                <a:t>●</a:t>
+              </a:r>
+            </a:p>
+          </p:txBody>
+        </p:sp>
+        <p:sp>
+          <p:nvSpPr>
+            <p:cNvPr id="63" name="テキスト ボックス 62">
+              <a:extLst>
+                <a:ext uri="{FF2B5EF4-FFF2-40B4-BE49-F238E27FC236}">
+                  <a16:creationId xmlns:a16="http://schemas.microsoft.com/office/drawing/2014/main" id="{E96500E1-A530-40E6-899E-8445885F6295}"/>
+                </a:ext>
+              </a:extLst>
+            </p:cNvPr>
+            <p:cNvSpPr txBox="1"/>
+            <p:nvPr/>
+          </p:nvSpPr>
+          <p:spPr>
+            <a:xfrm>
+              <a:off x="2178754" y="4999037"/>
+              <a:ext cx="1151467" cy="276999"/>
+            </a:xfrm>
+            <a:prstGeom prst="rect">
+              <a:avLst/>
+            </a:prstGeom>
+            <a:noFill/>
+          </p:spPr>
+          <p:txBody>
+            <a:bodyPr wrap="square" rtlCol="0">
+              <a:spAutoFit/>
+            </a:bodyPr>
+            <a:lstStyle/>
+            <a:p>
+              <a:r>
+                <a:rPr kumimoji="1" lang="ja-JP" altLang="en-US" sz="1200" dirty="0"/>
+                <a:t>プレイヤー</a:t>
+              </a:r>
+            </a:p>
+          </p:txBody>
+        </p:sp>
+      </p:grpSp>
+      <p:sp>
+        <p:nvSpPr>
+          <p:cNvPr id="3" name="テキスト ボックス 2">
+            <a:extLst>
+              <a:ext uri="{FF2B5EF4-FFF2-40B4-BE49-F238E27FC236}">
+                <a16:creationId xmlns:a16="http://schemas.microsoft.com/office/drawing/2014/main" id="{28A906CC-1D44-4178-ABCE-60561966E9B9}"/>
+              </a:ext>
+            </a:extLst>
+          </p:cNvPr>
+          <p:cNvSpPr txBox="1"/>
+          <p:nvPr/>
+        </p:nvSpPr>
+        <p:spPr>
+          <a:xfrm>
+            <a:off x="8497000" y="4884244"/>
+            <a:ext cx="695032" cy="307777"/>
+          </a:xfrm>
+          <a:prstGeom prst="rect">
+            <a:avLst/>
+          </a:prstGeom>
+          <a:noFill/>
+        </p:spPr>
+        <p:txBody>
+          <a:bodyPr wrap="square" rtlCol="0">
+            <a:spAutoFit/>
+          </a:bodyPr>
+          <a:lstStyle/>
+          <a:p>
+            <a:r>
+              <a:rPr kumimoji="1" lang="ja-JP" altLang="en-US" sz="1400" dirty="0"/>
+              <a:t>鍵</a:t>
+            </a:r>
+          </a:p>
+        </p:txBody>
+      </p:sp>
+    </p:spTree>
+    <p:extLst>
+      <p:ext uri="{BB962C8B-B14F-4D97-AF65-F5344CB8AC3E}">
+        <p14:creationId xmlns:p14="http://schemas.microsoft.com/office/powerpoint/2010/main" val="1571934050"/>
+      </p:ext>
+    </p:extLst>
+  </p:cSld>
+  <p:clrMapOvr>
+    <a:masterClrMapping/>
+  </p:clrMapOvr>
+</p:sld>
+</file>
+
+<file path=ppt/slides/slide4.xml><?xml version="1.0" encoding="utf-8"?>
+<p:sld xmlns:a="http://schemas.openxmlformats.org/drawingml/2006/main" xmlns:r="http://schemas.openxmlformats.org/officeDocument/2006/relationships" xmlns:p="http://schemas.openxmlformats.org/presentationml/2006/main">
+  <p:cSld>
+    <p:spTree>
+      <p:nvGrpSpPr>
+        <p:cNvPr id="1" name=""/>
+        <p:cNvGrpSpPr/>
+        <p:nvPr/>
+      </p:nvGrpSpPr>
+      <p:grpSpPr>
+        <a:xfrm>
+          <a:off x="0" y="0"/>
+          <a:ext cx="0" cy="0"/>
+          <a:chOff x="0" y="0"/>
+          <a:chExt cx="0" cy="0"/>
+        </a:xfrm>
+      </p:grpSpPr>
+      <p:sp>
+        <p:nvSpPr>
+          <p:cNvPr id="4" name="テキスト ボックス 3">
+            <a:extLst>
+              <a:ext uri="{FF2B5EF4-FFF2-40B4-BE49-F238E27FC236}">
+                <a16:creationId xmlns:a16="http://schemas.microsoft.com/office/drawing/2014/main" id="{5CEAB112-62EC-4CB0-82ED-C2D8E4E8A7C0}"/>
+              </a:ext>
+            </a:extLst>
+          </p:cNvPr>
+          <p:cNvSpPr txBox="1"/>
+          <p:nvPr/>
+        </p:nvSpPr>
+        <p:spPr>
+          <a:xfrm>
+            <a:off x="0" y="335411"/>
+            <a:ext cx="12192000" cy="2677656"/>
+          </a:xfrm>
+          <a:prstGeom prst="rect">
+            <a:avLst/>
+          </a:prstGeom>
+          <a:noFill/>
+        </p:spPr>
+        <p:txBody>
+          <a:bodyPr wrap="square" rtlCol="0">
+            <a:spAutoFit/>
+          </a:bodyPr>
+          <a:lstStyle/>
+          <a:p>
+            <a:r>
+              <a:rPr kumimoji="1" lang="ja-JP" altLang="en-US" sz="4000" u="sng" dirty="0">
+                <a:solidFill>
+                  <a:srgbClr val="00B0F0"/>
+                </a:solidFill>
+                <a:effectLst>
+                  <a:outerShdw blurRad="38100" dist="38100" dir="2700000" algn="tl">
+                    <a:srgbClr val="000000">
+                      <a:alpha val="43137"/>
+                    </a:srgbClr>
+                  </a:outerShdw>
+                </a:effectLst>
+              </a:rPr>
+              <a:t>ステージのループ</a:t>
+            </a:r>
+            <a:endParaRPr kumimoji="1" lang="en-US" altLang="ja-JP" sz="4000" u="sng" dirty="0">
+              <a:solidFill>
+                <a:srgbClr val="00B0F0"/>
+              </a:solidFill>
+              <a:effectLst>
+                <a:outerShdw blurRad="38100" dist="38100" dir="2700000" algn="tl">
+                  <a:srgbClr val="000000">
+                    <a:alpha val="43137"/>
+                  </a:srgbClr>
+                </a:outerShdw>
+              </a:effectLst>
+            </a:endParaRPr>
+          </a:p>
+          <a:p>
+            <a:r>
+              <a:rPr kumimoji="1" lang="ja-JP" altLang="en-US" sz="3200" dirty="0"/>
+              <a:t>・</a:t>
+            </a:r>
+            <a:r>
+              <a:rPr kumimoji="1" lang="ja-JP" altLang="en-US" sz="3200" dirty="0">
+                <a:solidFill>
+                  <a:srgbClr val="00B0F0"/>
+                </a:solidFill>
+              </a:rPr>
+              <a:t>条件</a:t>
+            </a:r>
+            <a:r>
+              <a:rPr kumimoji="1" lang="en-US" altLang="ja-JP" sz="3200" dirty="0">
+                <a:solidFill>
+                  <a:srgbClr val="00B0F0"/>
+                </a:solidFill>
+              </a:rPr>
+              <a:t>(</a:t>
+            </a:r>
+            <a:r>
+              <a:rPr kumimoji="1" lang="ja-JP" altLang="en-US" sz="3200" dirty="0">
+                <a:solidFill>
+                  <a:srgbClr val="00B0F0"/>
+                </a:solidFill>
+              </a:rPr>
+              <a:t>鍵を拾う等</a:t>
+            </a:r>
+            <a:r>
+              <a:rPr kumimoji="1" lang="en-US" altLang="ja-JP" sz="3200" dirty="0">
+                <a:solidFill>
+                  <a:srgbClr val="00B0F0"/>
+                </a:solidFill>
+              </a:rPr>
+              <a:t>)</a:t>
+            </a:r>
+            <a:r>
+              <a:rPr kumimoji="1" lang="ja-JP" altLang="en-US" sz="3200" dirty="0">
+                <a:solidFill>
+                  <a:srgbClr val="00B0F0"/>
+                </a:solidFill>
+              </a:rPr>
+              <a:t>を達成するまで</a:t>
+            </a:r>
+            <a:r>
+              <a:rPr kumimoji="1" lang="ja-JP" altLang="en-US" sz="3200" dirty="0"/>
+              <a:t>同じ場所を</a:t>
+            </a:r>
+            <a:r>
+              <a:rPr kumimoji="1" lang="ja-JP" altLang="en-US" sz="3200" dirty="0">
+                <a:solidFill>
+                  <a:srgbClr val="00B0F0"/>
+                </a:solidFill>
+              </a:rPr>
+              <a:t>ループ</a:t>
+            </a:r>
+            <a:r>
+              <a:rPr kumimoji="1" lang="ja-JP" altLang="en-US" sz="3200" dirty="0"/>
+              <a:t>することがある</a:t>
+            </a:r>
+            <a:endParaRPr kumimoji="1" lang="en-US" altLang="ja-JP" sz="3200" dirty="0"/>
+          </a:p>
+          <a:p>
+            <a:r>
+              <a:rPr lang="ja-JP" altLang="en-US" sz="3200" dirty="0"/>
+              <a:t>・鍵が難しい場所に置いてあったりするので何度かループして取り方を見つけよう</a:t>
+            </a:r>
+            <a:endParaRPr lang="en-US" altLang="ja-JP" sz="3200" dirty="0"/>
+          </a:p>
+        </p:txBody>
+      </p:sp>
+      <p:sp>
+        <p:nvSpPr>
+          <p:cNvPr id="3" name="テキスト ボックス 2">
+            <a:extLst>
+              <a:ext uri="{FF2B5EF4-FFF2-40B4-BE49-F238E27FC236}">
+                <a16:creationId xmlns:a16="http://schemas.microsoft.com/office/drawing/2014/main" id="{F2A0A716-8128-4912-9F58-98293B8B1888}"/>
+              </a:ext>
+            </a:extLst>
+          </p:cNvPr>
+          <p:cNvSpPr txBox="1"/>
+          <p:nvPr/>
+        </p:nvSpPr>
+        <p:spPr>
+          <a:xfrm>
+            <a:off x="0" y="3887267"/>
+            <a:ext cx="12192000" cy="1877437"/>
+          </a:xfrm>
+          <a:prstGeom prst="rect">
+            <a:avLst/>
+          </a:prstGeom>
+          <a:noFill/>
+        </p:spPr>
+        <p:txBody>
+          <a:bodyPr wrap="square" rtlCol="0">
+            <a:spAutoFit/>
+          </a:bodyPr>
+          <a:lstStyle/>
+          <a:p>
+            <a:r>
+              <a:rPr lang="ja-JP" altLang="en-US" sz="4400" dirty="0"/>
+              <a:t>ゲームクリア条件</a:t>
+            </a:r>
+            <a:endParaRPr lang="en-US" altLang="ja-JP" sz="4400" dirty="0"/>
+          </a:p>
+          <a:p>
+            <a:r>
+              <a:rPr lang="ja-JP" altLang="en-US" sz="3600" dirty="0"/>
+              <a:t>・ステージを進んでいくとゴールが出てくる</a:t>
+            </a:r>
+            <a:endParaRPr lang="en-US" altLang="ja-JP" sz="3600" dirty="0"/>
+          </a:p>
+          <a:p>
+            <a:r>
+              <a:rPr lang="ja-JP" altLang="en-US" sz="3600" dirty="0"/>
+              <a:t>・条件を満たした状態でゴールに触れるとクリアになる</a:t>
+            </a:r>
+            <a:endParaRPr lang="en-US" altLang="ja-JP" sz="3600" dirty="0"/>
+          </a:p>
+        </p:txBody>
+      </p:sp>
+    </p:spTree>
+    <p:extLst>
+      <p:ext uri="{BB962C8B-B14F-4D97-AF65-F5344CB8AC3E}">
+        <p14:creationId xmlns:p14="http://schemas.microsoft.com/office/powerpoint/2010/main" val="504236052"/>
+      </p:ext>
+    </p:extLst>
+  </p:cSld>
+  <p:clrMapOvr>
+    <a:masterClrMapping/>
+  </p:clrMapOvr>
+</p:sld>
+</file>
+
+<file path=ppt/slides/slide5.xml><?xml version="1.0" encoding="utf-8"?>
+<p:sld xmlns:a="http://schemas.openxmlformats.org/drawingml/2006/main" xmlns:r="http://schemas.openxmlformats.org/officeDocument/2006/relationships" xmlns:p="http://schemas.openxmlformats.org/presentationml/2006/main">
+  <p:cSld>
+    <p:spTree>
+      <p:nvGrpSpPr>
+        <p:cNvPr id="1" name=""/>
+        <p:cNvGrpSpPr/>
+        <p:nvPr/>
+      </p:nvGrpSpPr>
+      <p:grpSpPr>
+        <a:xfrm>
+          <a:off x="0" y="0"/>
+          <a:ext cx="0" cy="0"/>
+          <a:chOff x="0" y="0"/>
+          <a:chExt cx="0" cy="0"/>
+        </a:xfrm>
+      </p:grpSpPr>
+      <p:sp>
+        <p:nvSpPr>
+          <p:cNvPr id="3" name="テキスト ボックス 2">
+            <a:extLst>
+              <a:ext uri="{FF2B5EF4-FFF2-40B4-BE49-F238E27FC236}">
+                <a16:creationId xmlns:a16="http://schemas.microsoft.com/office/drawing/2014/main" id="{F2A0A716-8128-4912-9F58-98293B8B1888}"/>
+              </a:ext>
+            </a:extLst>
+          </p:cNvPr>
+          <p:cNvSpPr txBox="1"/>
+          <p:nvPr/>
+        </p:nvSpPr>
+        <p:spPr>
+          <a:xfrm>
+            <a:off x="237067" y="457200"/>
+            <a:ext cx="12192000" cy="2554545"/>
+          </a:xfrm>
+          <a:prstGeom prst="rect">
+            <a:avLst/>
+          </a:prstGeom>
+          <a:noFill/>
+        </p:spPr>
+        <p:txBody>
+          <a:bodyPr wrap="square" rtlCol="0">
+            <a:spAutoFit/>
+          </a:bodyPr>
+          <a:lstStyle/>
+          <a:p>
+            <a:r>
+              <a:rPr kumimoji="1" lang="ja-JP" altLang="en-US" sz="4000" u="sng" dirty="0">
+                <a:solidFill>
+                  <a:srgbClr val="7030A0"/>
+                </a:solidFill>
+                <a:effectLst>
+                  <a:outerShdw blurRad="38100" dist="38100" dir="2700000" algn="tl">
+                    <a:srgbClr val="000000">
+                      <a:alpha val="43137"/>
+                    </a:srgbClr>
+                  </a:outerShdw>
+                </a:effectLst>
+              </a:rPr>
+              <a:t>プレイヤーの基本操作</a:t>
+            </a:r>
+            <a:endParaRPr kumimoji="1" lang="en-US" altLang="ja-JP" sz="4000" u="sng" dirty="0">
+              <a:solidFill>
+                <a:srgbClr val="7030A0"/>
+              </a:solidFill>
+              <a:effectLst>
+                <a:outerShdw blurRad="38100" dist="38100" dir="2700000" algn="tl">
+                  <a:srgbClr val="000000">
+                    <a:alpha val="43137"/>
+                  </a:srgbClr>
+                </a:outerShdw>
+              </a:effectLst>
+            </a:endParaRPr>
+          </a:p>
+          <a:p>
+            <a:r>
+              <a:rPr lang="ja-JP" altLang="en-US" sz="4000" dirty="0"/>
+              <a:t>・左右移動</a:t>
+            </a:r>
+            <a:endParaRPr lang="en-US" altLang="ja-JP" sz="4000" dirty="0"/>
+          </a:p>
+          <a:p>
+            <a:r>
+              <a:rPr lang="ja-JP" altLang="en-US" sz="4000" dirty="0"/>
+              <a:t>・ジャンプ</a:t>
+            </a:r>
+            <a:endParaRPr lang="en-US" altLang="ja-JP" sz="4000" dirty="0"/>
+          </a:p>
+          <a:p>
+            <a:r>
+              <a:rPr lang="ja-JP" altLang="en-US" sz="4000" dirty="0"/>
+              <a:t>・ステージの回転</a:t>
+            </a:r>
+            <a:endParaRPr kumimoji="1" lang="en-US" altLang="ja-JP" sz="4000" dirty="0"/>
+          </a:p>
+        </p:txBody>
+      </p:sp>
+    </p:spTree>
+    <p:extLst>
+      <p:ext uri="{BB962C8B-B14F-4D97-AF65-F5344CB8AC3E}">
+        <p14:creationId xmlns:p14="http://schemas.microsoft.com/office/powerpoint/2010/main" val="62039668"/>
       </p:ext>
     </p:extLst>
   </p:cSld>
@@ -3915,4 +8257,258 @@
     </a:ext>
   </a:extLst>
 </a:theme>
+</file>
+
+<file path=customXml/item1.xml><?xml version="1.0" encoding="utf-8"?>
+<ct:contentTypeSchema xmlns:ct="http://schemas.microsoft.com/office/2006/metadata/contentType" xmlns:ma="http://schemas.microsoft.com/office/2006/metadata/properties/metaAttributes" ct:_="" ma:_="" ma:contentTypeName="ドキュメント" ma:contentTypeID="0x0101002026A135D57E07499F799CB5DF7F838E" ma:contentTypeVersion="11" ma:contentTypeDescription="新しいドキュメントを作成します。" ma:contentTypeScope="" ma:versionID="424dab3e7916046a84507a87f68ae831">
+  <xsd:schema xmlns:xsd="http://www.w3.org/2001/XMLSchema" xmlns:xs="http://www.w3.org/2001/XMLSchema" xmlns:p="http://schemas.microsoft.com/office/2006/metadata/properties" xmlns:ns2="136bbc15-a01e-4b72-8bb9-2f301d916c38" xmlns:ns3="26553de7-2a3a-444c-a024-df4cb947fd03" targetNamespace="http://schemas.microsoft.com/office/2006/metadata/properties" ma:root="true" ma:fieldsID="d87f2205ac6cff16e9ef23c0a3d04e7b" ns2:_="" ns3:_="">
+    <xsd:import namespace="136bbc15-a01e-4b72-8bb9-2f301d916c38"/>
+    <xsd:import namespace="26553de7-2a3a-444c-a024-df4cb947fd03"/>
+    <xsd:element name="properties">
+      <xsd:complexType>
+        <xsd:sequence>
+          <xsd:element name="documentManagement">
+            <xsd:complexType>
+              <xsd:all>
+                <xsd:element ref="ns2:ReferenceId" minOccurs="0"/>
+                <xsd:element ref="ns2:MediaServiceMetadata" minOccurs="0"/>
+                <xsd:element ref="ns2:MediaServiceFastMetadata" minOccurs="0"/>
+                <xsd:element ref="ns2:MediaServiceSearchProperties" minOccurs="0"/>
+                <xsd:element ref="ns2:MediaServiceDateTaken" minOccurs="0"/>
+                <xsd:element ref="ns2:MediaServiceGenerationTime" minOccurs="0"/>
+                <xsd:element ref="ns2:MediaServiceEventHashCode" minOccurs="0"/>
+                <xsd:element ref="ns2:lcf76f155ced4ddcb4097134ff3c332f" minOccurs="0"/>
+                <xsd:element ref="ns3:TaxCatchAll" minOccurs="0"/>
+                <xsd:element ref="ns2:MediaServiceOCR" minOccurs="0"/>
+              </xsd:all>
+            </xsd:complexType>
+          </xsd:element>
+        </xsd:sequence>
+      </xsd:complexType>
+    </xsd:element>
+  </xsd:schema>
+  <xsd:schema xmlns:xsd="http://www.w3.org/2001/XMLSchema" xmlns:xs="http://www.w3.org/2001/XMLSchema" xmlns:dms="http://schemas.microsoft.com/office/2006/documentManagement/types" xmlns:pc="http://schemas.microsoft.com/office/infopath/2007/PartnerControls" targetNamespace="136bbc15-a01e-4b72-8bb9-2f301d916c38" elementFormDefault="qualified">
+    <xsd:import namespace="http://schemas.microsoft.com/office/2006/documentManagement/types"/>
+    <xsd:import namespace="http://schemas.microsoft.com/office/infopath/2007/PartnerControls"/>
+    <xsd:element name="ReferenceId" ma:index="8" nillable="true" ma:displayName="ReferenceId" ma:indexed="true" ma:internalName="ReferenceId">
+      <xsd:simpleType>
+        <xsd:restriction base="dms:Text"/>
+      </xsd:simpleType>
+    </xsd:element>
+    <xsd:element name="MediaServiceMetadata" ma:index="9" nillable="true" ma:displayName="MediaServiceMetadata" ma:hidden="true" ma:internalName="MediaServiceMetadata" ma:readOnly="true">
+      <xsd:simpleType>
+        <xsd:restriction base="dms:Note"/>
+      </xsd:simpleType>
+    </xsd:element>
+    <xsd:element name="MediaServiceFastMetadata" ma:index="10" nillable="true" ma:displayName="MediaServiceFastMetadata" ma:hidden="true" ma:internalName="MediaServiceFastMetadata" ma:readOnly="true">
+      <xsd:simpleType>
+        <xsd:restriction base="dms:Note"/>
+      </xsd:simpleType>
+    </xsd:element>
+    <xsd:element name="MediaServiceSearchProperties" ma:index="11" nillable="true" ma:displayName="MediaServiceSearchProperties" ma:hidden="true" ma:internalName="MediaServiceSearchProperties" ma:readOnly="true">
+      <xsd:simpleType>
+        <xsd:restriction base="dms:Note"/>
+      </xsd:simpleType>
+    </xsd:element>
+    <xsd:element name="MediaServiceDateTaken" ma:index="12" nillable="true" ma:displayName="MediaServiceDateTaken" ma:hidden="true" ma:indexed="true" ma:internalName="MediaServiceDateTaken" ma:readOnly="true">
+      <xsd:simpleType>
+        <xsd:restriction base="dms:Text"/>
+      </xsd:simpleType>
+    </xsd:element>
+    <xsd:element name="MediaServiceGenerationTime" ma:index="13" nillable="true" ma:displayName="MediaServiceGenerationTime" ma:hidden="true" ma:internalName="MediaServiceGenerationTime" ma:readOnly="true">
+      <xsd:simpleType>
+        <xsd:restriction base="dms:Text"/>
+      </xsd:simpleType>
+    </xsd:element>
+    <xsd:element name="MediaServiceEventHashCode" ma:index="14" nillable="true" ma:displayName="MediaServiceEventHashCode" ma:hidden="true" ma:internalName="MediaServiceEventHashCode" ma:readOnly="true">
+      <xsd:simpleType>
+        <xsd:restriction base="dms:Text"/>
+      </xsd:simpleType>
+    </xsd:element>
+    <xsd:element name="lcf76f155ced4ddcb4097134ff3c332f" ma:index="16" nillable="true" ma:taxonomy="true" ma:internalName="lcf76f155ced4ddcb4097134ff3c332f" ma:taxonomyFieldName="MediaServiceImageTags" ma:displayName="画像タグ" ma:readOnly="false" ma:fieldId="{5cf76f15-5ced-4ddc-b409-7134ff3c332f}" ma:taxonomyMulti="true" ma:sspId="c7b788f1-635f-435b-a825-11a9aec0b64e" ma:termSetId="09814cd3-568e-fe90-9814-8d621ff8fb84" ma:anchorId="fba54fb3-c3e1-fe81-a776-ca4b69148c4d" ma:open="true" ma:isKeyword="false">
+      <xsd:complexType>
+        <xsd:sequence>
+          <xsd:element ref="pc:Terms" minOccurs="0" maxOccurs="1"/>
+        </xsd:sequence>
+      </xsd:complexType>
+    </xsd:element>
+    <xsd:element name="MediaServiceOCR" ma:index="18" nillable="true" ma:displayName="Extracted Text" ma:internalName="MediaServiceOCR" ma:readOnly="true">
+      <xsd:simpleType>
+        <xsd:restriction base="dms:Note">
+          <xsd:maxLength value="255"/>
+        </xsd:restriction>
+      </xsd:simpleType>
+    </xsd:element>
+  </xsd:schema>
+  <xsd:schema xmlns:xsd="http://www.w3.org/2001/XMLSchema" xmlns:xs="http://www.w3.org/2001/XMLSchema" xmlns:dms="http://schemas.microsoft.com/office/2006/documentManagement/types" xmlns:pc="http://schemas.microsoft.com/office/infopath/2007/PartnerControls" targetNamespace="26553de7-2a3a-444c-a024-df4cb947fd03" elementFormDefault="qualified">
+    <xsd:import namespace="http://schemas.microsoft.com/office/2006/documentManagement/types"/>
+    <xsd:import namespace="http://schemas.microsoft.com/office/infopath/2007/PartnerControls"/>
+    <xsd:element name="TaxCatchAll" ma:index="17" nillable="true" ma:displayName="Taxonomy Catch All Column" ma:hidden="true" ma:list="{0001ad64-140f-4029-930f-4ba1abb62398}" ma:internalName="TaxCatchAll" ma:showField="CatchAllData" ma:web="26553de7-2a3a-444c-a024-df4cb947fd03">
+      <xsd:complexType>
+        <xsd:complexContent>
+          <xsd:extension base="dms:MultiChoiceLookup">
+            <xsd:sequence>
+              <xsd:element name="Value" type="dms:Lookup" maxOccurs="unbounded" minOccurs="0" nillable="true"/>
+            </xsd:sequence>
+          </xsd:extension>
+        </xsd:complexContent>
+      </xsd:complexType>
+    </xsd:element>
+  </xsd:schema>
+  <xsd:schema xmlns="http://schemas.openxmlformats.org/package/2006/metadata/core-properties" xmlns:xsd="http://www.w3.org/2001/XMLSchema" xmlns:xsi="http://www.w3.org/2001/XMLSchema-instance" xmlns:dc="http://purl.org/dc/elements/1.1/" xmlns:dcterms="http://purl.org/dc/terms/" xmlns:odoc="http://schemas.microsoft.com/internal/obd" targetNamespace="http://schemas.openxmlformats.org/package/2006/metadata/core-properties" elementFormDefault="qualified" attributeFormDefault="unqualified" blockDefault="#all">
+    <xsd:import namespace="http://purl.org/dc/elements/1.1/" schemaLocation="http://dublincore.org/schemas/xmls/qdc/2003/04/02/dc.xsd"/>
+    <xsd:import namespace="http://purl.org/dc/terms/" schemaLocation="http://dublincore.org/schemas/xmls/qdc/2003/04/02/dcterms.xsd"/>
+    <xsd:element name="coreProperties" type="CT_coreProperties"/>
+    <xsd:complexType name="CT_coreProperties">
+      <xsd:all>
+        <xsd:element ref="dc:creator" minOccurs="0" maxOccurs="1"/>
+        <xsd:element ref="dcterms:created" minOccurs="0" maxOccurs="1"/>
+        <xsd:element ref="dc:identifier" minOccurs="0" maxOccurs="1"/>
+        <xsd:element name="contentType" minOccurs="0" maxOccurs="1" type="xsd:string" ma:index="0" ma:displayName="コンテンツ タイプ"/>
+        <xsd:element ref="dc:title" minOccurs="0" maxOccurs="1" ma:index="4" ma:displayName="タイトル"/>
+        <xsd:element ref="dc:subject" minOccurs="0" maxOccurs="1"/>
+        <xsd:element ref="dc:description" minOccurs="0" maxOccurs="1"/>
+        <xsd:element name="keywords" minOccurs="0" maxOccurs="1" type="xsd:string"/>
+        <xsd:element ref="dc:language" minOccurs="0" maxOccurs="1"/>
+        <xsd:element name="category" minOccurs="0" maxOccurs="1" type="xsd:string"/>
+        <xsd:element name="version" minOccurs="0" maxOccurs="1" type="xsd:string"/>
+        <xsd:element name="revision" minOccurs="0" maxOccurs="1" type="xsd:string">
+          <xsd:annotation>
+            <xsd:documentation>
+                        This value indicates the number of saves or revisions. The application is responsible for updating this value after each revision.
+                    </xsd:documentation>
+          </xsd:annotation>
+        </xsd:element>
+        <xsd:element name="lastModifiedBy" minOccurs="0" maxOccurs="1" type="xsd:string"/>
+        <xsd:element ref="dcterms:modified" minOccurs="0" maxOccurs="1"/>
+        <xsd:element name="contentStatus" minOccurs="0" maxOccurs="1" type="xsd:string"/>
+      </xsd:all>
+    </xsd:complexType>
+  </xsd:schema>
+  <xs:schema xmlns:pc="http://schemas.microsoft.com/office/infopath/2007/PartnerControls" xmlns:xs="http://www.w3.org/2001/XMLSchema" targetNamespace="http://schemas.microsoft.com/office/infopath/2007/PartnerControls" elementFormDefault="qualified" attributeFormDefault="unqualified">
+    <xs:element name="Person">
+      <xs:complexType>
+        <xs:sequence>
+          <xs:element ref="pc:DisplayName" minOccurs="0"/>
+          <xs:element ref="pc:AccountId" minOccurs="0"/>
+          <xs:element ref="pc:AccountType" minOccurs="0"/>
+        </xs:sequence>
+      </xs:complexType>
+    </xs:element>
+    <xs:element name="DisplayName" type="xs:string"/>
+    <xs:element name="AccountId" type="xs:string"/>
+    <xs:element name="AccountType" type="xs:string"/>
+    <xs:element name="BDCAssociatedEntity">
+      <xs:complexType>
+        <xs:sequence>
+          <xs:element ref="pc:BDCEntity" minOccurs="0" maxOccurs="unbounded"/>
+        </xs:sequence>
+        <xs:attribute ref="pc:EntityNamespace"/>
+        <xs:attribute ref="pc:EntityName"/>
+        <xs:attribute ref="pc:SystemInstanceName"/>
+        <xs:attribute ref="pc:AssociationName"/>
+      </xs:complexType>
+    </xs:element>
+    <xs:attribute name="EntityNamespace" type="xs:string"/>
+    <xs:attribute name="EntityName" type="xs:string"/>
+    <xs:attribute name="SystemInstanceName" type="xs:string"/>
+    <xs:attribute name="AssociationName" type="xs:string"/>
+    <xs:element name="BDCEntity">
+      <xs:complexType>
+        <xs:sequence>
+          <xs:element ref="pc:EntityDisplayName" minOccurs="0"/>
+          <xs:element ref="pc:EntityInstanceReference" minOccurs="0"/>
+          <xs:element ref="pc:EntityId1" minOccurs="0"/>
+          <xs:element ref="pc:EntityId2" minOccurs="0"/>
+          <xs:element ref="pc:EntityId3" minOccurs="0"/>
+          <xs:element ref="pc:EntityId4" minOccurs="0"/>
+          <xs:element ref="pc:EntityId5" minOccurs="0"/>
+        </xs:sequence>
+      </xs:complexType>
+    </xs:element>
+    <xs:element name="EntityDisplayName" type="xs:string"/>
+    <xs:element name="EntityInstanceReference" type="xs:string"/>
+    <xs:element name="EntityId1" type="xs:string"/>
+    <xs:element name="EntityId2" type="xs:string"/>
+    <xs:element name="EntityId3" type="xs:string"/>
+    <xs:element name="EntityId4" type="xs:string"/>
+    <xs:element name="EntityId5" type="xs:string"/>
+    <xs:element name="Terms">
+      <xs:complexType>
+        <xs:sequence>
+          <xs:element ref="pc:TermInfo" minOccurs="0" maxOccurs="unbounded"/>
+        </xs:sequence>
+      </xs:complexType>
+    </xs:element>
+    <xs:element name="TermInfo">
+      <xs:complexType>
+        <xs:sequence>
+          <xs:element ref="pc:TermName" minOccurs="0"/>
+          <xs:element ref="pc:TermId" minOccurs="0"/>
+        </xs:sequence>
+      </xs:complexType>
+    </xs:element>
+    <xs:element name="TermName" type="xs:string"/>
+    <xs:element name="TermId" type="xs:string"/>
+  </xs:schema>
+</ct:contentTypeSchema>
+</file>
+
+<file path=customXml/item2.xml><?xml version="1.0" encoding="utf-8"?>
+<p:properties xmlns:p="http://schemas.microsoft.com/office/2006/metadata/properties" xmlns:xsi="http://www.w3.org/2001/XMLSchema-instance" xmlns:pc="http://schemas.microsoft.com/office/infopath/2007/PartnerControls">
+  <documentManagement>
+    <TaxCatchAll xmlns="26553de7-2a3a-444c-a024-df4cb947fd03" xsi:nil="true"/>
+    <ReferenceId xmlns="136bbc15-a01e-4b72-8bb9-2f301d916c38" xsi:nil="true"/>
+    <lcf76f155ced4ddcb4097134ff3c332f xmlns="136bbc15-a01e-4b72-8bb9-2f301d916c38">
+      <Terms xmlns="http://schemas.microsoft.com/office/infopath/2007/PartnerControls"/>
+    </lcf76f155ced4ddcb4097134ff3c332f>
+  </documentManagement>
+</p:properties>
+</file>
+
+<file path=customXml/item3.xml><?xml version="1.0" encoding="utf-8"?>
+<?mso-contentType ?>
+<FormTemplates xmlns="http://schemas.microsoft.com/sharepoint/v3/contenttype/forms">
+  <Display>DocumentLibraryForm</Display>
+  <Edit>DocumentLibraryForm</Edit>
+  <New>DocumentLibraryForm</New>
+</FormTemplates>
+</file>
+
+<file path=customXml/itemProps1.xml><?xml version="1.0" encoding="utf-8"?>
+<ds:datastoreItem xmlns:ds="http://schemas.openxmlformats.org/officeDocument/2006/customXml" ds:itemID="{B94D0753-FEC3-4CC1-BD2E-92D52477169D}">
+  <ds:schemaRefs>
+    <ds:schemaRef ds:uri="http://schemas.microsoft.com/office/2006/metadata/contentType"/>
+    <ds:schemaRef ds:uri="http://schemas.microsoft.com/office/2006/metadata/properties/metaAttributes"/>
+    <ds:schemaRef ds:uri="http://www.w3.org/2001/XMLSchema"/>
+    <ds:schemaRef ds:uri="http://schemas.microsoft.com/office/2006/metadata/properties"/>
+    <ds:schemaRef ds:uri="136bbc15-a01e-4b72-8bb9-2f301d916c38"/>
+    <ds:schemaRef ds:uri="26553de7-2a3a-444c-a024-df4cb947fd03"/>
+    <ds:schemaRef ds:uri="http://schemas.microsoft.com/office/2006/documentManagement/types"/>
+    <ds:schemaRef ds:uri="http://schemas.microsoft.com/office/infopath/2007/PartnerControls"/>
+    <ds:schemaRef ds:uri="http://schemas.openxmlformats.org/package/2006/metadata/core-properties"/>
+    <ds:schemaRef ds:uri="http://purl.org/dc/elements/1.1/"/>
+    <ds:schemaRef ds:uri="http://purl.org/dc/terms/"/>
+    <ds:schemaRef ds:uri="http://schemas.microsoft.com/internal/obd"/>
+  </ds:schemaRefs>
+</ds:datastoreItem>
+</file>
+
+<file path=customXml/itemProps2.xml><?xml version="1.0" encoding="utf-8"?>
+<ds:datastoreItem xmlns:ds="http://schemas.openxmlformats.org/officeDocument/2006/customXml" ds:itemID="{1A8647A7-FFA3-474D-BC4C-E5CA05C8A82C}">
+  <ds:schemaRefs>
+    <ds:schemaRef ds:uri="http://schemas.microsoft.com/office/2006/metadata/properties"/>
+    <ds:schemaRef ds:uri="http://schemas.microsoft.com/office/infopath/2007/PartnerControls"/>
+    <ds:schemaRef ds:uri="26553de7-2a3a-444c-a024-df4cb947fd03"/>
+    <ds:schemaRef ds:uri="136bbc15-a01e-4b72-8bb9-2f301d916c38"/>
+  </ds:schemaRefs>
+</ds:datastoreItem>
+</file>
+
+<file path=customXml/itemProps3.xml><?xml version="1.0" encoding="utf-8"?>
+<ds:datastoreItem xmlns:ds="http://schemas.openxmlformats.org/officeDocument/2006/customXml" ds:itemID="{5383136E-BEF2-4EAD-BFD9-7D52391BA0CE}">
+  <ds:schemaRefs>
+    <ds:schemaRef ds:uri="http://schemas.microsoft.com/sharepoint/v3/contenttype/forms"/>
+  </ds:schemaRefs>
+</ds:datastoreItem>
 </file>